--- a/f1_nlp_presentation.pptx
+++ b/f1_nlp_presentation.pptx
@@ -4230,538 +4230,7 @@
         <p:spPr>
           <a:xfrm>
             <a:off x="347472" y="1371600"/>
-            <a:ext cx="2148840" cy="658368"/>
-          </a:xfrm>
-          <a:prstGeom prst="rect">
-            <a:avLst/>
-          </a:prstGeom>
-          <a:solidFill>
-            <a:srgbClr val="1A1A2E"/>
-          </a:solidFill>
-          <a:ln w="16510">
-            <a:solidFill>
-              <a:srgbClr val="8888AA"/>
-            </a:solidFill>
-          </a:ln>
-        </p:spPr>
-        <p:style>
-          <a:lnRef idx="1">
-            <a:schemeClr val="accent1"/>
-          </a:lnRef>
-          <a:fillRef idx="3">
-            <a:schemeClr val="accent1"/>
-          </a:fillRef>
-          <a:effectRef idx="2">
-            <a:schemeClr val="accent1"/>
-          </a:effectRef>
-          <a:fontRef idx="minor">
-            <a:schemeClr val="lt1"/>
-          </a:fontRef>
-        </p:style>
-        <p:txBody>
-          <a:bodyPr rtlCol="0" anchor="ctr"/>
-          <a:lstStyle/>
-          <a:p>
-            <a:pPr algn="ctr"/>
-          </a:p>
-        </p:txBody>
-      </p:sp>
-      <p:sp>
-        <p:nvSpPr>
-          <p:cNvPr id="8" name="TextBox 7"/>
-          <p:cNvSpPr txBox="1"/>
-          <p:nvPr/>
-        </p:nvSpPr>
-        <p:spPr>
-          <a:xfrm>
-            <a:off x="347472" y="1444752"/>
-            <a:ext cx="2148840" cy="457200"/>
-          </a:xfrm>
-          <a:prstGeom prst="rect">
-            <a:avLst/>
-          </a:prstGeom>
-          <a:noFill/>
-        </p:spPr>
-        <p:txBody>
-          <a:bodyPr wrap="square">
-            <a:spAutoFit/>
-          </a:bodyPr>
-          <a:lstStyle/>
-          <a:p>
-            <a:pPr algn="ctr"/>
-            <a:r>
-              <a:rPr sz="1400" b="1" i="0">
-                <a:solidFill>
-                  <a:srgbClr val="8888AA"/>
-                </a:solidFill>
-              </a:rPr>
-              <a:t>tokenizer</a:t>
-            </a:r>
-          </a:p>
-        </p:txBody>
-      </p:sp>
-      <p:sp>
-        <p:nvSpPr>
-          <p:cNvPr id="9" name="TextBox 8"/>
-          <p:cNvSpPr txBox="1"/>
-          <p:nvPr/>
-        </p:nvSpPr>
-        <p:spPr>
-          <a:xfrm>
-            <a:off x="2523744" y="1536192"/>
-            <a:ext cx="228600" cy="320040"/>
-          </a:xfrm>
-          <a:prstGeom prst="rect">
-            <a:avLst/>
-          </a:prstGeom>
-          <a:noFill/>
-        </p:spPr>
-        <p:txBody>
-          <a:bodyPr wrap="square">
-            <a:spAutoFit/>
-          </a:bodyPr>
-          <a:lstStyle/>
-          <a:p>
-            <a:pPr algn="l"/>
-            <a:r>
-              <a:rPr sz="1600" b="0" i="0">
-                <a:solidFill>
-                  <a:srgbClr val="CCCCCC"/>
-                </a:solidFill>
-              </a:rPr>
-              <a:t>→</a:t>
-            </a:r>
-          </a:p>
-        </p:txBody>
-      </p:sp>
-      <p:sp>
-        <p:nvSpPr>
-          <p:cNvPr id="10" name="Rectangle 9"/>
-          <p:cNvSpPr/>
-          <p:nvPr/>
-        </p:nvSpPr>
-        <p:spPr>
-          <a:xfrm>
-            <a:off x="2679192" y="1371600"/>
-            <a:ext cx="2148840" cy="658368"/>
-          </a:xfrm>
-          <a:prstGeom prst="rect">
-            <a:avLst/>
-          </a:prstGeom>
-          <a:solidFill>
-            <a:srgbClr val="1A1A2E"/>
-          </a:solidFill>
-          <a:ln w="16510">
-            <a:solidFill>
-              <a:srgbClr val="4EA8DA"/>
-            </a:solidFill>
-          </a:ln>
-        </p:spPr>
-        <p:style>
-          <a:lnRef idx="1">
-            <a:schemeClr val="accent1"/>
-          </a:lnRef>
-          <a:fillRef idx="3">
-            <a:schemeClr val="accent1"/>
-          </a:fillRef>
-          <a:effectRef idx="2">
-            <a:schemeClr val="accent1"/>
-          </a:effectRef>
-          <a:fontRef idx="minor">
-            <a:schemeClr val="lt1"/>
-          </a:fontRef>
-        </p:style>
-        <p:txBody>
-          <a:bodyPr rtlCol="0" anchor="ctr"/>
-          <a:lstStyle/>
-          <a:p>
-            <a:pPr algn="ctr"/>
-          </a:p>
-        </p:txBody>
-      </p:sp>
-      <p:sp>
-        <p:nvSpPr>
-          <p:cNvPr id="11" name="TextBox 10"/>
-          <p:cNvSpPr txBox="1"/>
-          <p:nvPr/>
-        </p:nvSpPr>
-        <p:spPr>
-          <a:xfrm>
-            <a:off x="2679192" y="1444752"/>
-            <a:ext cx="2148840" cy="457200"/>
-          </a:xfrm>
-          <a:prstGeom prst="rect">
-            <a:avLst/>
-          </a:prstGeom>
-          <a:noFill/>
-        </p:spPr>
-        <p:txBody>
-          <a:bodyPr wrap="square">
-            <a:spAutoFit/>
-          </a:bodyPr>
-          <a:lstStyle/>
-          <a:p>
-            <a:pPr algn="ctr"/>
-            <a:r>
-              <a:rPr sz="1400" b="1" i="0">
-                <a:solidFill>
-                  <a:srgbClr val="4EA8DA"/>
-                </a:solidFill>
-              </a:rPr>
-              <a:t>tagger</a:t>
-            </a:r>
-          </a:p>
-        </p:txBody>
-      </p:sp>
-      <p:sp>
-        <p:nvSpPr>
-          <p:cNvPr id="12" name="TextBox 11"/>
-          <p:cNvSpPr txBox="1"/>
-          <p:nvPr/>
-        </p:nvSpPr>
-        <p:spPr>
-          <a:xfrm>
-            <a:off x="4855464" y="1536192"/>
-            <a:ext cx="228600" cy="320040"/>
-          </a:xfrm>
-          <a:prstGeom prst="rect">
-            <a:avLst/>
-          </a:prstGeom>
-          <a:noFill/>
-        </p:spPr>
-        <p:txBody>
-          <a:bodyPr wrap="square">
-            <a:spAutoFit/>
-          </a:bodyPr>
-          <a:lstStyle/>
-          <a:p>
-            <a:pPr algn="l"/>
-            <a:r>
-              <a:rPr sz="1600" b="0" i="0">
-                <a:solidFill>
-                  <a:srgbClr val="CCCCCC"/>
-                </a:solidFill>
-              </a:rPr>
-              <a:t>→</a:t>
-            </a:r>
-          </a:p>
-        </p:txBody>
-      </p:sp>
-      <p:sp>
-        <p:nvSpPr>
-          <p:cNvPr id="13" name="Rectangle 12"/>
-          <p:cNvSpPr/>
-          <p:nvPr/>
-        </p:nvSpPr>
-        <p:spPr>
-          <a:xfrm>
-            <a:off x="5010912" y="1371600"/>
-            <a:ext cx="2148840" cy="658368"/>
-          </a:xfrm>
-          <a:prstGeom prst="rect">
-            <a:avLst/>
-          </a:prstGeom>
-          <a:solidFill>
-            <a:srgbClr val="1A1A2E"/>
-          </a:solidFill>
-          <a:ln w="16510">
-            <a:solidFill>
-              <a:srgbClr val="4EA8DA"/>
-            </a:solidFill>
-          </a:ln>
-        </p:spPr>
-        <p:style>
-          <a:lnRef idx="1">
-            <a:schemeClr val="accent1"/>
-          </a:lnRef>
-          <a:fillRef idx="3">
-            <a:schemeClr val="accent1"/>
-          </a:fillRef>
-          <a:effectRef idx="2">
-            <a:schemeClr val="accent1"/>
-          </a:effectRef>
-          <a:fontRef idx="minor">
-            <a:schemeClr val="lt1"/>
-          </a:fontRef>
-        </p:style>
-        <p:txBody>
-          <a:bodyPr rtlCol="0" anchor="ctr"/>
-          <a:lstStyle/>
-          <a:p>
-            <a:pPr algn="ctr"/>
-          </a:p>
-        </p:txBody>
-      </p:sp>
-      <p:sp>
-        <p:nvSpPr>
-          <p:cNvPr id="14" name="TextBox 13"/>
-          <p:cNvSpPr txBox="1"/>
-          <p:nvPr/>
-        </p:nvSpPr>
-        <p:spPr>
-          <a:xfrm>
-            <a:off x="5010912" y="1444752"/>
-            <a:ext cx="2148840" cy="457200"/>
-          </a:xfrm>
-          <a:prstGeom prst="rect">
-            <a:avLst/>
-          </a:prstGeom>
-          <a:noFill/>
-        </p:spPr>
-        <p:txBody>
-          <a:bodyPr wrap="square">
-            <a:spAutoFit/>
-          </a:bodyPr>
-          <a:lstStyle/>
-          <a:p>
-            <a:pPr algn="ctr"/>
-            <a:r>
-              <a:rPr sz="1400" b="1" i="0">
-                <a:solidFill>
-                  <a:srgbClr val="4EA8DA"/>
-                </a:solidFill>
-              </a:rPr>
-              <a:t>parser</a:t>
-            </a:r>
-          </a:p>
-        </p:txBody>
-      </p:sp>
-      <p:sp>
-        <p:nvSpPr>
-          <p:cNvPr id="15" name="TextBox 14"/>
-          <p:cNvSpPr txBox="1"/>
-          <p:nvPr/>
-        </p:nvSpPr>
-        <p:spPr>
-          <a:xfrm>
-            <a:off x="7187184" y="1536192"/>
-            <a:ext cx="228600" cy="320040"/>
-          </a:xfrm>
-          <a:prstGeom prst="rect">
-            <a:avLst/>
-          </a:prstGeom>
-          <a:noFill/>
-        </p:spPr>
-        <p:txBody>
-          <a:bodyPr wrap="square">
-            <a:spAutoFit/>
-          </a:bodyPr>
-          <a:lstStyle/>
-          <a:p>
-            <a:pPr algn="l"/>
-            <a:r>
-              <a:rPr sz="1600" b="0" i="0">
-                <a:solidFill>
-                  <a:srgbClr val="CCCCCC"/>
-                </a:solidFill>
-              </a:rPr>
-              <a:t>→</a:t>
-            </a:r>
-          </a:p>
-        </p:txBody>
-      </p:sp>
-      <p:sp>
-        <p:nvSpPr>
-          <p:cNvPr id="16" name="Rectangle 15"/>
-          <p:cNvSpPr/>
-          <p:nvPr/>
-        </p:nvSpPr>
-        <p:spPr>
-          <a:xfrm>
-            <a:off x="7342632" y="1371600"/>
-            <a:ext cx="2148840" cy="658368"/>
-          </a:xfrm>
-          <a:prstGeom prst="rect">
-            <a:avLst/>
-          </a:prstGeom>
-          <a:solidFill>
-            <a:srgbClr val="1A1A2E"/>
-          </a:solidFill>
-          <a:ln w="16510">
-            <a:solidFill>
-              <a:srgbClr val="4EA8DA"/>
-            </a:solidFill>
-          </a:ln>
-        </p:spPr>
-        <p:style>
-          <a:lnRef idx="1">
-            <a:schemeClr val="accent1"/>
-          </a:lnRef>
-          <a:fillRef idx="3">
-            <a:schemeClr val="accent1"/>
-          </a:fillRef>
-          <a:effectRef idx="2">
-            <a:schemeClr val="accent1"/>
-          </a:effectRef>
-          <a:fontRef idx="minor">
-            <a:schemeClr val="lt1"/>
-          </a:fontRef>
-        </p:style>
-        <p:txBody>
-          <a:bodyPr rtlCol="0" anchor="ctr"/>
-          <a:lstStyle/>
-          <a:p>
-            <a:pPr algn="ctr"/>
-          </a:p>
-        </p:txBody>
-      </p:sp>
-      <p:sp>
-        <p:nvSpPr>
-          <p:cNvPr id="17" name="TextBox 16"/>
-          <p:cNvSpPr txBox="1"/>
-          <p:nvPr/>
-        </p:nvSpPr>
-        <p:spPr>
-          <a:xfrm>
-            <a:off x="7342632" y="1444752"/>
-            <a:ext cx="2148840" cy="457200"/>
-          </a:xfrm>
-          <a:prstGeom prst="rect">
-            <a:avLst/>
-          </a:prstGeom>
-          <a:noFill/>
-        </p:spPr>
-        <p:txBody>
-          <a:bodyPr wrap="square">
-            <a:spAutoFit/>
-          </a:bodyPr>
-          <a:lstStyle/>
-          <a:p>
-            <a:pPr algn="ctr"/>
-            <a:r>
-              <a:rPr sz="1400" b="1" i="0">
-                <a:solidFill>
-                  <a:srgbClr val="4EA8DA"/>
-                </a:solidFill>
-              </a:rPr>
-              <a:t>ner</a:t>
-            </a:r>
-          </a:p>
-        </p:txBody>
-      </p:sp>
-      <p:sp>
-        <p:nvSpPr>
-          <p:cNvPr id="18" name="TextBox 17"/>
-          <p:cNvSpPr txBox="1"/>
-          <p:nvPr/>
-        </p:nvSpPr>
-        <p:spPr>
-          <a:xfrm>
-            <a:off x="9518904" y="1536192"/>
-            <a:ext cx="228600" cy="320040"/>
-          </a:xfrm>
-          <a:prstGeom prst="rect">
-            <a:avLst/>
-          </a:prstGeom>
-          <a:noFill/>
-        </p:spPr>
-        <p:txBody>
-          <a:bodyPr wrap="square">
-            <a:spAutoFit/>
-          </a:bodyPr>
-          <a:lstStyle/>
-          <a:p>
-            <a:pPr algn="l"/>
-            <a:r>
-              <a:rPr sz="1600" b="0" i="0">
-                <a:solidFill>
-                  <a:srgbClr val="CCCCCC"/>
-                </a:solidFill>
-              </a:rPr>
-              <a:t>→</a:t>
-            </a:r>
-          </a:p>
-        </p:txBody>
-      </p:sp>
-      <p:sp>
-        <p:nvSpPr>
-          <p:cNvPr id="19" name="Rectangle 18"/>
-          <p:cNvSpPr/>
-          <p:nvPr/>
-        </p:nvSpPr>
-        <p:spPr>
-          <a:xfrm>
-            <a:off x="9674352" y="1371600"/>
-            <a:ext cx="2148840" cy="658368"/>
-          </a:xfrm>
-          <a:prstGeom prst="rect">
-            <a:avLst/>
-          </a:prstGeom>
-          <a:solidFill>
-            <a:srgbClr val="1A1A2E"/>
-          </a:solidFill>
-          <a:ln w="16510">
-            <a:solidFill>
-              <a:srgbClr val="E51B23"/>
-            </a:solidFill>
-          </a:ln>
-        </p:spPr>
-        <p:style>
-          <a:lnRef idx="1">
-            <a:schemeClr val="accent1"/>
-          </a:lnRef>
-          <a:fillRef idx="3">
-            <a:schemeClr val="accent1"/>
-          </a:fillRef>
-          <a:effectRef idx="2">
-            <a:schemeClr val="accent1"/>
-          </a:effectRef>
-          <a:fontRef idx="minor">
-            <a:schemeClr val="lt1"/>
-          </a:fontRef>
-        </p:style>
-        <p:txBody>
-          <a:bodyPr rtlCol="0" anchor="ctr"/>
-          <a:lstStyle/>
-          <a:p>
-            <a:pPr algn="ctr"/>
-          </a:p>
-        </p:txBody>
-      </p:sp>
-      <p:sp>
-        <p:nvSpPr>
-          <p:cNvPr id="20" name="TextBox 19"/>
-          <p:cNvSpPr txBox="1"/>
-          <p:nvPr/>
-        </p:nvSpPr>
-        <p:spPr>
-          <a:xfrm>
-            <a:off x="9674352" y="1444752"/>
-            <a:ext cx="2148840" cy="457200"/>
-          </a:xfrm>
-          <a:prstGeom prst="rect">
-            <a:avLst/>
-          </a:prstGeom>
-          <a:noFill/>
-        </p:spPr>
-        <p:txBody>
-          <a:bodyPr wrap="square">
-            <a:spAutoFit/>
-          </a:bodyPr>
-          <a:lstStyle/>
-          <a:p>
-            <a:pPr algn="ctr"/>
-            <a:r>
-              <a:rPr sz="1400" b="1" i="0">
-                <a:solidFill>
-                  <a:srgbClr val="E51B23"/>
-                </a:solidFill>
-              </a:rPr>
-              <a:t>matcher</a:t>
-            </a:r>
-          </a:p>
-        </p:txBody>
-      </p:sp>
-      <p:sp>
-        <p:nvSpPr>
-          <p:cNvPr id="21" name="Rectangle 20"/>
-          <p:cNvSpPr/>
-          <p:nvPr/>
-        </p:nvSpPr>
-        <p:spPr>
-          <a:xfrm>
-            <a:off x="347472" y="2286000"/>
-            <a:ext cx="5577840" cy="4023360"/>
+            <a:ext cx="5303520" cy="4572000"/>
           </a:xfrm>
           <a:prstGeom prst="rect">
             <a:avLst/>
@@ -4799,14 +4268,14 @@
       </p:sp>
       <p:sp>
         <p:nvSpPr>
-          <p:cNvPr id="22" name="TextBox 21"/>
+          <p:cNvPr id="8" name="TextBox 7"/>
           <p:cNvSpPr txBox="1"/>
           <p:nvPr/>
         </p:nvSpPr>
         <p:spPr>
           <a:xfrm>
-            <a:off x="530352" y="2395728"/>
-            <a:ext cx="5303520" cy="384048"/>
+            <a:off x="530352" y="1481328"/>
+            <a:ext cx="5029200" cy="384048"/>
           </a:xfrm>
           <a:prstGeom prst="rect">
             <a:avLst/>
@@ -4826,21 +4295,21 @@
                   <a:srgbClr val="4EA8DA"/>
                 </a:solidFill>
               </a:rPr>
-              <a:t>Inspecting Token Attributes</a:t>
-            </a:r>
-          </a:p>
-        </p:txBody>
-      </p:sp>
-      <p:sp>
-        <p:nvSpPr>
-          <p:cNvPr id="23" name="TextBox 22"/>
+              <a:t>spaCy Pipeline &amp; Rules</a:t>
+            </a:r>
+          </a:p>
+        </p:txBody>
+      </p:sp>
+      <p:sp>
+        <p:nvSpPr>
+          <p:cNvPr id="9" name="TextBox 8"/>
           <p:cNvSpPr txBox="1"/>
           <p:nvPr/>
         </p:nvSpPr>
         <p:spPr>
           <a:xfrm>
-            <a:off x="530352" y="2816352"/>
-            <a:ext cx="5303520" cy="3401568"/>
+            <a:off x="530352" y="1901952"/>
+            <a:ext cx="5029200" cy="3950208"/>
           </a:xfrm>
           <a:prstGeom prst="rect">
             <a:avLst/>
@@ -4859,12 +4328,12 @@
               </a:spcBef>
             </a:pPr>
             <a:r>
-              <a:rPr sz="1350">
+              <a:rPr sz="1300">
                 <a:solidFill>
                   <a:srgbClr val="CCCCCC"/>
                 </a:solidFill>
               </a:rPr>
-              <a:t>▸  We inspect the output of spaCy's standard processing chain.</a:t>
+              <a:t>✦  Internal Pipeline: tokenizer -&gt; tagger -&gt; parser -&gt; ner -&gt; matcher.</a:t>
             </a:r>
           </a:p>
           <a:p>
@@ -4874,12 +4343,12 @@
               </a:spcBef>
             </a:pPr>
             <a:r>
-              <a:rPr sz="1350">
+              <a:rPr sz="1300">
                 <a:solidFill>
                   <a:srgbClr val="CCCCCC"/>
                 </a:solidFill>
               </a:rPr>
-              <a:t>▸  Tokenization: Splits text into words and punctuation.</a:t>
+              <a:t>✦  Token Attributes: POS tag identifies grammatical roles, lemmatizer base dictionaries normalize jargon.</a:t>
             </a:r>
           </a:p>
           <a:p>
@@ -4889,12 +4358,12 @@
               </a:spcBef>
             </a:pPr>
             <a:r>
-              <a:rPr sz="1350">
+              <a:rPr sz="1300">
                 <a:solidFill>
                   <a:srgbClr val="CCCCCC"/>
                 </a:solidFill>
               </a:rPr>
-              <a:t>▸  Part-of-Speech (POS) Tagging: Identifies grammatical roles (Noun, Verb, Adjective).</a:t>
+              <a:t>✦  Programmatic intent matcher rules capture exact domain commands.</a:t>
             </a:r>
           </a:p>
           <a:p>
@@ -4904,12 +4373,12 @@
               </a:spcBef>
             </a:pPr>
             <a:r>
-              <a:rPr sz="1350">
+              <a:rPr sz="1300">
                 <a:solidFill>
                   <a:srgbClr val="CCCCCC"/>
                 </a:solidFill>
               </a:rPr>
-              <a:t>▸  Lemmatization: Extracts root words.</a:t>
+              <a:t>✦  PIT_COMMAND: matches 'box' or 'pit' words.</a:t>
             </a:r>
           </a:p>
           <a:p>
@@ -4919,36 +4388,51 @@
               </a:spcBef>
             </a:pPr>
             <a:r>
-              <a:rPr sz="1350">
+              <a:rPr sz="1300">
                 <a:solidFill>
                   <a:srgbClr val="CCCCCC"/>
                 </a:solidFill>
               </a:rPr>
-              <a:t>▸  This structured metadata allows us to build programmatic rules on top of raw text.</a:t>
-            </a:r>
-          </a:p>
-        </p:txBody>
-      </p:sp>
-      <p:sp>
-        <p:nvSpPr>
-          <p:cNvPr id="24" name="Rectangle 23"/>
+              <a:t>✦  GAP_REPORT: matches 'gap' followed by prepositions.</a:t>
+            </a:r>
+          </a:p>
+          <a:p>
+            <a:pPr>
+              <a:spcBef>
+                <a:spcPts val="400"/>
+              </a:spcBef>
+            </a:pPr>
+            <a:r>
+              <a:rPr sz="1300">
+                <a:solidFill>
+                  <a:srgbClr val="CCCCCC"/>
+                </a:solidFill>
+              </a:rPr>
+              <a:t>✦  MODE_SWITCH: matches 'mode' followed by digits (e.g. 'mode 7').</a:t>
+            </a:r>
+          </a:p>
+        </p:txBody>
+      </p:sp>
+      <p:sp>
+        <p:nvSpPr>
+          <p:cNvPr id="10" name="Rectangle 9"/>
           <p:cNvSpPr/>
           <p:nvPr/>
         </p:nvSpPr>
         <p:spPr>
           <a:xfrm>
-            <a:off x="6126480" y="2286000"/>
-            <a:ext cx="5715000" cy="4023360"/>
+            <a:off x="5943600" y="1371600"/>
+            <a:ext cx="5897880" cy="4572000"/>
           </a:xfrm>
           <a:prstGeom prst="rect">
             <a:avLst/>
           </a:prstGeom>
           <a:solidFill>
-            <a:srgbClr val="1A1A2E"/>
+            <a:srgbClr val="121222"/>
           </a:solidFill>
-          <a:ln w="10160">
+          <a:ln w="12700">
             <a:solidFill>
-              <a:srgbClr val="303055"/>
+              <a:srgbClr val="404060"/>
             </a:solidFill>
           </a:ln>
         </p:spPr>
@@ -4976,14 +4460,14 @@
       </p:sp>
       <p:sp>
         <p:nvSpPr>
-          <p:cNvPr id="25" name="TextBox 24"/>
+          <p:cNvPr id="11" name="TextBox 10"/>
           <p:cNvSpPr txBox="1"/>
           <p:nvPr/>
         </p:nvSpPr>
         <p:spPr>
           <a:xfrm>
-            <a:off x="6309360" y="2395728"/>
-            <a:ext cx="5440680" cy="384048"/>
+            <a:off x="6080760" y="1463040"/>
+            <a:ext cx="5623560" cy="4389120"/>
           </a:xfrm>
           <a:prstGeom prst="rect">
             <a:avLst/>
@@ -4991,117 +4475,236 @@
           <a:noFill/>
         </p:spPr>
         <p:txBody>
-          <a:bodyPr wrap="square">
+          <a:bodyPr wrap="none">
             <a:spAutoFit/>
           </a:bodyPr>
           <a:lstStyle/>
           <a:p>
-            <a:pPr algn="l"/>
-            <a:r>
-              <a:rPr sz="1500" b="1" i="0">
-                <a:solidFill>
-                  <a:srgbClr val="E51B23"/>
-                </a:solidFill>
-              </a:rPr>
-              <a:t>Token Matchers for Functional Intent</a:t>
-            </a:r>
-          </a:p>
-        </p:txBody>
-      </p:sp>
-      <p:sp>
-        <p:nvSpPr>
-          <p:cNvPr id="26" name="TextBox 25"/>
-          <p:cNvSpPr txBox="1"/>
-          <p:nvPr/>
-        </p:nvSpPr>
-        <p:spPr>
-          <a:xfrm>
-            <a:off x="6309360" y="2816352"/>
-            <a:ext cx="5440680" cy="3401568"/>
-          </a:xfrm>
-          <a:prstGeom prst="rect">
-            <a:avLst/>
-          </a:prstGeom>
-          <a:noFill/>
-        </p:spPr>
-        <p:txBody>
-          <a:bodyPr wrap="square">
-            <a:spAutoFit/>
-          </a:bodyPr>
-          <a:lstStyle/>
-          <a:p>
-            <a:pPr>
-              <a:spcBef>
-                <a:spcPts val="400"/>
-              </a:spcBef>
-            </a:pPr>
-            <a:r>
-              <a:rPr sz="1350">
-                <a:solidFill>
-                  <a:srgbClr val="CCCCCC"/>
-                </a:solidFill>
-              </a:rPr>
-              <a:t>▸  Built custom Matcher rules to extract specific command structures:</a:t>
-            </a:r>
-          </a:p>
-          <a:p>
-            <a:pPr>
-              <a:spcBef>
-                <a:spcPts val="400"/>
-              </a:spcBef>
-            </a:pPr>
-            <a:r>
-              <a:rPr sz="1350">
-                <a:solidFill>
-                  <a:srgbClr val="CCCCCC"/>
-                </a:solidFill>
-              </a:rPr>
-              <a:t>▸    ✦  PIT_COMMAND: Matches variations of 'box' or 'pit'.</a:t>
-            </a:r>
-          </a:p>
-          <a:p>
-            <a:pPr>
-              <a:spcBef>
-                <a:spcPts val="400"/>
-              </a:spcBef>
-            </a:pPr>
-            <a:r>
-              <a:rPr sz="1350">
-                <a:solidFill>
-                  <a:srgbClr val="CCCCCC"/>
-                </a:solidFill>
-              </a:rPr>
-              <a:t>▸    ✦  GAP_REPORT: Matches 'gap' followed by a relative word ('behind', 'ahead').</a:t>
-            </a:r>
-          </a:p>
-          <a:p>
-            <a:pPr>
-              <a:spcBef>
-                <a:spcPts val="400"/>
-              </a:spcBef>
-            </a:pPr>
-            <a:r>
-              <a:rPr sz="1350">
-                <a:solidFill>
-                  <a:srgbClr val="CCCCCC"/>
-                </a:solidFill>
-              </a:rPr>
-              <a:t>▸    ✦  MODE_SWITCH: Matches the word 'mode' followed by a number (e.g. 'mode 7').</a:t>
-            </a:r>
-          </a:p>
-          <a:p>
-            <a:pPr>
-              <a:spcBef>
-                <a:spcPts val="400"/>
-              </a:spcBef>
-            </a:pPr>
-            <a:r>
-              <a:rPr sz="1350">
-                <a:solidFill>
-                  <a:srgbClr val="CCCCCC"/>
-                </a:solidFill>
-              </a:rPr>
-              <a:t>▸  Matches are resolved instantly using exact patterns rather than statistical guesses.</a:t>
+            <a:pPr>
+              <a:spcBef>
+                <a:spcPts val="0"/>
+              </a:spcBef>
+              <a:spcAft>
+                <a:spcPts val="0"/>
+              </a:spcAft>
+            </a:pPr>
+            <a:r>
+              <a:rPr sz="1200">
+                <a:solidFill>
+                  <a:srgbClr val="FFD866"/>
+                </a:solidFill>
+                <a:latin typeface="Courier New"/>
+              </a:rPr>
+              <a:t>import spacy</a:t>
+            </a:r>
+          </a:p>
+          <a:p>
+            <a:pPr>
+              <a:spcBef>
+                <a:spcPts val="0"/>
+              </a:spcBef>
+              <a:spcAft>
+                <a:spcPts val="0"/>
+              </a:spcAft>
+            </a:pPr>
+            <a:r>
+              <a:rPr sz="1200">
+                <a:solidFill>
+                  <a:srgbClr val="FFD866"/>
+                </a:solidFill>
+                <a:latin typeface="Courier New"/>
+              </a:rPr>
+              <a:t>from spacy.matcher import Matcher</a:t>
+            </a:r>
+          </a:p>
+          <a:p>
+            <a:pPr>
+              <a:spcBef>
+                <a:spcPts val="0"/>
+              </a:spcBef>
+              <a:spcAft>
+                <a:spcPts val="0"/>
+              </a:spcAft>
+            </a:pPr>
+            <a:r>
+              <a:rPr sz="1200">
+                <a:solidFill>
+                  <a:srgbClr val="50FA7B"/>
+                </a:solidFill>
+                <a:latin typeface="Courier New"/>
+              </a:rPr>
+              <a:t/>
+            </a:r>
+          </a:p>
+          <a:p>
+            <a:pPr>
+              <a:spcBef>
+                <a:spcPts val="0"/>
+              </a:spcBef>
+              <a:spcAft>
+                <a:spcPts val="0"/>
+              </a:spcAft>
+            </a:pPr>
+            <a:r>
+              <a:rPr sz="1200">
+                <a:solidFill>
+                  <a:srgbClr val="50FA7B"/>
+                </a:solidFill>
+                <a:latin typeface="Courier New"/>
+              </a:rPr>
+              <a:t>nlp = spacy.load('en_core_web_sm')</a:t>
+            </a:r>
+          </a:p>
+          <a:p>
+            <a:pPr>
+              <a:spcBef>
+                <a:spcPts val="0"/>
+              </a:spcBef>
+              <a:spcAft>
+                <a:spcPts val="0"/>
+              </a:spcAft>
+            </a:pPr>
+            <a:r>
+              <a:rPr sz="1200">
+                <a:solidFill>
+                  <a:srgbClr val="50FA7B"/>
+                </a:solidFill>
+                <a:latin typeface="Courier New"/>
+              </a:rPr>
+              <a:t>matcher = Matcher(nlp.vocab)</a:t>
+            </a:r>
+          </a:p>
+          <a:p>
+            <a:pPr>
+              <a:spcBef>
+                <a:spcPts val="0"/>
+              </a:spcBef>
+              <a:spcAft>
+                <a:spcPts val="0"/>
+              </a:spcAft>
+            </a:pPr>
+            <a:r>
+              <a:rPr sz="1200">
+                <a:solidFill>
+                  <a:srgbClr val="50FA7B"/>
+                </a:solidFill>
+                <a:latin typeface="Courier New"/>
+              </a:rPr>
+              <a:t/>
+            </a:r>
+          </a:p>
+          <a:p>
+            <a:pPr>
+              <a:spcBef>
+                <a:spcPts val="0"/>
+              </a:spcBef>
+              <a:spcAft>
+                <a:spcPts val="0"/>
+              </a:spcAft>
+            </a:pPr>
+            <a:r>
+              <a:rPr sz="1200">
+                <a:solidFill>
+                  <a:srgbClr val="8888AA"/>
+                </a:solidFill>
+                <a:latin typeface="Courier New"/>
+              </a:rPr>
+              <a:t># Match pit commands</a:t>
+            </a:r>
+          </a:p>
+          <a:p>
+            <a:pPr>
+              <a:spcBef>
+                <a:spcPts val="0"/>
+              </a:spcBef>
+              <a:spcAft>
+                <a:spcPts val="0"/>
+              </a:spcAft>
+            </a:pPr>
+            <a:r>
+              <a:rPr sz="1200">
+                <a:solidFill>
+                  <a:srgbClr val="50FA7B"/>
+                </a:solidFill>
+                <a:latin typeface="Courier New"/>
+              </a:rPr>
+              <a:t>pit_pattern = [{'LOWER': {'IN': ['box', 'pit']}}]</a:t>
+            </a:r>
+          </a:p>
+          <a:p>
+            <a:pPr>
+              <a:spcBef>
+                <a:spcPts val="0"/>
+              </a:spcBef>
+              <a:spcAft>
+                <a:spcPts val="0"/>
+              </a:spcAft>
+            </a:pPr>
+            <a:r>
+              <a:rPr sz="1200">
+                <a:solidFill>
+                  <a:srgbClr val="50FA7B"/>
+                </a:solidFill>
+                <a:latin typeface="Courier New"/>
+              </a:rPr>
+              <a:t>matcher.add('PIT_COMMAND', [pit_pattern])</a:t>
+            </a:r>
+          </a:p>
+          <a:p>
+            <a:pPr>
+              <a:spcBef>
+                <a:spcPts val="0"/>
+              </a:spcBef>
+              <a:spcAft>
+                <a:spcPts val="0"/>
+              </a:spcAft>
+            </a:pPr>
+            <a:r>
+              <a:rPr sz="1200">
+                <a:solidFill>
+                  <a:srgbClr val="50FA7B"/>
+                </a:solidFill>
+                <a:latin typeface="Courier New"/>
+              </a:rPr>
+              <a:t/>
+            </a:r>
+          </a:p>
+          <a:p>
+            <a:pPr>
+              <a:spcBef>
+                <a:spcPts val="0"/>
+              </a:spcBef>
+              <a:spcAft>
+                <a:spcPts val="0"/>
+              </a:spcAft>
+            </a:pPr>
+            <a:r>
+              <a:rPr sz="1200">
+                <a:solidFill>
+                  <a:srgbClr val="50FA7B"/>
+                </a:solidFill>
+                <a:latin typeface="Courier New"/>
+              </a:rPr>
+              <a:t>doc = nlp('box this lap')</a:t>
+            </a:r>
+          </a:p>
+          <a:p>
+            <a:pPr>
+              <a:spcBef>
+                <a:spcPts val="0"/>
+              </a:spcBef>
+              <a:spcAft>
+                <a:spcPts val="0"/>
+              </a:spcAft>
+            </a:pPr>
+            <a:r>
+              <a:rPr sz="1200">
+                <a:solidFill>
+                  <a:srgbClr val="50FA7B"/>
+                </a:solidFill>
+                <a:latin typeface="Courier New"/>
+              </a:rPr>
+              <a:t>matches = matcher(doc)</a:t>
             </a:r>
           </a:p>
         </p:txBody>
@@ -5329,7 +4932,7 @@
         <p:spPr>
           <a:xfrm>
             <a:off x="347472" y="1371600"/>
-            <a:ext cx="5577840" cy="2103120"/>
+            <a:ext cx="5303520" cy="4572000"/>
           </a:xfrm>
           <a:prstGeom prst="rect">
             <a:avLst/>
@@ -5374,7 +4977,7 @@
         <p:spPr>
           <a:xfrm>
             <a:off x="530352" y="1481328"/>
-            <a:ext cx="5303520" cy="384048"/>
+            <a:ext cx="5029200" cy="384048"/>
           </a:xfrm>
           <a:prstGeom prst="rect">
             <a:avLst/>
@@ -5391,10 +4994,10 @@
             <a:r>
               <a:rPr sz="1500" b="1" i="0">
                 <a:solidFill>
-                  <a:srgbClr val="E51B23"/>
-                </a:solidFill>
-              </a:rPr>
-              <a:t>Why Default NER Fails</a:t>
+                  <a:srgbClr val="4EA8DA"/>
+                </a:solidFill>
+              </a:rPr>
+              <a:t>Custom NER Model</a:t>
             </a:r>
           </a:p>
         </p:txBody>
@@ -5408,7 +5011,7 @@
         <p:spPr>
           <a:xfrm>
             <a:off x="530352" y="1901952"/>
-            <a:ext cx="5303520" cy="1481328"/>
+            <a:ext cx="5029200" cy="3950208"/>
           </a:xfrm>
           <a:prstGeom prst="rect">
             <a:avLst/>
@@ -5427,12 +5030,12 @@
               </a:spcBef>
             </a:pPr>
             <a:r>
-              <a:rPr sz="1350">
+              <a:rPr sz="1300">
                 <a:solidFill>
                   <a:srgbClr val="CCCCCC"/>
                 </a:solidFill>
               </a:rPr>
-              <a:t>▸  Standard NER models (trained on general corpora) fail on F1 jargon.</a:t>
+              <a:t>✦  Default pre-trained NER fails on F1 entities ('Red Bull' is marked product).</a:t>
             </a:r>
           </a:p>
           <a:p>
@@ -5442,12 +5045,12 @@
               </a:spcBef>
             </a:pPr>
             <a:r>
-              <a:rPr sz="1350">
+              <a:rPr sz="1300">
                 <a:solidFill>
                   <a:srgbClr val="CCCCCC"/>
                 </a:solidFill>
               </a:rPr>
-              <a:t>▸  It labels 'Red Bull' as a PRODUCT/ORGANIZATION instead of a Constructor TEAM.</a:t>
+              <a:t>✦  We created 30 custom annotated sentences containing entities.</a:t>
             </a:r>
           </a:p>
           <a:p>
@@ -5457,12 +5060,12 @@
               </a:spcBef>
             </a:pPr>
             <a:r>
-              <a:rPr sz="1350">
+              <a:rPr sz="1300">
                 <a:solidFill>
                   <a:srgbClr val="CCCCCC"/>
                 </a:solidFill>
               </a:rPr>
-              <a:t>▸  It misses drivers like 'Verstappen' or labels them as generic PERSON.</a:t>
+              <a:t>✦  Entities trained: DRIVER, TEAM, TIRE_COMPOUND, STRATEGY.</a:t>
             </a:r>
           </a:p>
           <a:p>
@@ -5472,12 +5075,12 @@
               </a:spcBef>
             </a:pPr>
             <a:r>
-              <a:rPr sz="1350">
+              <a:rPr sz="1300">
                 <a:solidFill>
                   <a:srgbClr val="CCCCCC"/>
                 </a:solidFill>
               </a:rPr>
-              <a:t>▸  It ignores tire compounds entirely ('softs' is not recognized).</a:t>
+              <a:t>✦  Training: blank spaCy model, updated weights over 30 epochs.</a:t>
             </a:r>
           </a:p>
           <a:p>
@@ -5487,12 +5090,12 @@
               </a:spcBef>
             </a:pPr>
             <a:r>
-              <a:rPr sz="1350">
+              <a:rPr sz="1300">
                 <a:solidFill>
                   <a:srgbClr val="CCCCCC"/>
                 </a:solidFill>
               </a:rPr>
-              <a:t>▸  Solution: Train a blank spaCy model on custom labeled data.</a:t>
+              <a:t>✦  Model successfully recognizes unseen custom F1 entities in context.</a:t>
             </a:r>
           </a:p>
         </p:txBody>
@@ -5505,18 +5108,18 @@
         </p:nvSpPr>
         <p:spPr>
           <a:xfrm>
-            <a:off x="6126480" y="1371600"/>
-            <a:ext cx="5715000" cy="2103120"/>
+            <a:off x="5943600" y="1371600"/>
+            <a:ext cx="5897880" cy="4572000"/>
           </a:xfrm>
           <a:prstGeom prst="rect">
             <a:avLst/>
           </a:prstGeom>
           <a:solidFill>
-            <a:srgbClr val="1A1A2E"/>
+            <a:srgbClr val="121222"/>
           </a:solidFill>
-          <a:ln w="10160">
+          <a:ln w="12700">
             <a:solidFill>
-              <a:srgbClr val="303055"/>
+              <a:srgbClr val="404060"/>
             </a:solidFill>
           </a:ln>
         </p:spPr>
@@ -5550,8 +5153,8 @@
         </p:nvSpPr>
         <p:spPr>
           <a:xfrm>
-            <a:off x="6309360" y="1481328"/>
-            <a:ext cx="5440680" cy="384048"/>
+            <a:off x="6080760" y="1463040"/>
+            <a:ext cx="5623560" cy="4389120"/>
           </a:xfrm>
           <a:prstGeom prst="rect">
             <a:avLst/>
@@ -5559,569 +5162,274 @@
           <a:noFill/>
         </p:spPr>
         <p:txBody>
-          <a:bodyPr wrap="square">
+          <a:bodyPr wrap="none">
             <a:spAutoFit/>
           </a:bodyPr>
           <a:lstStyle/>
           <a:p>
-            <a:pPr algn="l"/>
-            <a:r>
-              <a:rPr sz="1500" b="1" i="0">
-                <a:solidFill>
-                  <a:srgbClr val="4EA8DA"/>
-                </a:solidFill>
-              </a:rPr>
-              <a:t>Model Training Protocol</a:t>
-            </a:r>
-          </a:p>
-        </p:txBody>
-      </p:sp>
-      <p:sp>
-        <p:nvSpPr>
-          <p:cNvPr id="12" name="TextBox 11"/>
-          <p:cNvSpPr txBox="1"/>
-          <p:nvPr/>
-        </p:nvSpPr>
-        <p:spPr>
-          <a:xfrm>
-            <a:off x="6309360" y="1901952"/>
-            <a:ext cx="5440680" cy="1481328"/>
-          </a:xfrm>
-          <a:prstGeom prst="rect">
-            <a:avLst/>
-          </a:prstGeom>
-          <a:noFill/>
-        </p:spPr>
-        <p:txBody>
-          <a:bodyPr wrap="square">
-            <a:spAutoFit/>
-          </a:bodyPr>
-          <a:lstStyle/>
-          <a:p>
-            <a:pPr>
-              <a:spcBef>
-                <a:spcPts val="400"/>
-              </a:spcBef>
-            </a:pPr>
-            <a:r>
-              <a:rPr sz="1350">
-                <a:solidFill>
-                  <a:srgbClr val="CCCCCC"/>
-                </a:solidFill>
-              </a:rPr>
-              <a:t>▸  Created 30 manually annotated F1 radio sentences.</a:t>
-            </a:r>
-          </a:p>
-          <a:p>
-            <a:pPr>
-              <a:spcBef>
-                <a:spcPts val="400"/>
-              </a:spcBef>
-            </a:pPr>
-            <a:r>
-              <a:rPr sz="1350">
-                <a:solidFill>
-                  <a:srgbClr val="CCCCCC"/>
-                </a:solidFill>
-              </a:rPr>
-              <a:t>▸  Example: 'Hamilton is on softs, Red Bull box box.'</a:t>
-            </a:r>
-          </a:p>
-          <a:p>
-            <a:pPr>
-              <a:spcBef>
-                <a:spcPts val="400"/>
-              </a:spcBef>
-            </a:pPr>
-            <a:r>
-              <a:rPr sz="1350">
-                <a:solidFill>
-                  <a:srgbClr val="CCCCCC"/>
-                </a:solidFill>
-              </a:rPr>
-              <a:t>▸    - Hamilton → DRIVER  |  softs → TIRE_COMPOUND</a:t>
-            </a:r>
-          </a:p>
-          <a:p>
-            <a:pPr>
-              <a:spcBef>
-                <a:spcPts val="400"/>
-              </a:spcBef>
-            </a:pPr>
-            <a:r>
-              <a:rPr sz="1350">
-                <a:solidFill>
-                  <a:srgbClr val="CCCCCC"/>
-                </a:solidFill>
-              </a:rPr>
-              <a:t>▸    - Red Bull → TEAM  |  box box → STRATEGY</a:t>
-            </a:r>
-          </a:p>
-          <a:p>
-            <a:pPr>
-              <a:spcBef>
-                <a:spcPts val="400"/>
-              </a:spcBef>
-            </a:pPr>
-            <a:r>
-              <a:rPr sz="1350">
-                <a:solidFill>
-                  <a:srgbClr val="CCCCCC"/>
-                </a:solidFill>
-              </a:rPr>
-              <a:t>▸  Trained for 30 epochs using spaCy blank English model pipeline.</a:t>
-            </a:r>
-          </a:p>
-        </p:txBody>
-      </p:sp>
-      <p:sp>
-        <p:nvSpPr>
-          <p:cNvPr id="13" name="Rectangle 12"/>
-          <p:cNvSpPr/>
-          <p:nvPr/>
-        </p:nvSpPr>
-        <p:spPr>
-          <a:xfrm>
-            <a:off x="347472" y="3657600"/>
-            <a:ext cx="5577840" cy="1234440"/>
-          </a:xfrm>
-          <a:prstGeom prst="rect">
-            <a:avLst/>
-          </a:prstGeom>
-          <a:solidFill>
-            <a:srgbClr val="1A1A2E"/>
-          </a:solidFill>
-          <a:ln w="15240">
-            <a:solidFill>
-              <a:srgbClr val="E51B23"/>
-            </a:solidFill>
-          </a:ln>
-        </p:spPr>
-        <p:style>
-          <a:lnRef idx="1">
-            <a:schemeClr val="accent1"/>
-          </a:lnRef>
-          <a:fillRef idx="3">
-            <a:schemeClr val="accent1"/>
-          </a:fillRef>
-          <a:effectRef idx="2">
-            <a:schemeClr val="accent1"/>
-          </a:effectRef>
-          <a:fontRef idx="minor">
-            <a:schemeClr val="lt1"/>
-          </a:fontRef>
-        </p:style>
-        <p:txBody>
-          <a:bodyPr rtlCol="0" anchor="ctr"/>
-          <a:lstStyle/>
-          <a:p>
-            <a:pPr algn="ctr"/>
-          </a:p>
-        </p:txBody>
-      </p:sp>
-      <p:sp>
-        <p:nvSpPr>
-          <p:cNvPr id="14" name="TextBox 13"/>
-          <p:cNvSpPr txBox="1"/>
-          <p:nvPr/>
-        </p:nvSpPr>
-        <p:spPr>
-          <a:xfrm>
-            <a:off x="530352" y="3767328"/>
-            <a:ext cx="5212080" cy="365760"/>
-          </a:xfrm>
-          <a:prstGeom prst="rect">
-            <a:avLst/>
-          </a:prstGeom>
-          <a:noFill/>
-        </p:spPr>
-        <p:txBody>
-          <a:bodyPr wrap="square">
-            <a:spAutoFit/>
-          </a:bodyPr>
-          <a:lstStyle/>
-          <a:p>
-            <a:pPr algn="l"/>
-            <a:r>
-              <a:rPr sz="1600" b="1" i="0">
-                <a:solidFill>
-                  <a:srgbClr val="E51B23"/>
-                </a:solidFill>
-              </a:rPr>
-              <a:t>DRIVER</a:t>
-            </a:r>
-          </a:p>
-        </p:txBody>
-      </p:sp>
-      <p:sp>
-        <p:nvSpPr>
-          <p:cNvPr id="15" name="TextBox 14"/>
-          <p:cNvSpPr txBox="1"/>
-          <p:nvPr/>
-        </p:nvSpPr>
-        <p:spPr>
-          <a:xfrm>
-            <a:off x="530352" y="4279392"/>
-            <a:ext cx="5212080" cy="502920"/>
-          </a:xfrm>
-          <a:prstGeom prst="rect">
-            <a:avLst/>
-          </a:prstGeom>
-          <a:noFill/>
-        </p:spPr>
-        <p:txBody>
-          <a:bodyPr wrap="square">
-            <a:spAutoFit/>
-          </a:bodyPr>
-          <a:lstStyle/>
-          <a:p>
-            <a:pPr algn="l"/>
-            <a:r>
-              <a:rPr sz="1300" b="0" i="1">
-                <a:solidFill>
-                  <a:srgbClr val="CCCCCC"/>
-                </a:solidFill>
-              </a:rPr>
-              <a:t>Recognized examples: Hamilton, Verstappen, Leclerc, Russell</a:t>
-            </a:r>
-          </a:p>
-        </p:txBody>
-      </p:sp>
-      <p:sp>
-        <p:nvSpPr>
-          <p:cNvPr id="16" name="Rectangle 15"/>
-          <p:cNvSpPr/>
-          <p:nvPr/>
-        </p:nvSpPr>
-        <p:spPr>
-          <a:xfrm>
-            <a:off x="6245352" y="3657600"/>
-            <a:ext cx="5577840" cy="1234440"/>
-          </a:xfrm>
-          <a:prstGeom prst="rect">
-            <a:avLst/>
-          </a:prstGeom>
-          <a:solidFill>
-            <a:srgbClr val="1A1A2E"/>
-          </a:solidFill>
-          <a:ln w="15240">
-            <a:solidFill>
-              <a:srgbClr val="4EA8DA"/>
-            </a:solidFill>
-          </a:ln>
-        </p:spPr>
-        <p:style>
-          <a:lnRef idx="1">
-            <a:schemeClr val="accent1"/>
-          </a:lnRef>
-          <a:fillRef idx="3">
-            <a:schemeClr val="accent1"/>
-          </a:fillRef>
-          <a:effectRef idx="2">
-            <a:schemeClr val="accent1"/>
-          </a:effectRef>
-          <a:fontRef idx="minor">
-            <a:schemeClr val="lt1"/>
-          </a:fontRef>
-        </p:style>
-        <p:txBody>
-          <a:bodyPr rtlCol="0" anchor="ctr"/>
-          <a:lstStyle/>
-          <a:p>
-            <a:pPr algn="ctr"/>
-          </a:p>
-        </p:txBody>
-      </p:sp>
-      <p:sp>
-        <p:nvSpPr>
-          <p:cNvPr id="17" name="TextBox 16"/>
-          <p:cNvSpPr txBox="1"/>
-          <p:nvPr/>
-        </p:nvSpPr>
-        <p:spPr>
-          <a:xfrm>
-            <a:off x="6428232" y="3767328"/>
-            <a:ext cx="5212080" cy="365760"/>
-          </a:xfrm>
-          <a:prstGeom prst="rect">
-            <a:avLst/>
-          </a:prstGeom>
-          <a:noFill/>
-        </p:spPr>
-        <p:txBody>
-          <a:bodyPr wrap="square">
-            <a:spAutoFit/>
-          </a:bodyPr>
-          <a:lstStyle/>
-          <a:p>
-            <a:pPr algn="l"/>
-            <a:r>
-              <a:rPr sz="1600" b="1" i="0">
-                <a:solidFill>
-                  <a:srgbClr val="4EA8DA"/>
-                </a:solidFill>
-              </a:rPr>
-              <a:t>TEAM</a:t>
-            </a:r>
-          </a:p>
-        </p:txBody>
-      </p:sp>
-      <p:sp>
-        <p:nvSpPr>
-          <p:cNvPr id="18" name="TextBox 17"/>
-          <p:cNvSpPr txBox="1"/>
-          <p:nvPr/>
-        </p:nvSpPr>
-        <p:spPr>
-          <a:xfrm>
-            <a:off x="6428232" y="4279392"/>
-            <a:ext cx="5212080" cy="502920"/>
-          </a:xfrm>
-          <a:prstGeom prst="rect">
-            <a:avLst/>
-          </a:prstGeom>
-          <a:noFill/>
-        </p:spPr>
-        <p:txBody>
-          <a:bodyPr wrap="square">
-            <a:spAutoFit/>
-          </a:bodyPr>
-          <a:lstStyle/>
-          <a:p>
-            <a:pPr algn="l"/>
-            <a:r>
-              <a:rPr sz="1300" b="0" i="1">
-                <a:solidFill>
-                  <a:srgbClr val="CCCCCC"/>
-                </a:solidFill>
-              </a:rPr>
-              <a:t>Recognized examples: Red Bull, McLaren, Ferrari, Mercedes</a:t>
-            </a:r>
-          </a:p>
-        </p:txBody>
-      </p:sp>
-      <p:sp>
-        <p:nvSpPr>
-          <p:cNvPr id="19" name="Rectangle 18"/>
-          <p:cNvSpPr/>
-          <p:nvPr/>
-        </p:nvSpPr>
-        <p:spPr>
-          <a:xfrm>
-            <a:off x="347472" y="5074920"/>
-            <a:ext cx="5577840" cy="1234440"/>
-          </a:xfrm>
-          <a:prstGeom prst="rect">
-            <a:avLst/>
-          </a:prstGeom>
-          <a:solidFill>
-            <a:srgbClr val="1A1A2E"/>
-          </a:solidFill>
-          <a:ln w="15240">
-            <a:solidFill>
-              <a:srgbClr val="FFC00B"/>
-            </a:solidFill>
-          </a:ln>
-        </p:spPr>
-        <p:style>
-          <a:lnRef idx="1">
-            <a:schemeClr val="accent1"/>
-          </a:lnRef>
-          <a:fillRef idx="3">
-            <a:schemeClr val="accent1"/>
-          </a:fillRef>
-          <a:effectRef idx="2">
-            <a:schemeClr val="accent1"/>
-          </a:effectRef>
-          <a:fontRef idx="minor">
-            <a:schemeClr val="lt1"/>
-          </a:fontRef>
-        </p:style>
-        <p:txBody>
-          <a:bodyPr rtlCol="0" anchor="ctr"/>
-          <a:lstStyle/>
-          <a:p>
-            <a:pPr algn="ctr"/>
-          </a:p>
-        </p:txBody>
-      </p:sp>
-      <p:sp>
-        <p:nvSpPr>
-          <p:cNvPr id="20" name="TextBox 19"/>
-          <p:cNvSpPr txBox="1"/>
-          <p:nvPr/>
-        </p:nvSpPr>
-        <p:spPr>
-          <a:xfrm>
-            <a:off x="530352" y="5184648"/>
-            <a:ext cx="5212080" cy="365760"/>
-          </a:xfrm>
-          <a:prstGeom prst="rect">
-            <a:avLst/>
-          </a:prstGeom>
-          <a:noFill/>
-        </p:spPr>
-        <p:txBody>
-          <a:bodyPr wrap="square">
-            <a:spAutoFit/>
-          </a:bodyPr>
-          <a:lstStyle/>
-          <a:p>
-            <a:pPr algn="l"/>
-            <a:r>
-              <a:rPr sz="1600" b="1" i="0">
-                <a:solidFill>
-                  <a:srgbClr val="FFC00B"/>
-                </a:solidFill>
-              </a:rPr>
-              <a:t>TIRE_COMPOUND</a:t>
-            </a:r>
-          </a:p>
-        </p:txBody>
-      </p:sp>
-      <p:sp>
-        <p:nvSpPr>
-          <p:cNvPr id="21" name="TextBox 20"/>
-          <p:cNvSpPr txBox="1"/>
-          <p:nvPr/>
-        </p:nvSpPr>
-        <p:spPr>
-          <a:xfrm>
-            <a:off x="530352" y="5696712"/>
-            <a:ext cx="5212080" cy="502920"/>
-          </a:xfrm>
-          <a:prstGeom prst="rect">
-            <a:avLst/>
-          </a:prstGeom>
-          <a:noFill/>
-        </p:spPr>
-        <p:txBody>
-          <a:bodyPr wrap="square">
-            <a:spAutoFit/>
-          </a:bodyPr>
-          <a:lstStyle/>
-          <a:p>
-            <a:pPr algn="l"/>
-            <a:r>
-              <a:rPr sz="1300" b="0" i="1">
-                <a:solidFill>
-                  <a:srgbClr val="CCCCCC"/>
-                </a:solidFill>
-              </a:rPr>
-              <a:t>Recognized examples: soft, medium, hard, inters</a:t>
-            </a:r>
-          </a:p>
-        </p:txBody>
-      </p:sp>
-      <p:sp>
-        <p:nvSpPr>
-          <p:cNvPr id="22" name="Rectangle 21"/>
-          <p:cNvSpPr/>
-          <p:nvPr/>
-        </p:nvSpPr>
-        <p:spPr>
-          <a:xfrm>
-            <a:off x="6245352" y="5074920"/>
-            <a:ext cx="5577840" cy="1234440"/>
-          </a:xfrm>
-          <a:prstGeom prst="rect">
-            <a:avLst/>
-          </a:prstGeom>
-          <a:solidFill>
-            <a:srgbClr val="1A1A2E"/>
-          </a:solidFill>
-          <a:ln w="15240">
-            <a:solidFill>
-              <a:srgbClr val="50FA7B"/>
-            </a:solidFill>
-          </a:ln>
-        </p:spPr>
-        <p:style>
-          <a:lnRef idx="1">
-            <a:schemeClr val="accent1"/>
-          </a:lnRef>
-          <a:fillRef idx="3">
-            <a:schemeClr val="accent1"/>
-          </a:fillRef>
-          <a:effectRef idx="2">
-            <a:schemeClr val="accent1"/>
-          </a:effectRef>
-          <a:fontRef idx="minor">
-            <a:schemeClr val="lt1"/>
-          </a:fontRef>
-        </p:style>
-        <p:txBody>
-          <a:bodyPr rtlCol="0" anchor="ctr"/>
-          <a:lstStyle/>
-          <a:p>
-            <a:pPr algn="ctr"/>
-          </a:p>
-        </p:txBody>
-      </p:sp>
-      <p:sp>
-        <p:nvSpPr>
-          <p:cNvPr id="23" name="TextBox 22"/>
-          <p:cNvSpPr txBox="1"/>
-          <p:nvPr/>
-        </p:nvSpPr>
-        <p:spPr>
-          <a:xfrm>
-            <a:off x="6428232" y="5184648"/>
-            <a:ext cx="5212080" cy="365760"/>
-          </a:xfrm>
-          <a:prstGeom prst="rect">
-            <a:avLst/>
-          </a:prstGeom>
-          <a:noFill/>
-        </p:spPr>
-        <p:txBody>
-          <a:bodyPr wrap="square">
-            <a:spAutoFit/>
-          </a:bodyPr>
-          <a:lstStyle/>
-          <a:p>
-            <a:pPr algn="l"/>
-            <a:r>
-              <a:rPr sz="1600" b="1" i="0">
+            <a:pPr>
+              <a:spcBef>
+                <a:spcPts val="0"/>
+              </a:spcBef>
+              <a:spcAft>
+                <a:spcPts val="0"/>
+              </a:spcAft>
+            </a:pPr>
+            <a:r>
+              <a:rPr sz="1200">
+                <a:solidFill>
+                  <a:srgbClr val="FFD866"/>
+                </a:solidFill>
+                <a:latin typeface="Courier New"/>
+              </a:rPr>
+              <a:t>import spacy</a:t>
+            </a:r>
+          </a:p>
+          <a:p>
+            <a:pPr>
+              <a:spcBef>
+                <a:spcPts val="0"/>
+              </a:spcBef>
+              <a:spcAft>
+                <a:spcPts val="0"/>
+              </a:spcAft>
+            </a:pPr>
+            <a:r>
+              <a:rPr sz="1200">
+                <a:solidFill>
+                  <a:srgbClr val="FFD866"/>
+                </a:solidFill>
+                <a:latin typeface="Courier New"/>
+              </a:rPr>
+              <a:t>from spacy.training import Example</a:t>
+            </a:r>
+          </a:p>
+          <a:p>
+            <a:pPr>
+              <a:spcBef>
+                <a:spcPts val="0"/>
+              </a:spcBef>
+              <a:spcAft>
+                <a:spcPts val="0"/>
+              </a:spcAft>
+            </a:pPr>
+            <a:r>
+              <a:rPr sz="1200">
                 <a:solidFill>
                   <a:srgbClr val="50FA7B"/>
                 </a:solidFill>
-              </a:rPr>
-              <a:t>STRATEGY</a:t>
-            </a:r>
-          </a:p>
-        </p:txBody>
-      </p:sp>
-      <p:sp>
-        <p:nvSpPr>
-          <p:cNvPr id="24" name="TextBox 23"/>
-          <p:cNvSpPr txBox="1"/>
-          <p:nvPr/>
-        </p:nvSpPr>
-        <p:spPr>
-          <a:xfrm>
-            <a:off x="6428232" y="5696712"/>
-            <a:ext cx="5212080" cy="502920"/>
-          </a:xfrm>
-          <a:prstGeom prst="rect">
-            <a:avLst/>
-          </a:prstGeom>
-          <a:noFill/>
-        </p:spPr>
-        <p:txBody>
-          <a:bodyPr wrap="square">
-            <a:spAutoFit/>
-          </a:bodyPr>
-          <a:lstStyle/>
-          <a:p>
-            <a:pPr algn="l"/>
-            <a:r>
-              <a:rPr sz="1300" b="0" i="1">
-                <a:solidFill>
-                  <a:srgbClr val="CCCCCC"/>
-                </a:solidFill>
-              </a:rPr>
-              <a:t>Recognized examples: box box, mode 7, strat 8, undercut</a:t>
+                <a:latin typeface="Courier New"/>
+              </a:rPr>
+              <a:t/>
+            </a:r>
+          </a:p>
+          <a:p>
+            <a:pPr>
+              <a:spcBef>
+                <a:spcPts val="0"/>
+              </a:spcBef>
+              <a:spcAft>
+                <a:spcPts val="0"/>
+              </a:spcAft>
+            </a:pPr>
+            <a:r>
+              <a:rPr sz="1200">
+                <a:solidFill>
+                  <a:srgbClr val="50FA7B"/>
+                </a:solidFill>
+                <a:latin typeface="Courier New"/>
+              </a:rPr>
+              <a:t>nlp_blank = spacy.blank('en')</a:t>
+            </a:r>
+          </a:p>
+          <a:p>
+            <a:pPr>
+              <a:spcBef>
+                <a:spcPts val="0"/>
+              </a:spcBef>
+              <a:spcAft>
+                <a:spcPts val="0"/>
+              </a:spcAft>
+            </a:pPr>
+            <a:r>
+              <a:rPr sz="1200">
+                <a:solidFill>
+                  <a:srgbClr val="50FA7B"/>
+                </a:solidFill>
+                <a:latin typeface="Courier New"/>
+              </a:rPr>
+              <a:t>ner = nlp_blank.add_pipe('ner')</a:t>
+            </a:r>
+          </a:p>
+          <a:p>
+            <a:pPr>
+              <a:spcBef>
+                <a:spcPts val="0"/>
+              </a:spcBef>
+              <a:spcAft>
+                <a:spcPts val="0"/>
+              </a:spcAft>
+            </a:pPr>
+            <a:r>
+              <a:rPr sz="1200">
+                <a:solidFill>
+                  <a:srgbClr val="50FA7B"/>
+                </a:solidFill>
+                <a:latin typeface="Courier New"/>
+              </a:rPr>
+              <a:t>ner.add_label('DRIVER')</a:t>
+            </a:r>
+          </a:p>
+          <a:p>
+            <a:pPr>
+              <a:spcBef>
+                <a:spcPts val="0"/>
+              </a:spcBef>
+              <a:spcAft>
+                <a:spcPts val="0"/>
+              </a:spcAft>
+            </a:pPr>
+            <a:r>
+              <a:rPr sz="1200">
+                <a:solidFill>
+                  <a:srgbClr val="50FA7B"/>
+                </a:solidFill>
+                <a:latin typeface="Courier New"/>
+              </a:rPr>
+              <a:t/>
+            </a:r>
+          </a:p>
+          <a:p>
+            <a:pPr>
+              <a:spcBef>
+                <a:spcPts val="0"/>
+              </a:spcBef>
+              <a:spcAft>
+                <a:spcPts val="0"/>
+              </a:spcAft>
+            </a:pPr>
+            <a:r>
+              <a:rPr sz="1200">
+                <a:solidFill>
+                  <a:srgbClr val="8888AA"/>
+                </a:solidFill>
+                <a:latin typeface="Courier New"/>
+              </a:rPr>
+              <a:t># Training iterations</a:t>
+            </a:r>
+          </a:p>
+          <a:p>
+            <a:pPr>
+              <a:spcBef>
+                <a:spcPts val="0"/>
+              </a:spcBef>
+              <a:spcAft>
+                <a:spcPts val="0"/>
+              </a:spcAft>
+            </a:pPr>
+            <a:r>
+              <a:rPr sz="1200">
+                <a:solidFill>
+                  <a:srgbClr val="50FA7B"/>
+                </a:solidFill>
+                <a:latin typeface="Courier New"/>
+              </a:rPr>
+              <a:t>nlp_blank.begin_training()</a:t>
+            </a:r>
+          </a:p>
+          <a:p>
+            <a:pPr>
+              <a:spcBef>
+                <a:spcPts val="0"/>
+              </a:spcBef>
+              <a:spcAft>
+                <a:spcPts val="0"/>
+              </a:spcAft>
+            </a:pPr>
+            <a:r>
+              <a:rPr sz="1200">
+                <a:solidFill>
+                  <a:srgbClr val="FFD866"/>
+                </a:solidFill>
+                <a:latin typeface="Courier New"/>
+              </a:rPr>
+              <a:t>for epoch in range(30):</a:t>
+            </a:r>
+          </a:p>
+          <a:p>
+            <a:pPr>
+              <a:spcBef>
+                <a:spcPts val="0"/>
+              </a:spcBef>
+              <a:spcAft>
+                <a:spcPts val="0"/>
+              </a:spcAft>
+            </a:pPr>
+            <a:r>
+              <a:rPr sz="1200">
+                <a:solidFill>
+                  <a:srgbClr val="FFD866"/>
+                </a:solidFill>
+                <a:latin typeface="Courier New"/>
+              </a:rPr>
+              <a:t>    for text, ann in TRAIN_DATA:</a:t>
+            </a:r>
+          </a:p>
+          <a:p>
+            <a:pPr>
+              <a:spcBef>
+                <a:spcPts val="0"/>
+              </a:spcBef>
+              <a:spcAft>
+                <a:spcPts val="0"/>
+              </a:spcAft>
+            </a:pPr>
+            <a:r>
+              <a:rPr sz="1200">
+                <a:solidFill>
+                  <a:srgbClr val="50FA7B"/>
+                </a:solidFill>
+                <a:latin typeface="Courier New"/>
+              </a:rPr>
+              <a:t>        example = Example.from_dict(</a:t>
+            </a:r>
+          </a:p>
+          <a:p>
+            <a:pPr>
+              <a:spcBef>
+                <a:spcPts val="0"/>
+              </a:spcBef>
+              <a:spcAft>
+                <a:spcPts val="0"/>
+              </a:spcAft>
+            </a:pPr>
+            <a:r>
+              <a:rPr sz="1200">
+                <a:solidFill>
+                  <a:srgbClr val="50FA7B"/>
+                </a:solidFill>
+                <a:latin typeface="Courier New"/>
+              </a:rPr>
+              <a:t>            nlp_blank.make_doc(text), ann)</a:t>
+            </a:r>
+          </a:p>
+          <a:p>
+            <a:pPr>
+              <a:spcBef>
+                <a:spcPts val="0"/>
+              </a:spcBef>
+              <a:spcAft>
+                <a:spcPts val="0"/>
+              </a:spcAft>
+            </a:pPr>
+            <a:r>
+              <a:rPr sz="1200">
+                <a:solidFill>
+                  <a:srgbClr val="50FA7B"/>
+                </a:solidFill>
+                <a:latin typeface="Courier New"/>
+              </a:rPr>
+              <a:t>        nlp_blank.update([example])</a:t>
             </a:r>
           </a:p>
         </p:txBody>
@@ -6349,7 +5657,7 @@
         <p:spPr>
           <a:xfrm>
             <a:off x="347472" y="1371600"/>
-            <a:ext cx="6858000" cy="1664208"/>
+            <a:ext cx="5303520" cy="4572000"/>
           </a:xfrm>
           <a:prstGeom prst="rect">
             <a:avLst/>
@@ -6394,7 +5702,7 @@
         <p:spPr>
           <a:xfrm>
             <a:off x="530352" y="1481328"/>
-            <a:ext cx="6583680" cy="384048"/>
+            <a:ext cx="5029200" cy="384048"/>
           </a:xfrm>
           <a:prstGeom prst="rect">
             <a:avLst/>
@@ -6414,7 +5722,7 @@
                   <a:srgbClr val="4EA8DA"/>
                 </a:solidFill>
               </a:rPr>
-              <a:t>What is RAG?</a:t>
+              <a:t>RAG System</a:t>
             </a:r>
           </a:p>
         </p:txBody>
@@ -6428,7 +5736,7 @@
         <p:spPr>
           <a:xfrm>
             <a:off x="530352" y="1901952"/>
-            <a:ext cx="6583680" cy="1042416"/>
+            <a:ext cx="5029200" cy="3950208"/>
           </a:xfrm>
           <a:prstGeom prst="rect">
             <a:avLst/>
@@ -6447,12 +5755,12 @@
               </a:spcBef>
             </a:pPr>
             <a:r>
-              <a:rPr sz="1350">
+              <a:rPr sz="1300">
                 <a:solidFill>
                   <a:srgbClr val="CCCCCC"/>
                 </a:solidFill>
               </a:rPr>
-              <a:t>▸  LLMs suffer from knowledge cutoff and hallucinate facts they were not trained on.</a:t>
+              <a:t>✦  RAG retrieves target facts first, preventing model hallucinations.</a:t>
             </a:r>
           </a:p>
           <a:p>
@@ -6462,12 +5770,12 @@
               </a:spcBef>
             </a:pPr>
             <a:r>
-              <a:rPr sz="1350">
+              <a:rPr sz="1300">
                 <a:solidFill>
                   <a:srgbClr val="CCCCCC"/>
                 </a:solidFill>
               </a:rPr>
-              <a:t>▸  RAG solves this: retrieves target facts first, then generates a grounded answer.</a:t>
+              <a:t>✦  Our RAG searches 5 structured F1 databases using MiniLM embeddings.</a:t>
             </a:r>
           </a:p>
           <a:p>
@@ -6477,12 +5785,12 @@
               </a:spcBef>
             </a:pPr>
             <a:r>
-              <a:rPr sz="1350">
+              <a:rPr sz="1300">
                 <a:solidFill>
                   <a:srgbClr val="CCCCCC"/>
                 </a:solidFill>
               </a:rPr>
-              <a:t>▸  Our system queries 5 structured F1 databases before formulating strategist prompts.</a:t>
+              <a:t>✦  Databases: Radio corpus, Regulations, Spec sheets, Drivers list, Race results.</a:t>
             </a:r>
           </a:p>
           <a:p>
@@ -6492,12 +5800,27 @@
               </a:spcBef>
             </a:pPr>
             <a:r>
-              <a:rPr sz="1350">
+              <a:rPr sz="1300">
                 <a:solidFill>
                   <a:srgbClr val="CCCCCC"/>
                 </a:solidFill>
               </a:rPr>
-              <a:t>▸  A prestigious modern NLP topic that solves the hallucination problem.</a:t>
+              <a:t>✦  Builds consolidated race strategist prompt template containing fetched data.</a:t>
+            </a:r>
+          </a:p>
+          <a:p>
+            <a:pPr>
+              <a:spcBef>
+                <a:spcPts val="400"/>
+              </a:spcBef>
+            </a:pPr>
+            <a:r>
+              <a:rPr sz="1300">
+                <a:solidFill>
+                  <a:srgbClr val="CCCCCC"/>
+                </a:solidFill>
+              </a:rPr>
+              <a:t>✦  Highly practical, production-level NLP architecture.</a:t>
             </a:r>
           </a:p>
         </p:txBody>
@@ -6510,18 +5833,18 @@
         </p:nvSpPr>
         <p:spPr>
           <a:xfrm>
-            <a:off x="347472" y="3200400"/>
-            <a:ext cx="2816352" cy="749808"/>
+            <a:off x="5943600" y="1371600"/>
+            <a:ext cx="5897880" cy="4572000"/>
           </a:xfrm>
           <a:prstGeom prst="rect">
             <a:avLst/>
           </a:prstGeom>
           <a:solidFill>
-            <a:srgbClr val="1A1A2E"/>
+            <a:srgbClr val="121222"/>
           </a:solidFill>
-          <a:ln w="16510">
+          <a:ln w="12700">
             <a:solidFill>
-              <a:srgbClr val="4EA8DA"/>
+              <a:srgbClr val="404060"/>
             </a:solidFill>
           </a:ln>
         </p:spPr>
@@ -6555,8 +5878,8 @@
         </p:nvSpPr>
         <p:spPr>
           <a:xfrm>
-            <a:off x="347472" y="3310128"/>
-            <a:ext cx="2816352" cy="457200"/>
+            <a:off x="6080760" y="1463040"/>
+            <a:ext cx="5623560" cy="4389120"/>
           </a:xfrm>
           <a:prstGeom prst="rect">
             <a:avLst/>
@@ -6564,1288 +5887,217 @@
           <a:noFill/>
         </p:spPr>
         <p:txBody>
-          <a:bodyPr wrap="square">
+          <a:bodyPr wrap="none">
             <a:spAutoFit/>
           </a:bodyPr>
           <a:lstStyle/>
           <a:p>
-            <a:pPr algn="ctr"/>
-            <a:r>
-              <a:rPr sz="1300" b="1" i="0">
-                <a:solidFill>
-                  <a:srgbClr val="4EA8DA"/>
-                </a:solidFill>
-              </a:rPr>
-              <a:t>1. User Query</a:t>
-            </a:r>
-          </a:p>
-        </p:txBody>
-      </p:sp>
-      <p:sp>
-        <p:nvSpPr>
-          <p:cNvPr id="12" name="TextBox 11"/>
-          <p:cNvSpPr txBox="1"/>
-          <p:nvPr/>
-        </p:nvSpPr>
-        <p:spPr>
-          <a:xfrm>
-            <a:off x="3182112" y="3337560"/>
-            <a:ext cx="256032" cy="365760"/>
-          </a:xfrm>
-          <a:prstGeom prst="rect">
-            <a:avLst/>
-          </a:prstGeom>
-          <a:noFill/>
-        </p:spPr>
-        <p:txBody>
-          <a:bodyPr wrap="square">
-            <a:spAutoFit/>
-          </a:bodyPr>
-          <a:lstStyle/>
-          <a:p>
-            <a:pPr algn="l"/>
-            <a:r>
-              <a:rPr sz="1800" b="0" i="0">
-                <a:solidFill>
-                  <a:srgbClr val="E51B23"/>
-                </a:solidFill>
-              </a:rPr>
-              <a:t>→</a:t>
-            </a:r>
-          </a:p>
-        </p:txBody>
-      </p:sp>
-      <p:sp>
-        <p:nvSpPr>
-          <p:cNvPr id="13" name="Rectangle 12"/>
-          <p:cNvSpPr/>
-          <p:nvPr/>
-        </p:nvSpPr>
-        <p:spPr>
-          <a:xfrm>
-            <a:off x="3419856" y="3200400"/>
-            <a:ext cx="2816352" cy="749808"/>
-          </a:xfrm>
-          <a:prstGeom prst="rect">
-            <a:avLst/>
-          </a:prstGeom>
-          <a:solidFill>
-            <a:srgbClr val="1A1A2E"/>
-          </a:solidFill>
-          <a:ln w="16510">
-            <a:solidFill>
-              <a:srgbClr val="FFC00B"/>
-            </a:solidFill>
-          </a:ln>
-        </p:spPr>
-        <p:style>
-          <a:lnRef idx="1">
-            <a:schemeClr val="accent1"/>
-          </a:lnRef>
-          <a:fillRef idx="3">
-            <a:schemeClr val="accent1"/>
-          </a:fillRef>
-          <a:effectRef idx="2">
-            <a:schemeClr val="accent1"/>
-          </a:effectRef>
-          <a:fontRef idx="minor">
-            <a:schemeClr val="lt1"/>
-          </a:fontRef>
-        </p:style>
-        <p:txBody>
-          <a:bodyPr rtlCol="0" anchor="ctr"/>
-          <a:lstStyle/>
-          <a:p>
-            <a:pPr algn="ctr"/>
-          </a:p>
-        </p:txBody>
-      </p:sp>
-      <p:sp>
-        <p:nvSpPr>
-          <p:cNvPr id="14" name="TextBox 13"/>
-          <p:cNvSpPr txBox="1"/>
-          <p:nvPr/>
-        </p:nvSpPr>
-        <p:spPr>
-          <a:xfrm>
-            <a:off x="3419856" y="3310128"/>
-            <a:ext cx="2816352" cy="457200"/>
-          </a:xfrm>
-          <a:prstGeom prst="rect">
-            <a:avLst/>
-          </a:prstGeom>
-          <a:noFill/>
-        </p:spPr>
-        <p:txBody>
-          <a:bodyPr wrap="square">
-            <a:spAutoFit/>
-          </a:bodyPr>
-          <a:lstStyle/>
-          <a:p>
-            <a:pPr algn="ctr"/>
-            <a:r>
-              <a:rPr sz="1300" b="1" i="0">
-                <a:solidFill>
-                  <a:srgbClr val="FFC00B"/>
-                </a:solidFill>
-              </a:rPr>
-              <a:t>2. Search 5 DBs</a:t>
-            </a:r>
-          </a:p>
-        </p:txBody>
-      </p:sp>
-      <p:sp>
-        <p:nvSpPr>
-          <p:cNvPr id="15" name="TextBox 14"/>
-          <p:cNvSpPr txBox="1"/>
-          <p:nvPr/>
-        </p:nvSpPr>
-        <p:spPr>
-          <a:xfrm>
-            <a:off x="6254496" y="3337560"/>
-            <a:ext cx="256032" cy="365760"/>
-          </a:xfrm>
-          <a:prstGeom prst="rect">
-            <a:avLst/>
-          </a:prstGeom>
-          <a:noFill/>
-        </p:spPr>
-        <p:txBody>
-          <a:bodyPr wrap="square">
-            <a:spAutoFit/>
-          </a:bodyPr>
-          <a:lstStyle/>
-          <a:p>
-            <a:pPr algn="l"/>
-            <a:r>
-              <a:rPr sz="1800" b="0" i="0">
-                <a:solidFill>
-                  <a:srgbClr val="E51B23"/>
-                </a:solidFill>
-              </a:rPr>
-              <a:t>→</a:t>
-            </a:r>
-          </a:p>
-        </p:txBody>
-      </p:sp>
-      <p:sp>
-        <p:nvSpPr>
-          <p:cNvPr id="16" name="Rectangle 15"/>
-          <p:cNvSpPr/>
-          <p:nvPr/>
-        </p:nvSpPr>
-        <p:spPr>
-          <a:xfrm>
-            <a:off x="6492240" y="3200400"/>
-            <a:ext cx="2816352" cy="749808"/>
-          </a:xfrm>
-          <a:prstGeom prst="rect">
-            <a:avLst/>
-          </a:prstGeom>
-          <a:solidFill>
-            <a:srgbClr val="1A1A2E"/>
-          </a:solidFill>
-          <a:ln w="16510">
-            <a:solidFill>
-              <a:srgbClr val="FFC00B"/>
-            </a:solidFill>
-          </a:ln>
-        </p:spPr>
-        <p:style>
-          <a:lnRef idx="1">
-            <a:schemeClr val="accent1"/>
-          </a:lnRef>
-          <a:fillRef idx="3">
-            <a:schemeClr val="accent1"/>
-          </a:fillRef>
-          <a:effectRef idx="2">
-            <a:schemeClr val="accent1"/>
-          </a:effectRef>
-          <a:fontRef idx="minor">
-            <a:schemeClr val="lt1"/>
-          </a:fontRef>
-        </p:style>
-        <p:txBody>
-          <a:bodyPr rtlCol="0" anchor="ctr"/>
-          <a:lstStyle/>
-          <a:p>
-            <a:pPr algn="ctr"/>
-          </a:p>
-        </p:txBody>
-      </p:sp>
-      <p:sp>
-        <p:nvSpPr>
-          <p:cNvPr id="17" name="TextBox 16"/>
-          <p:cNvSpPr txBox="1"/>
-          <p:nvPr/>
-        </p:nvSpPr>
-        <p:spPr>
-          <a:xfrm>
-            <a:off x="6492240" y="3310128"/>
-            <a:ext cx="2816352" cy="457200"/>
-          </a:xfrm>
-          <a:prstGeom prst="rect">
-            <a:avLst/>
-          </a:prstGeom>
-          <a:noFill/>
-        </p:spPr>
-        <p:txBody>
-          <a:bodyPr wrap="square">
-            <a:spAutoFit/>
-          </a:bodyPr>
-          <a:lstStyle/>
-          <a:p>
-            <a:pPr algn="ctr"/>
-            <a:r>
-              <a:rPr sz="1300" b="1" i="0">
-                <a:solidFill>
-                  <a:srgbClr val="FFC00B"/>
-                </a:solidFill>
-              </a:rPr>
-              <a:t>3. Build Prompt</a:t>
-            </a:r>
-          </a:p>
-        </p:txBody>
-      </p:sp>
-      <p:sp>
-        <p:nvSpPr>
-          <p:cNvPr id="18" name="TextBox 17"/>
-          <p:cNvSpPr txBox="1"/>
-          <p:nvPr/>
-        </p:nvSpPr>
-        <p:spPr>
-          <a:xfrm>
-            <a:off x="9326880" y="3337560"/>
-            <a:ext cx="256032" cy="365760"/>
-          </a:xfrm>
-          <a:prstGeom prst="rect">
-            <a:avLst/>
-          </a:prstGeom>
-          <a:noFill/>
-        </p:spPr>
-        <p:txBody>
-          <a:bodyPr wrap="square">
-            <a:spAutoFit/>
-          </a:bodyPr>
-          <a:lstStyle/>
-          <a:p>
-            <a:pPr algn="l"/>
-            <a:r>
-              <a:rPr sz="1800" b="0" i="0">
-                <a:solidFill>
-                  <a:srgbClr val="E51B23"/>
-                </a:solidFill>
-              </a:rPr>
-              <a:t>→</a:t>
-            </a:r>
-          </a:p>
-        </p:txBody>
-      </p:sp>
-      <p:sp>
-        <p:nvSpPr>
-          <p:cNvPr id="19" name="Rectangle 18"/>
-          <p:cNvSpPr/>
-          <p:nvPr/>
-        </p:nvSpPr>
-        <p:spPr>
-          <a:xfrm>
-            <a:off x="9564624" y="3200400"/>
-            <a:ext cx="2816352" cy="749808"/>
-          </a:xfrm>
-          <a:prstGeom prst="rect">
-            <a:avLst/>
-          </a:prstGeom>
-          <a:solidFill>
-            <a:srgbClr val="1A1A2E"/>
-          </a:solidFill>
-          <a:ln w="16510">
-            <a:solidFill>
-              <a:srgbClr val="50FA7B"/>
-            </a:solidFill>
-          </a:ln>
-        </p:spPr>
-        <p:style>
-          <a:lnRef idx="1">
-            <a:schemeClr val="accent1"/>
-          </a:lnRef>
-          <a:fillRef idx="3">
-            <a:schemeClr val="accent1"/>
-          </a:fillRef>
-          <a:effectRef idx="2">
-            <a:schemeClr val="accent1"/>
-          </a:effectRef>
-          <a:fontRef idx="minor">
-            <a:schemeClr val="lt1"/>
-          </a:fontRef>
-        </p:style>
-        <p:txBody>
-          <a:bodyPr rtlCol="0" anchor="ctr"/>
-          <a:lstStyle/>
-          <a:p>
-            <a:pPr algn="ctr"/>
-          </a:p>
-        </p:txBody>
-      </p:sp>
-      <p:sp>
-        <p:nvSpPr>
-          <p:cNvPr id="20" name="TextBox 19"/>
-          <p:cNvSpPr txBox="1"/>
-          <p:nvPr/>
-        </p:nvSpPr>
-        <p:spPr>
-          <a:xfrm>
-            <a:off x="9564624" y="3310128"/>
-            <a:ext cx="2816352" cy="457200"/>
-          </a:xfrm>
-          <a:prstGeom prst="rect">
-            <a:avLst/>
-          </a:prstGeom>
-          <a:noFill/>
-        </p:spPr>
-        <p:txBody>
-          <a:bodyPr wrap="square">
-            <a:spAutoFit/>
-          </a:bodyPr>
-          <a:lstStyle/>
-          <a:p>
-            <a:pPr algn="ctr"/>
-            <a:r>
-              <a:rPr sz="1300" b="1" i="0">
+            <a:pPr>
+              <a:spcBef>
+                <a:spcPts val="0"/>
+              </a:spcBef>
+              <a:spcAft>
+                <a:spcPts val="0"/>
+              </a:spcAft>
+            </a:pPr>
+            <a:r>
+              <a:rPr sz="1200">
+                <a:solidFill>
+                  <a:srgbClr val="FFD866"/>
+                </a:solidFill>
+                <a:latin typeface="Courier New"/>
+              </a:rPr>
+              <a:t>from sentence_transformers import SentenceTransformer</a:t>
+            </a:r>
+          </a:p>
+          <a:p>
+            <a:pPr>
+              <a:spcBef>
+                <a:spcPts val="0"/>
+              </a:spcBef>
+              <a:spcAft>
+                <a:spcPts val="0"/>
+              </a:spcAft>
+            </a:pPr>
+            <a:r>
+              <a:rPr sz="1200">
                 <a:solidFill>
                   <a:srgbClr val="50FA7B"/>
                 </a:solidFill>
-              </a:rPr>
-              <a:t>4. Generate Answer</a:t>
-            </a:r>
-          </a:p>
-        </p:txBody>
-      </p:sp>
-      <p:sp>
-        <p:nvSpPr>
-          <p:cNvPr id="21" name="Rectangle 20"/>
-          <p:cNvSpPr/>
-          <p:nvPr/>
-        </p:nvSpPr>
-        <p:spPr>
-          <a:xfrm>
-            <a:off x="347472" y="4133087"/>
-            <a:ext cx="2240280" cy="1051560"/>
-          </a:xfrm>
-          <a:prstGeom prst="rect">
-            <a:avLst/>
-          </a:prstGeom>
-          <a:solidFill>
-            <a:srgbClr val="1A1A2E"/>
-          </a:solidFill>
-          <a:ln w="11430">
-            <a:solidFill>
-              <a:srgbClr val="FFC00B"/>
-            </a:solidFill>
-          </a:ln>
-        </p:spPr>
-        <p:style>
-          <a:lnRef idx="1">
-            <a:schemeClr val="accent1"/>
-          </a:lnRef>
-          <a:fillRef idx="3">
-            <a:schemeClr val="accent1"/>
-          </a:fillRef>
-          <a:effectRef idx="2">
-            <a:schemeClr val="accent1"/>
-          </a:effectRef>
-          <a:fontRef idx="minor">
-            <a:schemeClr val="lt1"/>
-          </a:fontRef>
-        </p:style>
-        <p:txBody>
-          <a:bodyPr rtlCol="0" anchor="ctr"/>
-          <a:lstStyle/>
-          <a:p>
-            <a:pPr algn="ctr"/>
-          </a:p>
-        </p:txBody>
-      </p:sp>
-      <p:sp>
-        <p:nvSpPr>
-          <p:cNvPr id="22" name="TextBox 21"/>
-          <p:cNvSpPr txBox="1"/>
-          <p:nvPr/>
-        </p:nvSpPr>
-        <p:spPr>
-          <a:xfrm>
-            <a:off x="457200" y="4206240"/>
-            <a:ext cx="2057400" cy="384048"/>
-          </a:xfrm>
-          <a:prstGeom prst="rect">
-            <a:avLst/>
-          </a:prstGeom>
-          <a:noFill/>
-        </p:spPr>
-        <p:txBody>
-          <a:bodyPr wrap="square">
-            <a:spAutoFit/>
-          </a:bodyPr>
-          <a:lstStyle/>
-          <a:p>
-            <a:pPr algn="l"/>
-            <a:r>
-              <a:rPr sz="1250" b="1" i="0">
-                <a:solidFill>
-                  <a:srgbClr val="FFC00B"/>
-                </a:solidFill>
-              </a:rPr>
-              <a:t>📻 Radio Corpus</a:t>
-            </a:r>
-          </a:p>
-        </p:txBody>
-      </p:sp>
-      <p:sp>
-        <p:nvSpPr>
-          <p:cNvPr id="23" name="TextBox 22"/>
-          <p:cNvSpPr txBox="1"/>
-          <p:nvPr/>
-        </p:nvSpPr>
-        <p:spPr>
-          <a:xfrm>
-            <a:off x="457200" y="4590288"/>
-            <a:ext cx="2057400" cy="502920"/>
-          </a:xfrm>
-          <a:prstGeom prst="rect">
-            <a:avLst/>
-          </a:prstGeom>
-          <a:noFill/>
-        </p:spPr>
-        <p:txBody>
-          <a:bodyPr wrap="square">
-            <a:spAutoFit/>
-          </a:bodyPr>
-          <a:lstStyle/>
-          <a:p>
-            <a:pPr algn="l"/>
-            <a:r>
-              <a:rPr sz="1150" b="0" i="0">
-                <a:solidFill>
-                  <a:srgbClr val="CCCCCC"/>
-                </a:solidFill>
-              </a:rPr>
-              <a:t>18,574 driver messages</a:t>
-            </a:r>
-          </a:p>
-        </p:txBody>
-      </p:sp>
-      <p:sp>
-        <p:nvSpPr>
-          <p:cNvPr id="24" name="Rectangle 23"/>
-          <p:cNvSpPr/>
-          <p:nvPr/>
-        </p:nvSpPr>
-        <p:spPr>
-          <a:xfrm>
-            <a:off x="2706624" y="4133087"/>
-            <a:ext cx="2240280" cy="1051560"/>
-          </a:xfrm>
-          <a:prstGeom prst="rect">
-            <a:avLst/>
-          </a:prstGeom>
-          <a:solidFill>
-            <a:srgbClr val="1A1A2E"/>
-          </a:solidFill>
-          <a:ln w="11430">
-            <a:solidFill>
-              <a:srgbClr val="FFC00B"/>
-            </a:solidFill>
-          </a:ln>
-        </p:spPr>
-        <p:style>
-          <a:lnRef idx="1">
-            <a:schemeClr val="accent1"/>
-          </a:lnRef>
-          <a:fillRef idx="3">
-            <a:schemeClr val="accent1"/>
-          </a:fillRef>
-          <a:effectRef idx="2">
-            <a:schemeClr val="accent1"/>
-          </a:effectRef>
-          <a:fontRef idx="minor">
-            <a:schemeClr val="lt1"/>
-          </a:fontRef>
-        </p:style>
-        <p:txBody>
-          <a:bodyPr rtlCol="0" anchor="ctr"/>
-          <a:lstStyle/>
-          <a:p>
-            <a:pPr algn="ctr"/>
-          </a:p>
-        </p:txBody>
-      </p:sp>
-      <p:sp>
-        <p:nvSpPr>
-          <p:cNvPr id="25" name="TextBox 24"/>
-          <p:cNvSpPr txBox="1"/>
-          <p:nvPr/>
-        </p:nvSpPr>
-        <p:spPr>
-          <a:xfrm>
-            <a:off x="2816352" y="4206240"/>
-            <a:ext cx="2057400" cy="384048"/>
-          </a:xfrm>
-          <a:prstGeom prst="rect">
-            <a:avLst/>
-          </a:prstGeom>
-          <a:noFill/>
-        </p:spPr>
-        <p:txBody>
-          <a:bodyPr wrap="square">
-            <a:spAutoFit/>
-          </a:bodyPr>
-          <a:lstStyle/>
-          <a:p>
-            <a:pPr algn="l"/>
-            <a:r>
-              <a:rPr sz="1250" b="1" i="0">
-                <a:solidFill>
-                  <a:srgbClr val="FFC00B"/>
-                </a:solidFill>
-              </a:rPr>
-              <a:t>👤 Team Profiles</a:t>
-            </a:r>
-          </a:p>
-        </p:txBody>
-      </p:sp>
-      <p:sp>
-        <p:nvSpPr>
-          <p:cNvPr id="26" name="TextBox 25"/>
-          <p:cNvSpPr txBox="1"/>
-          <p:nvPr/>
-        </p:nvSpPr>
-        <p:spPr>
-          <a:xfrm>
-            <a:off x="2816352" y="4590288"/>
-            <a:ext cx="2057400" cy="502920"/>
-          </a:xfrm>
-          <a:prstGeom prst="rect">
-            <a:avLst/>
-          </a:prstGeom>
-          <a:noFill/>
-        </p:spPr>
-        <p:txBody>
-          <a:bodyPr wrap="square">
-            <a:spAutoFit/>
-          </a:bodyPr>
-          <a:lstStyle/>
-          <a:p>
-            <a:pPr algn="l"/>
-            <a:r>
-              <a:rPr sz="1150" b="0" i="0">
-                <a:solidFill>
-                  <a:srgbClr val="CCCCCC"/>
-                </a:solidFill>
-              </a:rPr>
-              <a:t>Drivers &amp; car numbers</a:t>
-            </a:r>
-          </a:p>
-        </p:txBody>
-      </p:sp>
-      <p:sp>
-        <p:nvSpPr>
-          <p:cNvPr id="27" name="Rectangle 26"/>
-          <p:cNvSpPr/>
-          <p:nvPr/>
-        </p:nvSpPr>
-        <p:spPr>
-          <a:xfrm>
-            <a:off x="5065776" y="4133087"/>
-            <a:ext cx="2240280" cy="1051560"/>
-          </a:xfrm>
-          <a:prstGeom prst="rect">
-            <a:avLst/>
-          </a:prstGeom>
-          <a:solidFill>
-            <a:srgbClr val="1A1A2E"/>
-          </a:solidFill>
-          <a:ln w="11430">
-            <a:solidFill>
-              <a:srgbClr val="FFC00B"/>
-            </a:solidFill>
-          </a:ln>
-        </p:spPr>
-        <p:style>
-          <a:lnRef idx="1">
-            <a:schemeClr val="accent1"/>
-          </a:lnRef>
-          <a:fillRef idx="3">
-            <a:schemeClr val="accent1"/>
-          </a:fillRef>
-          <a:effectRef idx="2">
-            <a:schemeClr val="accent1"/>
-          </a:effectRef>
-          <a:fontRef idx="minor">
-            <a:schemeClr val="lt1"/>
-          </a:fontRef>
-        </p:style>
-        <p:txBody>
-          <a:bodyPr rtlCol="0" anchor="ctr"/>
-          <a:lstStyle/>
-          <a:p>
-            <a:pPr algn="ctr"/>
-          </a:p>
-        </p:txBody>
-      </p:sp>
-      <p:sp>
-        <p:nvSpPr>
-          <p:cNvPr id="28" name="TextBox 27"/>
-          <p:cNvSpPr txBox="1"/>
-          <p:nvPr/>
-        </p:nvSpPr>
-        <p:spPr>
-          <a:xfrm>
-            <a:off x="5175504" y="4206240"/>
-            <a:ext cx="2057400" cy="384048"/>
-          </a:xfrm>
-          <a:prstGeom prst="rect">
-            <a:avLst/>
-          </a:prstGeom>
-          <a:noFill/>
-        </p:spPr>
-        <p:txBody>
-          <a:bodyPr wrap="square">
-            <a:spAutoFit/>
-          </a:bodyPr>
-          <a:lstStyle/>
-          <a:p>
-            <a:pPr algn="l"/>
-            <a:r>
-              <a:rPr sz="1250" b="1" i="0">
-                <a:solidFill>
-                  <a:srgbClr val="FFC00B"/>
-                </a:solidFill>
-              </a:rPr>
-              <a:t>🏁 Race Results</a:t>
-            </a:r>
-          </a:p>
-        </p:txBody>
-      </p:sp>
-      <p:sp>
-        <p:nvSpPr>
-          <p:cNvPr id="29" name="TextBox 28"/>
-          <p:cNvSpPr txBox="1"/>
-          <p:nvPr/>
-        </p:nvSpPr>
-        <p:spPr>
-          <a:xfrm>
-            <a:off x="5175504" y="4590288"/>
-            <a:ext cx="2057400" cy="502920"/>
-          </a:xfrm>
-          <a:prstGeom prst="rect">
-            <a:avLst/>
-          </a:prstGeom>
-          <a:noFill/>
-        </p:spPr>
-        <p:txBody>
-          <a:bodyPr wrap="square">
-            <a:spAutoFit/>
-          </a:bodyPr>
-          <a:lstStyle/>
-          <a:p>
-            <a:pPr algn="l"/>
-            <a:r>
-              <a:rPr sz="1150" b="0" i="0">
-                <a:solidFill>
-                  <a:srgbClr val="CCCCCC"/>
-                </a:solidFill>
-              </a:rPr>
-              <a:t>Winners &amp; DNF retirements</a:t>
-            </a:r>
-          </a:p>
-        </p:txBody>
-      </p:sp>
-      <p:sp>
-        <p:nvSpPr>
-          <p:cNvPr id="30" name="Rectangle 29"/>
-          <p:cNvSpPr/>
-          <p:nvPr/>
-        </p:nvSpPr>
-        <p:spPr>
-          <a:xfrm>
-            <a:off x="7424928" y="4133087"/>
-            <a:ext cx="2240280" cy="1051560"/>
-          </a:xfrm>
-          <a:prstGeom prst="rect">
-            <a:avLst/>
-          </a:prstGeom>
-          <a:solidFill>
-            <a:srgbClr val="1A1A2E"/>
-          </a:solidFill>
-          <a:ln w="11430">
-            <a:solidFill>
-              <a:srgbClr val="FFC00B"/>
-            </a:solidFill>
-          </a:ln>
-        </p:spPr>
-        <p:style>
-          <a:lnRef idx="1">
-            <a:schemeClr val="accent1"/>
-          </a:lnRef>
-          <a:fillRef idx="3">
-            <a:schemeClr val="accent1"/>
-          </a:fillRef>
-          <a:effectRef idx="2">
-            <a:schemeClr val="accent1"/>
-          </a:effectRef>
-          <a:fontRef idx="minor">
-            <a:schemeClr val="lt1"/>
-          </a:fontRef>
-        </p:style>
-        <p:txBody>
-          <a:bodyPr rtlCol="0" anchor="ctr"/>
-          <a:lstStyle/>
-          <a:p>
-            <a:pPr algn="ctr"/>
-          </a:p>
-        </p:txBody>
-      </p:sp>
-      <p:sp>
-        <p:nvSpPr>
-          <p:cNvPr id="31" name="TextBox 30"/>
-          <p:cNvSpPr txBox="1"/>
-          <p:nvPr/>
-        </p:nvSpPr>
-        <p:spPr>
-          <a:xfrm>
-            <a:off x="7534656" y="4206240"/>
-            <a:ext cx="2057400" cy="384048"/>
-          </a:xfrm>
-          <a:prstGeom prst="rect">
-            <a:avLst/>
-          </a:prstGeom>
-          <a:noFill/>
-        </p:spPr>
-        <p:txBody>
-          <a:bodyPr wrap="square">
-            <a:spAutoFit/>
-          </a:bodyPr>
-          <a:lstStyle/>
-          <a:p>
-            <a:pPr algn="l"/>
-            <a:r>
-              <a:rPr sz="1250" b="1" i="0">
-                <a:solidFill>
-                  <a:srgbClr val="FFC00B"/>
-                </a:solidFill>
-              </a:rPr>
-              <a:t>⚙️  Tech Specs</a:t>
-            </a:r>
-          </a:p>
-        </p:txBody>
-      </p:sp>
-      <p:sp>
-        <p:nvSpPr>
-          <p:cNvPr id="32" name="TextBox 31"/>
-          <p:cNvSpPr txBox="1"/>
-          <p:nvPr/>
-        </p:nvSpPr>
-        <p:spPr>
-          <a:xfrm>
-            <a:off x="7534656" y="4590288"/>
-            <a:ext cx="2057400" cy="502920"/>
-          </a:xfrm>
-          <a:prstGeom prst="rect">
-            <a:avLst/>
-          </a:prstGeom>
-          <a:noFill/>
-        </p:spPr>
-        <p:txBody>
-          <a:bodyPr wrap="square">
-            <a:spAutoFit/>
-          </a:bodyPr>
-          <a:lstStyle/>
-          <a:p>
-            <a:pPr algn="l"/>
-            <a:r>
-              <a:rPr sz="1150" b="0" i="0">
-                <a:solidFill>
-                  <a:srgbClr val="CCCCCC"/>
-                </a:solidFill>
-              </a:rPr>
-              <a:t>Car dimensions (2025/26)</a:t>
-            </a:r>
-          </a:p>
-        </p:txBody>
-      </p:sp>
-      <p:sp>
-        <p:nvSpPr>
-          <p:cNvPr id="33" name="Rectangle 32"/>
-          <p:cNvSpPr/>
-          <p:nvPr/>
-        </p:nvSpPr>
-        <p:spPr>
-          <a:xfrm>
-            <a:off x="9784080" y="4133087"/>
-            <a:ext cx="2240280" cy="1051560"/>
-          </a:xfrm>
-          <a:prstGeom prst="rect">
-            <a:avLst/>
-          </a:prstGeom>
-          <a:solidFill>
-            <a:srgbClr val="1A1A2E"/>
-          </a:solidFill>
-          <a:ln w="11430">
-            <a:solidFill>
-              <a:srgbClr val="FFC00B"/>
-            </a:solidFill>
-          </a:ln>
-        </p:spPr>
-        <p:style>
-          <a:lnRef idx="1">
-            <a:schemeClr val="accent1"/>
-          </a:lnRef>
-          <a:fillRef idx="3">
-            <a:schemeClr val="accent1"/>
-          </a:fillRef>
-          <a:effectRef idx="2">
-            <a:schemeClr val="accent1"/>
-          </a:effectRef>
-          <a:fontRef idx="minor">
-            <a:schemeClr val="lt1"/>
-          </a:fontRef>
-        </p:style>
-        <p:txBody>
-          <a:bodyPr rtlCol="0" anchor="ctr"/>
-          <a:lstStyle/>
-          <a:p>
-            <a:pPr algn="ctr"/>
-          </a:p>
-        </p:txBody>
-      </p:sp>
-      <p:sp>
-        <p:nvSpPr>
-          <p:cNvPr id="34" name="TextBox 33"/>
-          <p:cNvSpPr txBox="1"/>
-          <p:nvPr/>
-        </p:nvSpPr>
-        <p:spPr>
-          <a:xfrm>
-            <a:off x="9893808" y="4206240"/>
-            <a:ext cx="2057400" cy="384048"/>
-          </a:xfrm>
-          <a:prstGeom prst="rect">
-            <a:avLst/>
-          </a:prstGeom>
-          <a:noFill/>
-        </p:spPr>
-        <p:txBody>
-          <a:bodyPr wrap="square">
-            <a:spAutoFit/>
-          </a:bodyPr>
-          <a:lstStyle/>
-          <a:p>
-            <a:pPr algn="l"/>
-            <a:r>
-              <a:rPr sz="1250" b="1" i="0">
-                <a:solidFill>
-                  <a:srgbClr val="FFC00B"/>
-                </a:solidFill>
-              </a:rPr>
-              <a:t>📜 Regulations</a:t>
-            </a:r>
-          </a:p>
-        </p:txBody>
-      </p:sp>
-      <p:sp>
-        <p:nvSpPr>
-          <p:cNvPr id="35" name="TextBox 34"/>
-          <p:cNvSpPr txBox="1"/>
-          <p:nvPr/>
-        </p:nvSpPr>
-        <p:spPr>
-          <a:xfrm>
-            <a:off x="9893808" y="4590288"/>
-            <a:ext cx="2057400" cy="502920"/>
-          </a:xfrm>
-          <a:prstGeom prst="rect">
-            <a:avLst/>
-          </a:prstGeom>
-          <a:noFill/>
-        </p:spPr>
-        <p:txBody>
-          <a:bodyPr wrap="square">
-            <a:spAutoFit/>
-          </a:bodyPr>
-          <a:lstStyle/>
-          <a:p>
-            <a:pPr algn="l"/>
-            <a:r>
-              <a:rPr sz="1150" b="0" i="0">
-                <a:solidFill>
-                  <a:srgbClr val="CCCCCC"/>
-                </a:solidFill>
-              </a:rPr>
-              <a:t>Sporting &amp; technical rules</a:t>
-            </a:r>
-          </a:p>
-        </p:txBody>
-      </p:sp>
-      <p:sp>
-        <p:nvSpPr>
-          <p:cNvPr id="36" name="Rectangle 35"/>
-          <p:cNvSpPr/>
-          <p:nvPr/>
-        </p:nvSpPr>
-        <p:spPr>
-          <a:xfrm>
-            <a:off x="7269480" y="1371600"/>
-            <a:ext cx="4572000" cy="3858768"/>
-          </a:xfrm>
-          <a:prstGeom prst="rect">
-            <a:avLst/>
-          </a:prstGeom>
-          <a:solidFill>
-            <a:srgbClr val="1A1A2E"/>
-          </a:solidFill>
-          <a:ln w="10160">
-            <a:solidFill>
-              <a:srgbClr val="303055"/>
-            </a:solidFill>
-          </a:ln>
-        </p:spPr>
-        <p:style>
-          <a:lnRef idx="1">
-            <a:schemeClr val="accent1"/>
-          </a:lnRef>
-          <a:fillRef idx="3">
-            <a:schemeClr val="accent1"/>
-          </a:fillRef>
-          <a:effectRef idx="2">
-            <a:schemeClr val="accent1"/>
-          </a:effectRef>
-          <a:fontRef idx="minor">
-            <a:schemeClr val="lt1"/>
-          </a:fontRef>
-        </p:style>
-        <p:txBody>
-          <a:bodyPr rtlCol="0" anchor="ctr"/>
-          <a:lstStyle/>
-          <a:p>
-            <a:pPr algn="ctr"/>
-          </a:p>
-        </p:txBody>
-      </p:sp>
-      <p:sp>
-        <p:nvSpPr>
-          <p:cNvPr id="37" name="TextBox 36"/>
-          <p:cNvSpPr txBox="1"/>
-          <p:nvPr/>
-        </p:nvSpPr>
-        <p:spPr>
-          <a:xfrm>
-            <a:off x="7452360" y="1481328"/>
-            <a:ext cx="4297680" cy="384048"/>
-          </a:xfrm>
-          <a:prstGeom prst="rect">
-            <a:avLst/>
-          </a:prstGeom>
-          <a:noFill/>
-        </p:spPr>
-        <p:txBody>
-          <a:bodyPr wrap="square">
-            <a:spAutoFit/>
-          </a:bodyPr>
-          <a:lstStyle/>
-          <a:p>
-            <a:pPr algn="l"/>
-            <a:r>
-              <a:rPr sz="1500" b="1" i="0">
+                <a:latin typeface="Courier New"/>
+              </a:rPr>
+              <a:t/>
+            </a:r>
+          </a:p>
+          <a:p>
+            <a:pPr>
+              <a:spcBef>
+                <a:spcPts val="0"/>
+              </a:spcBef>
+              <a:spcAft>
+                <a:spcPts val="0"/>
+              </a:spcAft>
+            </a:pPr>
+            <a:r>
+              <a:rPr sz="1200">
+                <a:solidFill>
+                  <a:srgbClr val="8888AA"/>
+                </a:solidFill>
+                <a:latin typeface="Courier New"/>
+              </a:rPr>
+              <a:t># Load Hugging Face mini embedding model</a:t>
+            </a:r>
+          </a:p>
+          <a:p>
+            <a:pPr>
+              <a:spcBef>
+                <a:spcPts val="0"/>
+              </a:spcBef>
+              <a:spcAft>
+                <a:spcPts val="0"/>
+              </a:spcAft>
+            </a:pPr>
+            <a:r>
+              <a:rPr sz="1200">
                 <a:solidFill>
                   <a:srgbClr val="50FA7B"/>
                 </a:solidFill>
-              </a:rPr>
-              <a:t>Strategist Prompt Structure</a:t>
-            </a:r>
-          </a:p>
-        </p:txBody>
-      </p:sp>
-      <p:sp>
-        <p:nvSpPr>
-          <p:cNvPr id="38" name="TextBox 37"/>
-          <p:cNvSpPr txBox="1"/>
-          <p:nvPr/>
-        </p:nvSpPr>
-        <p:spPr>
-          <a:xfrm>
-            <a:off x="7452360" y="1901952"/>
-            <a:ext cx="4297680" cy="3236976"/>
-          </a:xfrm>
-          <a:prstGeom prst="rect">
-            <a:avLst/>
-          </a:prstGeom>
-          <a:noFill/>
-        </p:spPr>
-        <p:txBody>
-          <a:bodyPr wrap="square">
-            <a:spAutoFit/>
-          </a:bodyPr>
-          <a:lstStyle/>
-          <a:p>
-            <a:pPr>
-              <a:spcBef>
-                <a:spcPts val="400"/>
-              </a:spcBef>
-            </a:pPr>
-            <a:r>
-              <a:rPr sz="1350">
-                <a:solidFill>
-                  <a:srgbClr val="CCCCCC"/>
-                </a:solidFill>
-              </a:rPr>
-              <a:t>  You are an F1 expert assistant.</a:t>
-            </a:r>
-          </a:p>
-          <a:p>
-            <a:pPr>
-              <a:spcBef>
-                <a:spcPts val="400"/>
-              </a:spcBef>
-            </a:pPr>
-            <a:r>
-              <a:rPr sz="1350">
-                <a:solidFill>
-                  <a:srgbClr val="CCCCCC"/>
-                </a:solidFill>
-              </a:rPr>
-              <a:t>  </a:t>
-            </a:r>
-          </a:p>
-          <a:p>
-            <a:pPr>
-              <a:spcBef>
-                <a:spcPts val="400"/>
-              </a:spcBef>
-            </a:pPr>
-            <a:r>
-              <a:rPr sz="1350">
-                <a:solidFill>
-                  <a:srgbClr val="CCCCCC"/>
-                </a:solidFill>
-              </a:rPr>
-              <a:t>  Context retrieved:</a:t>
-            </a:r>
-          </a:p>
-          <a:p>
-            <a:pPr>
-              <a:spcBef>
-                <a:spcPts val="400"/>
-              </a:spcBef>
-            </a:pPr>
-            <a:r>
-              <a:rPr sz="1350">
-                <a:solidFill>
-                  <a:srgbClr val="CCCCCC"/>
-                </a:solidFill>
-              </a:rPr>
-              <a:t>    Radio: 'Box box, switch to soft.'</a:t>
-            </a:r>
-          </a:p>
-          <a:p>
-            <a:pPr>
-              <a:spcBef>
-                <a:spcPts val="400"/>
-              </a:spcBef>
-            </a:pPr>
-            <a:r>
-              <a:rPr sz="1350">
-                <a:solidFill>
-                  <a:srgbClr val="CCCCCC"/>
-                </a:solidFill>
-              </a:rPr>
-              <a:t>    Regulation: Min weight 768kg in 2026.</a:t>
-            </a:r>
-          </a:p>
-          <a:p>
-            <a:pPr>
-              <a:spcBef>
-                <a:spcPts val="400"/>
-              </a:spcBef>
-            </a:pPr>
-            <a:r>
-              <a:rPr sz="1350">
-                <a:solidFill>
-                  <a:srgbClr val="CCCCCC"/>
-                </a:solidFill>
-              </a:rPr>
-              <a:t>    Result: Winner — Lando Norris (Monaco GP)</a:t>
-            </a:r>
-          </a:p>
-          <a:p>
-            <a:pPr>
-              <a:spcBef>
-                <a:spcPts val="400"/>
-              </a:spcBef>
-            </a:pPr>
-            <a:r>
-              <a:rPr sz="1350">
-                <a:solidFill>
-                  <a:srgbClr val="CCCCCC"/>
-                </a:solidFill>
-              </a:rPr>
-              <a:t>  </a:t>
-            </a:r>
-          </a:p>
-          <a:p>
-            <a:pPr>
-              <a:spcBef>
-                <a:spcPts val="400"/>
-              </a:spcBef>
-            </a:pPr>
-            <a:r>
-              <a:rPr sz="1350">
-                <a:solidFill>
-                  <a:srgbClr val="CCCCCC"/>
-                </a:solidFill>
-              </a:rPr>
-              <a:t>  Question: Who won Monaco and why?</a:t>
-            </a:r>
-          </a:p>
-          <a:p>
-            <a:pPr>
-              <a:spcBef>
-                <a:spcPts val="400"/>
-              </a:spcBef>
-            </a:pPr>
-            <a:r>
-              <a:rPr sz="1350">
-                <a:solidFill>
-                  <a:srgbClr val="CCCCCC"/>
-                </a:solidFill>
-              </a:rPr>
-              <a:t>  </a:t>
-            </a:r>
-          </a:p>
-          <a:p>
-            <a:pPr>
-              <a:spcBef>
-                <a:spcPts val="400"/>
-              </a:spcBef>
-            </a:pPr>
-            <a:r>
-              <a:rPr sz="1350">
-                <a:solidFill>
-                  <a:srgbClr val="CCCCCC"/>
-                </a:solidFill>
-              </a:rPr>
-              <a:t>  → Answer using ONLY the context above.</a:t>
-            </a:r>
-          </a:p>
-        </p:txBody>
-      </p:sp>
-      <p:sp>
-        <p:nvSpPr>
-          <p:cNvPr id="39" name="Rectangle 38"/>
-          <p:cNvSpPr/>
-          <p:nvPr/>
-        </p:nvSpPr>
-        <p:spPr>
-          <a:xfrm>
-            <a:off x="347472" y="5349240"/>
-            <a:ext cx="11494008" cy="1325880"/>
-          </a:xfrm>
-          <a:prstGeom prst="rect">
-            <a:avLst/>
-          </a:prstGeom>
-          <a:solidFill>
-            <a:srgbClr val="0A180A"/>
-          </a:solidFill>
-          <a:ln w="12700">
-            <a:solidFill>
-              <a:srgbClr val="50FA7B"/>
-            </a:solidFill>
-          </a:ln>
-        </p:spPr>
-        <p:style>
-          <a:lnRef idx="1">
-            <a:schemeClr val="accent1"/>
-          </a:lnRef>
-          <a:fillRef idx="3">
-            <a:schemeClr val="accent1"/>
-          </a:fillRef>
-          <a:effectRef idx="2">
-            <a:schemeClr val="accent1"/>
-          </a:effectRef>
-          <a:fontRef idx="minor">
-            <a:schemeClr val="lt1"/>
-          </a:fontRef>
-        </p:style>
-        <p:txBody>
-          <a:bodyPr rtlCol="0" anchor="ctr"/>
-          <a:lstStyle/>
-          <a:p>
-            <a:pPr algn="ctr"/>
-          </a:p>
-        </p:txBody>
-      </p:sp>
-      <p:sp>
-        <p:nvSpPr>
-          <p:cNvPr id="40" name="TextBox 39"/>
-          <p:cNvSpPr txBox="1"/>
-          <p:nvPr/>
-        </p:nvSpPr>
-        <p:spPr>
-          <a:xfrm>
-            <a:off x="530352" y="5440680"/>
-            <a:ext cx="2743200" cy="347472"/>
-          </a:xfrm>
-          <a:prstGeom prst="rect">
-            <a:avLst/>
-          </a:prstGeom>
-          <a:noFill/>
-        </p:spPr>
-        <p:txBody>
-          <a:bodyPr wrap="square">
-            <a:spAutoFit/>
-          </a:bodyPr>
-          <a:lstStyle/>
-          <a:p>
-            <a:pPr algn="l"/>
-            <a:r>
-              <a:rPr sz="1300" b="1" i="0">
+                <a:latin typeface="Courier New"/>
+              </a:rPr>
+              <a:t>model_st = SentenceTransformer('all-MiniLM-L6-v2')</a:t>
+            </a:r>
+          </a:p>
+          <a:p>
+            <a:pPr>
+              <a:spcBef>
+                <a:spcPts val="0"/>
+              </a:spcBef>
+              <a:spcAft>
+                <a:spcPts val="0"/>
+              </a:spcAft>
+            </a:pPr>
+            <a:r>
+              <a:rPr sz="1200">
                 <a:solidFill>
                   <a:srgbClr val="50FA7B"/>
                 </a:solidFill>
-              </a:rPr>
-              <a:t>Why it matters:</a:t>
-            </a:r>
-          </a:p>
-        </p:txBody>
-      </p:sp>
-      <p:sp>
-        <p:nvSpPr>
-          <p:cNvPr id="41" name="TextBox 40"/>
-          <p:cNvSpPr txBox="1"/>
-          <p:nvPr/>
-        </p:nvSpPr>
-        <p:spPr>
-          <a:xfrm>
-            <a:off x="530352" y="5806440"/>
-            <a:ext cx="11109960" cy="731520"/>
-          </a:xfrm>
-          <a:prstGeom prst="rect">
-            <a:avLst/>
-          </a:prstGeom>
-          <a:noFill/>
-        </p:spPr>
-        <p:txBody>
-          <a:bodyPr wrap="square">
-            <a:spAutoFit/>
-          </a:bodyPr>
-          <a:lstStyle/>
-          <a:p>
-            <a:pPr algn="l"/>
-            <a:r>
-              <a:rPr sz="1300" b="0" i="0">
-                <a:solidFill>
-                  <a:srgbClr val="CCCCCC"/>
-                </a:solidFill>
-              </a:rPr>
-              <a:t>RAG is the primary technique used by modern corporate AI (ChatGPT, Google Gemini) to query private data. Its inclusion demonstrates your capability to build modern, practical, production-level NLP apps.</a:t>
+                <a:latin typeface="Courier New"/>
+              </a:rPr>
+              <a:t/>
+            </a:r>
+          </a:p>
+          <a:p>
+            <a:pPr>
+              <a:spcBef>
+                <a:spcPts val="0"/>
+              </a:spcBef>
+              <a:spcAft>
+                <a:spcPts val="0"/>
+              </a:spcAft>
+            </a:pPr>
+            <a:r>
+              <a:rPr sz="1200">
+                <a:solidFill>
+                  <a:srgbClr val="8888AA"/>
+                </a:solidFill>
+                <a:latin typeface="Courier New"/>
+              </a:rPr>
+              <a:t># Retrieve matching facts</a:t>
+            </a:r>
+          </a:p>
+          <a:p>
+            <a:pPr>
+              <a:spcBef>
+                <a:spcPts val="0"/>
+              </a:spcBef>
+              <a:spcAft>
+                <a:spcPts val="0"/>
+              </a:spcAft>
+            </a:pPr>
+            <a:r>
+              <a:rPr sz="1200">
+                <a:solidFill>
+                  <a:srgbClr val="50FA7B"/>
+                </a:solidFill>
+                <a:latin typeface="Courier New"/>
+              </a:rPr>
+              <a:t>q_emb = model_st.encode([query])</a:t>
+            </a:r>
+          </a:p>
+          <a:p>
+            <a:pPr>
+              <a:spcBef>
+                <a:spcPts val="0"/>
+              </a:spcBef>
+              <a:spcAft>
+                <a:spcPts val="0"/>
+              </a:spcAft>
+            </a:pPr>
+            <a:r>
+              <a:rPr sz="1200">
+                <a:solidFill>
+                  <a:srgbClr val="50FA7B"/>
+                </a:solidFill>
+                <a:latin typeface="Courier New"/>
+              </a:rPr>
+              <a:t>sims = cosine_similarity(q_emb, corpus_embs)</a:t>
+            </a:r>
+          </a:p>
+          <a:p>
+            <a:pPr>
+              <a:spcBef>
+                <a:spcPts val="0"/>
+              </a:spcBef>
+              <a:spcAft>
+                <a:spcPts val="0"/>
+              </a:spcAft>
+            </a:pPr>
+            <a:r>
+              <a:rPr sz="1200">
+                <a:solidFill>
+                  <a:srgbClr val="50FA7B"/>
+                </a:solidFill>
+                <a:latin typeface="Courier New"/>
+              </a:rPr>
+              <a:t/>
+            </a:r>
+          </a:p>
+          <a:p>
+            <a:pPr>
+              <a:spcBef>
+                <a:spcPts val="0"/>
+              </a:spcBef>
+              <a:spcAft>
+                <a:spcPts val="0"/>
+              </a:spcAft>
+            </a:pPr>
+            <a:r>
+              <a:rPr sz="1200">
+                <a:solidFill>
+                  <a:srgbClr val="8888AA"/>
+                </a:solidFill>
+                <a:latin typeface="Courier New"/>
+              </a:rPr>
+              <a:t># Build Strategist Prompt Template</a:t>
+            </a:r>
+          </a:p>
+          <a:p>
+            <a:pPr>
+              <a:spcBef>
+                <a:spcPts val="0"/>
+              </a:spcBef>
+              <a:spcAft>
+                <a:spcPts val="0"/>
+              </a:spcAft>
+            </a:pPr>
+            <a:r>
+              <a:rPr sz="1200">
+                <a:solidFill>
+                  <a:srgbClr val="50FA7B"/>
+                </a:solidFill>
+                <a:latin typeface="Courier New"/>
+              </a:rPr>
+              <a:t>prompt = f'Context: {context}\nQuestion: {query}'</a:t>
             </a:r>
           </a:p>
         </p:txBody>
@@ -8171,12 +6423,12 @@
               </a:spcBef>
             </a:pPr>
             <a:r>
-              <a:rPr sz="1350">
+              <a:rPr sz="1300">
                 <a:solidFill>
                   <a:srgbClr val="CCCCCC"/>
                 </a:solidFill>
               </a:rPr>
-              <a:t>▸  A rule-based chatbot interface inside Streamlit.</a:t>
+              <a:t>▸  A chatbot interface inside Streamlit routing queries based on matched intent words (14 categories).</a:t>
             </a:r>
           </a:p>
           <a:p>
@@ -8186,12 +6438,12 @@
               </a:spcBef>
             </a:pPr>
             <a:r>
-              <a:rPr sz="1350">
+              <a:rPr sz="1300">
                 <a:solidFill>
                   <a:srgbClr val="CCCCCC"/>
                 </a:solidFill>
               </a:rPr>
-              <a:t>▸  Routes queries based on matched intent words (14 categories).</a:t>
+              <a:t>▸  Queries F1 driver line-ups, technical specs, and race results.</a:t>
             </a:r>
           </a:p>
           <a:p>
@@ -8201,22 +6453,7 @@
               </a:spcBef>
             </a:pPr>
             <a:r>
-              <a:rPr sz="1350">
-                <a:solidFill>
-                  <a:srgbClr val="CCCCCC"/>
-                </a:solidFill>
-              </a:rPr>
-              <a:t>▸  Queries F1 driver line-ups, technical specs, and race results.</a:t>
-            </a:r>
-          </a:p>
-          <a:p>
-            <a:pPr>
-              <a:spcBef>
-                <a:spcPts val="400"/>
-              </a:spcBef>
-            </a:pPr>
-            <a:r>
-              <a:rPr sz="1350">
+              <a:rPr sz="1300">
                 <a:solidFill>
                   <a:srgbClr val="CCCCCC"/>
                 </a:solidFill>
@@ -8333,7 +6570,7 @@
               </a:spcBef>
             </a:pPr>
             <a:r>
-              <a:rPr sz="1350">
+              <a:rPr sz="1300">
                 <a:solidFill>
                   <a:srgbClr val="CCCCCC"/>
                 </a:solidFill>
@@ -8348,7 +6585,7 @@
               </a:spcBef>
             </a:pPr>
             <a:r>
-              <a:rPr sz="1350">
+              <a:rPr sz="1300">
                 <a:solidFill>
                   <a:srgbClr val="CCCCCC"/>
                 </a:solidFill>
@@ -8363,7 +6600,7 @@
               </a:spcBef>
             </a:pPr>
             <a:r>
-              <a:rPr sz="1350">
+              <a:rPr sz="1300">
                 <a:solidFill>
                   <a:srgbClr val="CCCCCC"/>
                 </a:solidFill>
@@ -8378,7 +6615,7 @@
               </a:spcBef>
             </a:pPr>
             <a:r>
-              <a:rPr sz="1350">
+              <a:rPr sz="1300">
                 <a:solidFill>
                   <a:srgbClr val="CCCCCC"/>
                 </a:solidFill>
@@ -9319,7 +7556,7 @@
               </a:spcBef>
             </a:pPr>
             <a:r>
-              <a:rPr sz="1350">
+              <a:rPr sz="1300">
                 <a:solidFill>
                   <a:srgbClr val="CCCCCC"/>
                 </a:solidFill>
@@ -9334,7 +7571,7 @@
               </a:spcBef>
             </a:pPr>
             <a:r>
-              <a:rPr sz="1350">
+              <a:rPr sz="1300">
                 <a:solidFill>
                   <a:srgbClr val="CCCCCC"/>
                 </a:solidFill>
@@ -9349,7 +7586,7 @@
               </a:spcBef>
             </a:pPr>
             <a:r>
-              <a:rPr sz="1350">
+              <a:rPr sz="1300">
                 <a:solidFill>
                   <a:srgbClr val="CCCCCC"/>
                 </a:solidFill>
@@ -9364,7 +7601,7 @@
               </a:spcBef>
             </a:pPr>
             <a:r>
-              <a:rPr sz="1350">
+              <a:rPr sz="1300">
                 <a:solidFill>
                   <a:srgbClr val="CCCCCC"/>
                 </a:solidFill>
@@ -9379,7 +7616,7 @@
               </a:spcBef>
             </a:pPr>
             <a:r>
-              <a:rPr sz="1350">
+              <a:rPr sz="1300">
                 <a:solidFill>
                   <a:srgbClr val="CCCCCC"/>
                 </a:solidFill>
@@ -9394,7 +7631,7 @@
               </a:spcBef>
             </a:pPr>
             <a:r>
-              <a:rPr sz="1350">
+              <a:rPr sz="1300">
                 <a:solidFill>
                   <a:srgbClr val="CCCCCC"/>
                 </a:solidFill>
@@ -9409,7 +7646,7 @@
               </a:spcBef>
             </a:pPr>
             <a:r>
-              <a:rPr sz="1350">
+              <a:rPr sz="1300">
                 <a:solidFill>
                   <a:srgbClr val="CCCCCC"/>
                 </a:solidFill>
@@ -9424,7 +7661,7 @@
               </a:spcBef>
             </a:pPr>
             <a:r>
-              <a:rPr sz="1350">
+              <a:rPr sz="1300">
                 <a:solidFill>
                   <a:srgbClr val="CCCCCC"/>
                 </a:solidFill>
@@ -9439,7 +7676,7 @@
               </a:spcBef>
             </a:pPr>
             <a:r>
-              <a:rPr sz="1350">
+              <a:rPr sz="1300">
                 <a:solidFill>
                   <a:srgbClr val="CCCCCC"/>
                 </a:solidFill>
@@ -10400,7 +8637,7 @@
               </a:spcBef>
             </a:pPr>
             <a:r>
-              <a:rPr sz="1350">
+              <a:rPr sz="1300">
                 <a:solidFill>
                   <a:srgbClr val="CCCCCC"/>
                 </a:solidFill>
@@ -10415,7 +8652,7 @@
               </a:spcBef>
             </a:pPr>
             <a:r>
-              <a:rPr sz="1350">
+              <a:rPr sz="1300">
                 <a:solidFill>
                   <a:srgbClr val="CCCCCC"/>
                 </a:solidFill>
@@ -10430,7 +8667,7 @@
               </a:spcBef>
             </a:pPr>
             <a:r>
-              <a:rPr sz="1350">
+              <a:rPr sz="1300">
                 <a:solidFill>
                   <a:srgbClr val="CCCCCC"/>
                 </a:solidFill>
@@ -10445,7 +8682,7 @@
               </a:spcBef>
             </a:pPr>
             <a:r>
-              <a:rPr sz="1350">
+              <a:rPr sz="1300">
                 <a:solidFill>
                   <a:srgbClr val="CCCCCC"/>
                 </a:solidFill>
@@ -10460,7 +8697,7 @@
               </a:spcBef>
             </a:pPr>
             <a:r>
-              <a:rPr sz="1350">
+              <a:rPr sz="1300">
                 <a:solidFill>
                   <a:srgbClr val="CCCCCC"/>
                 </a:solidFill>
@@ -10577,7 +8814,7 @@
               </a:spcBef>
             </a:pPr>
             <a:r>
-              <a:rPr sz="1350">
+              <a:rPr sz="1300">
                 <a:solidFill>
                   <a:srgbClr val="CCCCCC"/>
                 </a:solidFill>
@@ -10592,7 +8829,7 @@
               </a:spcBef>
             </a:pPr>
             <a:r>
-              <a:rPr sz="1350">
+              <a:rPr sz="1300">
                 <a:solidFill>
                   <a:srgbClr val="CCCCCC"/>
                 </a:solidFill>
@@ -10607,7 +8844,7 @@
               </a:spcBef>
             </a:pPr>
             <a:r>
-              <a:rPr sz="1350">
+              <a:rPr sz="1300">
                 <a:solidFill>
                   <a:srgbClr val="CCCCCC"/>
                 </a:solidFill>
@@ -10622,7 +8859,7 @@
               </a:spcBef>
             </a:pPr>
             <a:r>
-              <a:rPr sz="1350">
+              <a:rPr sz="1300">
                 <a:solidFill>
                   <a:srgbClr val="CCCCCC"/>
                 </a:solidFill>
@@ -10637,7 +8874,7 @@
               </a:spcBef>
             </a:pPr>
             <a:r>
-              <a:rPr sz="1350">
+              <a:rPr sz="1300">
                 <a:solidFill>
                   <a:srgbClr val="CCCCCC"/>
                 </a:solidFill>
@@ -10652,7 +8889,7 @@
               </a:spcBef>
             </a:pPr>
             <a:r>
-              <a:rPr sz="1350">
+              <a:rPr sz="1300">
                 <a:solidFill>
                   <a:srgbClr val="CCCCCC"/>
                 </a:solidFill>
@@ -11876,7 +10113,7 @@
               </a:spcBef>
             </a:pPr>
             <a:r>
-              <a:rPr sz="1350">
+              <a:rPr sz="1300">
                 <a:solidFill>
                   <a:srgbClr val="CCCCCC"/>
                 </a:solidFill>
@@ -11891,7 +10128,7 @@
               </a:spcBef>
             </a:pPr>
             <a:r>
-              <a:rPr sz="1350">
+              <a:rPr sz="1300">
                 <a:solidFill>
                   <a:srgbClr val="CCCCCC"/>
                 </a:solidFill>
@@ -11906,7 +10143,7 @@
               </a:spcBef>
             </a:pPr>
             <a:r>
-              <a:rPr sz="1350">
+              <a:rPr sz="1300">
                 <a:solidFill>
                   <a:srgbClr val="CCCCCC"/>
                 </a:solidFill>
@@ -12014,7 +10251,7 @@
                   <a:srgbClr val="FFFFFF"/>
                 </a:solidFill>
               </a:rPr>
-              <a:t>🕷️  Phase 1 — Web Scraping &amp; Data Collection</a:t>
+              <a:t>🕷  Phase 1 — Web Scraping &amp; Data Collection</a:t>
             </a:r>
           </a:p>
         </p:txBody>
@@ -12139,7 +10376,7 @@
         <p:spPr>
           <a:xfrm>
             <a:off x="347472" y="1371600"/>
-            <a:ext cx="11494008" cy="3291840"/>
+            <a:ext cx="5303520" cy="4572000"/>
           </a:xfrm>
           <a:prstGeom prst="rect">
             <a:avLst/>
@@ -12184,7 +10421,7 @@
         <p:spPr>
           <a:xfrm>
             <a:off x="530352" y="1481328"/>
-            <a:ext cx="11219688" cy="384048"/>
+            <a:ext cx="5029200" cy="384048"/>
           </a:xfrm>
           <a:prstGeom prst="rect">
             <a:avLst/>
@@ -12218,7 +10455,7 @@
         <p:spPr>
           <a:xfrm>
             <a:off x="530352" y="1901952"/>
-            <a:ext cx="11219688" cy="2670048"/>
+            <a:ext cx="5029200" cy="3950208"/>
           </a:xfrm>
           <a:prstGeom prst="rect">
             <a:avLst/>
@@ -12237,7 +10474,7 @@
               </a:spcBef>
             </a:pPr>
             <a:r>
-              <a:rPr sz="1350">
+              <a:rPr sz="1300">
                 <a:solidFill>
                   <a:srgbClr val="CCCCCC"/>
                 </a:solidFill>
@@ -12252,12 +10489,12 @@
               </a:spcBef>
             </a:pPr>
             <a:r>
-              <a:rPr sz="1350">
+              <a:rPr sz="1300">
                 <a:solidFill>
                   <a:srgbClr val="CCCCCC"/>
                 </a:solidFill>
               </a:rPr>
-              <a:t>✦  BeautifulSoup parses F1 session HTML structure: Session → Driver list → Individual message divs.</a:t>
+              <a:t>✦  BeautifulSoup parses F1 HTML structure: Session -&gt; Driver list -&gt; Message containers.</a:t>
             </a:r>
           </a:p>
           <a:p>
@@ -12267,7 +10504,7 @@
               </a:spcBef>
             </a:pPr>
             <a:r>
-              <a:rPr sz="1350">
+              <a:rPr sz="1300">
                 <a:solidFill>
                   <a:srgbClr val="CCCCCC"/>
                 </a:solidFill>
@@ -12282,7 +10519,7 @@
               </a:spcBef>
             </a:pPr>
             <a:r>
-              <a:rPr sz="1350">
+              <a:rPr sz="1300">
                 <a:solidFill>
                   <a:srgbClr val="CCCCCC"/>
                 </a:solidFill>
@@ -12297,7 +10534,7 @@
               </a:spcBef>
             </a:pPr>
             <a:r>
-              <a:rPr sz="1350">
+              <a:rPr sz="1300">
                 <a:solidFill>
                   <a:srgbClr val="CCCCCC"/>
                 </a:solidFill>
@@ -12315,18 +10552,18 @@
         </p:nvSpPr>
         <p:spPr>
           <a:xfrm>
-            <a:off x="347472" y="4846320"/>
-            <a:ext cx="3749039" cy="1554480"/>
+            <a:off x="5943600" y="1371600"/>
+            <a:ext cx="5897880" cy="4572000"/>
           </a:xfrm>
           <a:prstGeom prst="rect">
             <a:avLst/>
           </a:prstGeom>
           <a:solidFill>
-            <a:srgbClr val="1A1A2E"/>
+            <a:srgbClr val="121222"/>
           </a:solidFill>
-          <a:ln w="15240">
+          <a:ln w="12700">
             <a:solidFill>
-              <a:srgbClr val="FFC00B"/>
+              <a:srgbClr val="404060"/>
             </a:solidFill>
           </a:ln>
         </p:spPr>
@@ -12360,8 +10597,8 @@
         </p:nvSpPr>
         <p:spPr>
           <a:xfrm>
-            <a:off x="530352" y="4956048"/>
-            <a:ext cx="3383280" cy="365760"/>
+            <a:off x="6080760" y="1463040"/>
+            <a:ext cx="5623560" cy="4389120"/>
           </a:xfrm>
           <a:prstGeom prst="rect">
             <a:avLst/>
@@ -12369,279 +10606,236 @@
           <a:noFill/>
         </p:spPr>
         <p:txBody>
-          <a:bodyPr wrap="square">
+          <a:bodyPr wrap="none">
             <a:spAutoFit/>
           </a:bodyPr>
           <a:lstStyle/>
           <a:p>
-            <a:pPr algn="l"/>
-            <a:r>
-              <a:rPr sz="1600" b="1" i="0">
-                <a:solidFill>
-                  <a:srgbClr val="FFC00B"/>
-                </a:solidFill>
-              </a:rPr>
-              <a:t>requests</a:t>
-            </a:r>
-          </a:p>
-        </p:txBody>
-      </p:sp>
-      <p:sp>
-        <p:nvSpPr>
-          <p:cNvPr id="12" name="TextBox 11"/>
-          <p:cNvSpPr txBox="1"/>
-          <p:nvPr/>
-        </p:nvSpPr>
-        <p:spPr>
-          <a:xfrm>
-            <a:off x="530352" y="5376672"/>
-            <a:ext cx="3383280" cy="914400"/>
-          </a:xfrm>
-          <a:prstGeom prst="rect">
-            <a:avLst/>
-          </a:prstGeom>
-          <a:noFill/>
-        </p:spPr>
-        <p:txBody>
-          <a:bodyPr wrap="square">
-            <a:spAutoFit/>
-          </a:bodyPr>
-          <a:lstStyle/>
-          <a:p>
-            <a:pPr algn="l"/>
-            <a:r>
-              <a:rPr sz="1300" b="0" i="0">
-                <a:solidFill>
-                  <a:srgbClr val="CCCCCC"/>
-                </a:solidFill>
-              </a:rPr>
-              <a:t>Fetches the HTML source of the web archive</a:t>
-            </a:r>
-          </a:p>
-        </p:txBody>
-      </p:sp>
-      <p:sp>
-        <p:nvSpPr>
-          <p:cNvPr id="13" name="Rectangle 12"/>
-          <p:cNvSpPr/>
-          <p:nvPr/>
-        </p:nvSpPr>
-        <p:spPr>
-          <a:xfrm>
-            <a:off x="4297680" y="4846320"/>
-            <a:ext cx="3749039" cy="1554480"/>
-          </a:xfrm>
-          <a:prstGeom prst="rect">
-            <a:avLst/>
-          </a:prstGeom>
-          <a:solidFill>
-            <a:srgbClr val="1A1A2E"/>
-          </a:solidFill>
-          <a:ln w="15240">
-            <a:solidFill>
-              <a:srgbClr val="FFC00B"/>
-            </a:solidFill>
-          </a:ln>
-        </p:spPr>
-        <p:style>
-          <a:lnRef idx="1">
-            <a:schemeClr val="accent1"/>
-          </a:lnRef>
-          <a:fillRef idx="3">
-            <a:schemeClr val="accent1"/>
-          </a:fillRef>
-          <a:effectRef idx="2">
-            <a:schemeClr val="accent1"/>
-          </a:effectRef>
-          <a:fontRef idx="minor">
-            <a:schemeClr val="lt1"/>
-          </a:fontRef>
-        </p:style>
-        <p:txBody>
-          <a:bodyPr rtlCol="0" anchor="ctr"/>
-          <a:lstStyle/>
-          <a:p>
-            <a:pPr algn="ctr"/>
-          </a:p>
-        </p:txBody>
-      </p:sp>
-      <p:sp>
-        <p:nvSpPr>
-          <p:cNvPr id="14" name="TextBox 13"/>
-          <p:cNvSpPr txBox="1"/>
-          <p:nvPr/>
-        </p:nvSpPr>
-        <p:spPr>
-          <a:xfrm>
-            <a:off x="4480560" y="4956048"/>
-            <a:ext cx="3383280" cy="365760"/>
-          </a:xfrm>
-          <a:prstGeom prst="rect">
-            <a:avLst/>
-          </a:prstGeom>
-          <a:noFill/>
-        </p:spPr>
-        <p:txBody>
-          <a:bodyPr wrap="square">
-            <a:spAutoFit/>
-          </a:bodyPr>
-          <a:lstStyle/>
-          <a:p>
-            <a:pPr algn="l"/>
-            <a:r>
-              <a:rPr sz="1600" b="1" i="0">
-                <a:solidFill>
-                  <a:srgbClr val="FFC00B"/>
-                </a:solidFill>
-              </a:rPr>
-              <a:t>BeautifulSoup</a:t>
-            </a:r>
-          </a:p>
-        </p:txBody>
-      </p:sp>
-      <p:sp>
-        <p:nvSpPr>
-          <p:cNvPr id="15" name="TextBox 14"/>
-          <p:cNvSpPr txBox="1"/>
-          <p:nvPr/>
-        </p:nvSpPr>
-        <p:spPr>
-          <a:xfrm>
-            <a:off x="4480560" y="5376672"/>
-            <a:ext cx="3383280" cy="914400"/>
-          </a:xfrm>
-          <a:prstGeom prst="rect">
-            <a:avLst/>
-          </a:prstGeom>
-          <a:noFill/>
-        </p:spPr>
-        <p:txBody>
-          <a:bodyPr wrap="square">
-            <a:spAutoFit/>
-          </a:bodyPr>
-          <a:lstStyle/>
-          <a:p>
-            <a:pPr algn="l"/>
-            <a:r>
-              <a:rPr sz="1300" b="0" i="0">
-                <a:solidFill>
-                  <a:srgbClr val="CCCCCC"/>
-                </a:solidFill>
-              </a:rPr>
-              <a:t>Locates transcript containers and extracts clean text strings</a:t>
-            </a:r>
-          </a:p>
-        </p:txBody>
-      </p:sp>
-      <p:sp>
-        <p:nvSpPr>
-          <p:cNvPr id="16" name="Rectangle 15"/>
-          <p:cNvSpPr/>
-          <p:nvPr/>
-        </p:nvSpPr>
-        <p:spPr>
-          <a:xfrm>
-            <a:off x="8247888" y="4846320"/>
-            <a:ext cx="3749039" cy="1554480"/>
-          </a:xfrm>
-          <a:prstGeom prst="rect">
-            <a:avLst/>
-          </a:prstGeom>
-          <a:solidFill>
-            <a:srgbClr val="1A1A2E"/>
-          </a:solidFill>
-          <a:ln w="15240">
-            <a:solidFill>
-              <a:srgbClr val="FFC00B"/>
-            </a:solidFill>
-          </a:ln>
-        </p:spPr>
-        <p:style>
-          <a:lnRef idx="1">
-            <a:schemeClr val="accent1"/>
-          </a:lnRef>
-          <a:fillRef idx="3">
-            <a:schemeClr val="accent1"/>
-          </a:fillRef>
-          <a:effectRef idx="2">
-            <a:schemeClr val="accent1"/>
-          </a:effectRef>
-          <a:fontRef idx="minor">
-            <a:schemeClr val="lt1"/>
-          </a:fontRef>
-        </p:style>
-        <p:txBody>
-          <a:bodyPr rtlCol="0" anchor="ctr"/>
-          <a:lstStyle/>
-          <a:p>
-            <a:pPr algn="ctr"/>
-          </a:p>
-        </p:txBody>
-      </p:sp>
-      <p:sp>
-        <p:nvSpPr>
-          <p:cNvPr id="17" name="TextBox 16"/>
-          <p:cNvSpPr txBox="1"/>
-          <p:nvPr/>
-        </p:nvSpPr>
-        <p:spPr>
-          <a:xfrm>
-            <a:off x="8430768" y="4956048"/>
-            <a:ext cx="3383280" cy="365760"/>
-          </a:xfrm>
-          <a:prstGeom prst="rect">
-            <a:avLst/>
-          </a:prstGeom>
-          <a:noFill/>
-        </p:spPr>
-        <p:txBody>
-          <a:bodyPr wrap="square">
-            <a:spAutoFit/>
-          </a:bodyPr>
-          <a:lstStyle/>
-          <a:p>
-            <a:pPr algn="l"/>
-            <a:r>
-              <a:rPr sz="1600" b="1" i="0">
-                <a:solidFill>
-                  <a:srgbClr val="FFC00B"/>
-                </a:solidFill>
-              </a:rPr>
-              <a:t>Pandas</a:t>
-            </a:r>
-          </a:p>
-        </p:txBody>
-      </p:sp>
-      <p:sp>
-        <p:nvSpPr>
-          <p:cNvPr id="18" name="TextBox 17"/>
-          <p:cNvSpPr txBox="1"/>
-          <p:nvPr/>
-        </p:nvSpPr>
-        <p:spPr>
-          <a:xfrm>
-            <a:off x="8430768" y="5376672"/>
-            <a:ext cx="3383280" cy="914400"/>
-          </a:xfrm>
-          <a:prstGeom prst="rect">
-            <a:avLst/>
-          </a:prstGeom>
-          <a:noFill/>
-        </p:spPr>
-        <p:txBody>
-          <a:bodyPr wrap="square">
-            <a:spAutoFit/>
-          </a:bodyPr>
-          <a:lstStyle/>
-          <a:p>
-            <a:pPr algn="l"/>
-            <a:r>
-              <a:rPr sz="1300" b="0" i="0">
-                <a:solidFill>
-                  <a:srgbClr val="CCCCCC"/>
-                </a:solidFill>
-              </a:rPr>
-              <a:t>Structures the scraped driver, lap, and text records into a corpus dataframe</a:t>
+            <a:pPr>
+              <a:spcBef>
+                <a:spcPts val="0"/>
+              </a:spcBef>
+              <a:spcAft>
+                <a:spcPts val="0"/>
+              </a:spcAft>
+            </a:pPr>
+            <a:r>
+              <a:rPr sz="1200">
+                <a:solidFill>
+                  <a:srgbClr val="FFD866"/>
+                </a:solidFill>
+                <a:latin typeface="Courier New"/>
+              </a:rPr>
+              <a:t>import requests</a:t>
+            </a:r>
+          </a:p>
+          <a:p>
+            <a:pPr>
+              <a:spcBef>
+                <a:spcPts val="0"/>
+              </a:spcBef>
+              <a:spcAft>
+                <a:spcPts val="0"/>
+              </a:spcAft>
+            </a:pPr>
+            <a:r>
+              <a:rPr sz="1200">
+                <a:solidFill>
+                  <a:srgbClr val="FFD866"/>
+                </a:solidFill>
+                <a:latin typeface="Courier New"/>
+              </a:rPr>
+              <a:t>from bs4 import BeautifulSoup</a:t>
+            </a:r>
+          </a:p>
+          <a:p>
+            <a:pPr>
+              <a:spcBef>
+                <a:spcPts val="0"/>
+              </a:spcBef>
+              <a:spcAft>
+                <a:spcPts val="0"/>
+              </a:spcAft>
+            </a:pPr>
+            <a:r>
+              <a:rPr sz="1200">
+                <a:solidFill>
+                  <a:srgbClr val="50FA7B"/>
+                </a:solidFill>
+                <a:latin typeface="Courier New"/>
+              </a:rPr>
+              <a:t/>
+            </a:r>
+          </a:p>
+          <a:p>
+            <a:pPr>
+              <a:spcBef>
+                <a:spcPts val="0"/>
+              </a:spcBef>
+              <a:spcAft>
+                <a:spcPts val="0"/>
+              </a:spcAft>
+            </a:pPr>
+            <a:r>
+              <a:rPr sz="1200">
+                <a:solidFill>
+                  <a:srgbClr val="8888AA"/>
+                </a:solidFill>
+                <a:latin typeface="Courier New"/>
+              </a:rPr>
+              <a:t># 1. Fetch sandbox F1 archive directory</a:t>
+            </a:r>
+          </a:p>
+          <a:p>
+            <a:pPr>
+              <a:spcBef>
+                <a:spcPts val="0"/>
+              </a:spcBef>
+              <a:spcAft>
+                <a:spcPts val="0"/>
+              </a:spcAft>
+            </a:pPr>
+            <a:r>
+              <a:rPr sz="1200">
+                <a:solidFill>
+                  <a:srgbClr val="50FA7B"/>
+                </a:solidFill>
+                <a:latin typeface="Courier New"/>
+              </a:rPr>
+              <a:t>BASE = 'https://transcripts.recursiveprojects.cloud'</a:t>
+            </a:r>
+          </a:p>
+          <a:p>
+            <a:pPr>
+              <a:spcBef>
+                <a:spcPts val="0"/>
+              </a:spcBef>
+              <a:spcAft>
+                <a:spcPts val="0"/>
+              </a:spcAft>
+            </a:pPr>
+            <a:r>
+              <a:rPr sz="1200">
+                <a:solidFill>
+                  <a:srgbClr val="50FA7B"/>
+                </a:solidFill>
+                <a:latin typeface="Courier New"/>
+              </a:rPr>
+              <a:t>soup = BeautifulSoup(requests.get(BASE + '/archive').text)</a:t>
+            </a:r>
+          </a:p>
+          <a:p>
+            <a:pPr>
+              <a:spcBef>
+                <a:spcPts val="0"/>
+              </a:spcBef>
+              <a:spcAft>
+                <a:spcPts val="0"/>
+              </a:spcAft>
+            </a:pPr>
+            <a:r>
+              <a:rPr sz="1200">
+                <a:solidFill>
+                  <a:srgbClr val="50FA7B"/>
+                </a:solidFill>
+                <a:latin typeface="Courier New"/>
+              </a:rPr>
+              <a:t/>
+            </a:r>
+          </a:p>
+          <a:p>
+            <a:pPr>
+              <a:spcBef>
+                <a:spcPts val="0"/>
+              </a:spcBef>
+              <a:spcAft>
+                <a:spcPts val="0"/>
+              </a:spcAft>
+            </a:pPr>
+            <a:r>
+              <a:rPr sz="1200">
+                <a:solidFill>
+                  <a:srgbClr val="8888AA"/>
+                </a:solidFill>
+                <a:latin typeface="Courier New"/>
+              </a:rPr>
+              <a:t># 2. Find driver message container divs</a:t>
+            </a:r>
+          </a:p>
+          <a:p>
+            <a:pPr>
+              <a:spcBef>
+                <a:spcPts val="0"/>
+              </a:spcBef>
+              <a:spcAft>
+                <a:spcPts val="0"/>
+              </a:spcAft>
+            </a:pPr>
+            <a:r>
+              <a:rPr sz="1200">
+                <a:solidFill>
+                  <a:srgbClr val="50FA7B"/>
+                </a:solidFill>
+                <a:latin typeface="Courier New"/>
+              </a:rPr>
+              <a:t>divs = soup.find_all('div', class_='dark:bg-zinc-800')</a:t>
+            </a:r>
+          </a:p>
+          <a:p>
+            <a:pPr>
+              <a:spcBef>
+                <a:spcPts val="0"/>
+              </a:spcBef>
+              <a:spcAft>
+                <a:spcPts val="0"/>
+              </a:spcAft>
+            </a:pPr>
+            <a:r>
+              <a:rPr sz="1200">
+                <a:solidFill>
+                  <a:srgbClr val="FFD866"/>
+                </a:solidFill>
+                <a:latin typeface="Courier New"/>
+              </a:rPr>
+              <a:t>for div in divs:</a:t>
+            </a:r>
+          </a:p>
+          <a:p>
+            <a:pPr>
+              <a:spcBef>
+                <a:spcPts val="0"/>
+              </a:spcBef>
+              <a:spcAft>
+                <a:spcPts val="0"/>
+              </a:spcAft>
+            </a:pPr>
+            <a:r>
+              <a:rPr sz="1200">
+                <a:solidFill>
+                  <a:srgbClr val="50FA7B"/>
+                </a:solidFill>
+                <a:latin typeface="Courier New"/>
+              </a:rPr>
+              <a:t>    msg = div.find(class_='grow').get_text(strip=True)</a:t>
+            </a:r>
+          </a:p>
+          <a:p>
+            <a:pPr>
+              <a:spcBef>
+                <a:spcPts val="0"/>
+              </a:spcBef>
+              <a:spcAft>
+                <a:spcPts val="0"/>
+              </a:spcAft>
+            </a:pPr>
+            <a:r>
+              <a:rPr sz="1200">
+                <a:solidFill>
+                  <a:srgbClr val="50FA7B"/>
+                </a:solidFill>
+                <a:latin typeface="Courier New"/>
+              </a:rPr>
+              <a:t>    records.append({'message_text': msg})</a:t>
             </a:r>
           </a:p>
         </p:txBody>
@@ -12869,7 +11063,7 @@
         <p:spPr>
           <a:xfrm>
             <a:off x="347472" y="1371600"/>
-            <a:ext cx="11494008" cy="1051560"/>
+            <a:ext cx="5303520" cy="4572000"/>
           </a:xfrm>
           <a:prstGeom prst="rect">
             <a:avLst/>
@@ -12879,7 +11073,7 @@
           </a:solidFill>
           <a:ln w="10160">
             <a:solidFill>
-              <a:srgbClr val="303050"/>
+              <a:srgbClr val="303055"/>
             </a:solidFill>
           </a:ln>
         </p:spPr>
@@ -12913,8 +11107,8 @@
         </p:nvSpPr>
         <p:spPr>
           <a:xfrm>
-            <a:off x="530352" y="1463040"/>
-            <a:ext cx="2743200" cy="347472"/>
+            <a:off x="530352" y="1481328"/>
+            <a:ext cx="5029200" cy="384048"/>
           </a:xfrm>
           <a:prstGeom prst="rect">
             <a:avLst/>
@@ -12929,12 +11123,12 @@
           <a:p>
             <a:pPr algn="l"/>
             <a:r>
-              <a:rPr sz="1200" b="1" i="0">
-                <a:solidFill>
-                  <a:srgbClr val="8888AA"/>
-                </a:solidFill>
-              </a:rPr>
-              <a:t>Raw message:</a:t>
+              <a:rPr sz="1500" b="1" i="0">
+                <a:solidFill>
+                  <a:srgbClr val="4EA8DA"/>
+                </a:solidFill>
+              </a:rPr>
+              <a:t>Text Normalisation</a:t>
             </a:r>
           </a:p>
         </p:txBody>
@@ -12947,8 +11141,8 @@
         </p:nvSpPr>
         <p:spPr>
           <a:xfrm>
-            <a:off x="530352" y="1783080"/>
-            <a:ext cx="10972800" cy="457200"/>
+            <a:off x="530352" y="1901952"/>
+            <a:ext cx="5029200" cy="3950208"/>
           </a:xfrm>
           <a:prstGeom prst="rect">
             <a:avLst/>
@@ -12961,106 +11155,117 @@
           </a:bodyPr>
           <a:lstStyle/>
           <a:p>
-            <a:pPr algn="l"/>
-            <a:r>
-              <a:rPr sz="1350" b="0" i="1">
+            <a:pPr>
+              <a:spcBef>
+                <a:spcPts val="400"/>
+              </a:spcBef>
+            </a:pPr>
+            <a:r>
+              <a:rPr sz="1300">
                 <a:solidFill>
                   <a:srgbClr val="CCCCCC"/>
                 </a:solidFill>
               </a:rPr>
-              <a:t>"Alright George, box box this lap! Degradation is high on the rear tyres."</a:t>
-            </a:r>
-          </a:p>
-        </p:txBody>
-      </p:sp>
-      <p:sp>
-        <p:nvSpPr>
-          <p:cNvPr id="10" name="TextBox 9"/>
-          <p:cNvSpPr txBox="1"/>
-          <p:nvPr/>
-        </p:nvSpPr>
-        <p:spPr>
-          <a:xfrm>
-            <a:off x="530352" y="2084831"/>
-            <a:ext cx="2743200" cy="347472"/>
-          </a:xfrm>
-          <a:prstGeom prst="rect">
-            <a:avLst/>
-          </a:prstGeom>
-          <a:noFill/>
-        </p:spPr>
-        <p:txBody>
-          <a:bodyPr wrap="square">
-            <a:spAutoFit/>
-          </a:bodyPr>
-          <a:lstStyle/>
-          <a:p>
-            <a:pPr algn="l"/>
-            <a:r>
-              <a:rPr sz="1200" b="1" i="0">
-                <a:solidFill>
-                  <a:srgbClr val="50FA7B"/>
-                </a:solidFill>
-              </a:rPr>
-              <a:t>Processed message:</a:t>
-            </a:r>
-          </a:p>
-        </p:txBody>
-      </p:sp>
-      <p:sp>
-        <p:nvSpPr>
-          <p:cNvPr id="11" name="TextBox 10"/>
-          <p:cNvSpPr txBox="1"/>
-          <p:nvPr/>
-        </p:nvSpPr>
-        <p:spPr>
-          <a:xfrm>
-            <a:off x="2542032" y="2084831"/>
-            <a:ext cx="8686800" cy="347472"/>
-          </a:xfrm>
-          <a:prstGeom prst="rect">
-            <a:avLst/>
-          </a:prstGeom>
-          <a:noFill/>
-        </p:spPr>
-        <p:txBody>
-          <a:bodyPr wrap="square">
-            <a:spAutoFit/>
-          </a:bodyPr>
-          <a:lstStyle/>
-          <a:p>
-            <a:pPr algn="l"/>
-            <a:r>
-              <a:rPr sz="1350" b="1" i="0">
-                <a:solidFill>
-                  <a:srgbClr val="50FA7B"/>
-                </a:solidFill>
-              </a:rPr>
-              <a:t>"alright george box box lap degrade high rear tyre"</a:t>
-            </a:r>
-          </a:p>
-        </p:txBody>
-      </p:sp>
-      <p:sp>
-        <p:nvSpPr>
-          <p:cNvPr id="12" name="Rectangle 11"/>
+              <a:t>✦  Lowercasing: Removes casing differences ('Box' and 'box' match).</a:t>
+            </a:r>
+          </a:p>
+          <a:p>
+            <a:pPr>
+              <a:spcBef>
+                <a:spcPts val="400"/>
+              </a:spcBef>
+            </a:pPr>
+            <a:r>
+              <a:rPr sz="1300">
+                <a:solidFill>
+                  <a:srgbClr val="CCCCCC"/>
+                </a:solidFill>
+              </a:rPr>
+              <a:t>✦  Punctuation Strip: Removes exclamation marks, periods, and brackets using regex.</a:t>
+            </a:r>
+          </a:p>
+          <a:p>
+            <a:pPr>
+              <a:spcBef>
+                <a:spcPts val="400"/>
+              </a:spcBef>
+            </a:pPr>
+            <a:r>
+              <a:rPr sz="1300">
+                <a:solidFill>
+                  <a:srgbClr val="CCCCCC"/>
+                </a:solidFill>
+              </a:rPr>
+              <a:t>✦  Stopwords Filter: Drops common words ('the', 'is', 'on') that carry no unique meaning.</a:t>
+            </a:r>
+          </a:p>
+          <a:p>
+            <a:pPr>
+              <a:spcBef>
+                <a:spcPts val="400"/>
+              </a:spcBef>
+            </a:pPr>
+            <a:r>
+              <a:rPr sz="1300">
+                <a:solidFill>
+                  <a:srgbClr val="CCCCCC"/>
+                </a:solidFill>
+              </a:rPr>
+              <a:t>✦  NLTK Stemming: Porter stemmer chops suffixes logically (e.g. 'degraded' -&gt; 'degrad').</a:t>
+            </a:r>
+          </a:p>
+          <a:p>
+            <a:pPr>
+              <a:spcBef>
+                <a:spcPts val="400"/>
+              </a:spcBef>
+            </a:pPr>
+            <a:r>
+              <a:rPr sz="1300">
+                <a:solidFill>
+                  <a:srgbClr val="CCCCCC"/>
+                </a:solidFill>
+              </a:rPr>
+              <a:t>✦  spaCy Lemmatization: Uses morphological lookup to find the true dictionary base (e.g. 'won' -&gt; 'win').</a:t>
+            </a:r>
+          </a:p>
+          <a:p>
+            <a:pPr>
+              <a:spcBef>
+                <a:spcPts val="400"/>
+              </a:spcBef>
+            </a:pPr>
+            <a:r>
+              <a:rPr sz="1300">
+                <a:solidFill>
+                  <a:srgbClr val="CCCCCC"/>
+                </a:solidFill>
+              </a:rPr>
+              <a:t>✦  Corpus Storage: Clean words saved to clean_message column for model features.</a:t>
+            </a:r>
+          </a:p>
+        </p:txBody>
+      </p:sp>
+      <p:sp>
+        <p:nvSpPr>
+          <p:cNvPr id="10" name="Rectangle 9"/>
           <p:cNvSpPr/>
           <p:nvPr/>
         </p:nvSpPr>
         <p:spPr>
           <a:xfrm>
-            <a:off x="347472" y="3383280"/>
-            <a:ext cx="5623560" cy="868680"/>
+            <a:off x="5943600" y="1371600"/>
+            <a:ext cx="5897880" cy="4572000"/>
           </a:xfrm>
           <a:prstGeom prst="rect">
             <a:avLst/>
           </a:prstGeom>
           <a:solidFill>
-            <a:srgbClr val="1A1A2E"/>
+            <a:srgbClr val="121222"/>
           </a:solidFill>
-          <a:ln w="8890">
+          <a:ln w="12700">
             <a:solidFill>
-              <a:srgbClr val="4EA8DA"/>
+              <a:srgbClr val="404060"/>
             </a:solidFill>
           </a:ln>
         </p:spPr>
@@ -13088,14 +11293,14 @@
       </p:sp>
       <p:sp>
         <p:nvSpPr>
-          <p:cNvPr id="13" name="TextBox 12"/>
+          <p:cNvPr id="11" name="TextBox 10"/>
           <p:cNvSpPr txBox="1"/>
           <p:nvPr/>
         </p:nvSpPr>
         <p:spPr>
           <a:xfrm>
-            <a:off x="512064" y="3447288"/>
-            <a:ext cx="5303520" cy="347472"/>
+            <a:off x="6080760" y="1463040"/>
+            <a:ext cx="5623560" cy="4389120"/>
           </a:xfrm>
           <a:prstGeom prst="rect">
             <a:avLst/>
@@ -13103,618 +11308,236 @@
           <a:noFill/>
         </p:spPr>
         <p:txBody>
-          <a:bodyPr wrap="square">
+          <a:bodyPr wrap="none">
             <a:spAutoFit/>
           </a:bodyPr>
           <a:lstStyle/>
           <a:p>
-            <a:pPr algn="l"/>
-            <a:r>
-              <a:rPr sz="1350" b="1" i="0">
-                <a:solidFill>
-                  <a:srgbClr val="4EA8DA"/>
-                </a:solidFill>
-              </a:rPr>
-              <a:t>1. Lowercasing</a:t>
-            </a:r>
-          </a:p>
-        </p:txBody>
-      </p:sp>
-      <p:sp>
-        <p:nvSpPr>
-          <p:cNvPr id="14" name="TextBox 13"/>
-          <p:cNvSpPr txBox="1"/>
-          <p:nvPr/>
-        </p:nvSpPr>
-        <p:spPr>
-          <a:xfrm>
-            <a:off x="512064" y="3840480"/>
-            <a:ext cx="5303520" cy="347472"/>
-          </a:xfrm>
-          <a:prstGeom prst="rect">
-            <a:avLst/>
-          </a:prstGeom>
-          <a:noFill/>
-        </p:spPr>
-        <p:txBody>
-          <a:bodyPr wrap="square">
-            <a:spAutoFit/>
-          </a:bodyPr>
-          <a:lstStyle/>
-          <a:p>
-            <a:pPr algn="l"/>
-            <a:r>
-              <a:rPr sz="1200" b="0" i="0">
-                <a:solidFill>
-                  <a:srgbClr val="CCCCCC"/>
-                </a:solidFill>
-              </a:rPr>
-              <a:t>Removes casing differences so 'Box' and 'box' match perfectly.</a:t>
-            </a:r>
-          </a:p>
-        </p:txBody>
-      </p:sp>
-      <p:sp>
-        <p:nvSpPr>
-          <p:cNvPr id="15" name="Rectangle 14"/>
-          <p:cNvSpPr/>
-          <p:nvPr/>
-        </p:nvSpPr>
-        <p:spPr>
-          <a:xfrm>
-            <a:off x="347472" y="4407408"/>
-            <a:ext cx="5623560" cy="868680"/>
-          </a:xfrm>
-          <a:prstGeom prst="rect">
-            <a:avLst/>
-          </a:prstGeom>
-          <a:solidFill>
-            <a:srgbClr val="1A1A2E"/>
-          </a:solidFill>
-          <a:ln w="8890">
-            <a:solidFill>
-              <a:srgbClr val="4EA8DA"/>
-            </a:solidFill>
-          </a:ln>
-        </p:spPr>
-        <p:style>
-          <a:lnRef idx="1">
-            <a:schemeClr val="accent1"/>
-          </a:lnRef>
-          <a:fillRef idx="3">
-            <a:schemeClr val="accent1"/>
-          </a:fillRef>
-          <a:effectRef idx="2">
-            <a:schemeClr val="accent1"/>
-          </a:effectRef>
-          <a:fontRef idx="minor">
-            <a:schemeClr val="lt1"/>
-          </a:fontRef>
-        </p:style>
-        <p:txBody>
-          <a:bodyPr rtlCol="0" anchor="ctr"/>
-          <a:lstStyle/>
-          <a:p>
-            <a:pPr algn="ctr"/>
-          </a:p>
-        </p:txBody>
-      </p:sp>
-      <p:sp>
-        <p:nvSpPr>
-          <p:cNvPr id="16" name="TextBox 15"/>
-          <p:cNvSpPr txBox="1"/>
-          <p:nvPr/>
-        </p:nvSpPr>
-        <p:spPr>
-          <a:xfrm>
-            <a:off x="512064" y="4471416"/>
-            <a:ext cx="5303520" cy="347472"/>
-          </a:xfrm>
-          <a:prstGeom prst="rect">
-            <a:avLst/>
-          </a:prstGeom>
-          <a:noFill/>
-        </p:spPr>
-        <p:txBody>
-          <a:bodyPr wrap="square">
-            <a:spAutoFit/>
-          </a:bodyPr>
-          <a:lstStyle/>
-          <a:p>
-            <a:pPr algn="l"/>
-            <a:r>
-              <a:rPr sz="1350" b="1" i="0">
-                <a:solidFill>
-                  <a:srgbClr val="4EA8DA"/>
-                </a:solidFill>
-              </a:rPr>
-              <a:t>2. Punctuation Strip</a:t>
-            </a:r>
-          </a:p>
-        </p:txBody>
-      </p:sp>
-      <p:sp>
-        <p:nvSpPr>
-          <p:cNvPr id="17" name="TextBox 16"/>
-          <p:cNvSpPr txBox="1"/>
-          <p:nvPr/>
-        </p:nvSpPr>
-        <p:spPr>
-          <a:xfrm>
-            <a:off x="512064" y="4864608"/>
-            <a:ext cx="5303520" cy="347472"/>
-          </a:xfrm>
-          <a:prstGeom prst="rect">
-            <a:avLst/>
-          </a:prstGeom>
-          <a:noFill/>
-        </p:spPr>
-        <p:txBody>
-          <a:bodyPr wrap="square">
-            <a:spAutoFit/>
-          </a:bodyPr>
-          <a:lstStyle/>
-          <a:p>
-            <a:pPr algn="l"/>
-            <a:r>
-              <a:rPr sz="1200" b="0" i="0">
-                <a:solidFill>
-                  <a:srgbClr val="CCCCCC"/>
-                </a:solidFill>
-              </a:rPr>
-              <a:t>Removes exclamation marks, periods, and brackets using regex.</a:t>
-            </a:r>
-          </a:p>
-        </p:txBody>
-      </p:sp>
-      <p:sp>
-        <p:nvSpPr>
-          <p:cNvPr id="18" name="Rectangle 17"/>
-          <p:cNvSpPr/>
-          <p:nvPr/>
-        </p:nvSpPr>
-        <p:spPr>
-          <a:xfrm>
-            <a:off x="347472" y="5431536"/>
-            <a:ext cx="5623560" cy="868680"/>
-          </a:xfrm>
-          <a:prstGeom prst="rect">
-            <a:avLst/>
-          </a:prstGeom>
-          <a:solidFill>
-            <a:srgbClr val="1A1A2E"/>
-          </a:solidFill>
-          <a:ln w="8890">
-            <a:solidFill>
-              <a:srgbClr val="4EA8DA"/>
-            </a:solidFill>
-          </a:ln>
-        </p:spPr>
-        <p:style>
-          <a:lnRef idx="1">
-            <a:schemeClr val="accent1"/>
-          </a:lnRef>
-          <a:fillRef idx="3">
-            <a:schemeClr val="accent1"/>
-          </a:fillRef>
-          <a:effectRef idx="2">
-            <a:schemeClr val="accent1"/>
-          </a:effectRef>
-          <a:fontRef idx="minor">
-            <a:schemeClr val="lt1"/>
-          </a:fontRef>
-        </p:style>
-        <p:txBody>
-          <a:bodyPr rtlCol="0" anchor="ctr"/>
-          <a:lstStyle/>
-          <a:p>
-            <a:pPr algn="ctr"/>
-          </a:p>
-        </p:txBody>
-      </p:sp>
-      <p:sp>
-        <p:nvSpPr>
-          <p:cNvPr id="19" name="TextBox 18"/>
-          <p:cNvSpPr txBox="1"/>
-          <p:nvPr/>
-        </p:nvSpPr>
-        <p:spPr>
-          <a:xfrm>
-            <a:off x="512064" y="5495544"/>
-            <a:ext cx="5303520" cy="347472"/>
-          </a:xfrm>
-          <a:prstGeom prst="rect">
-            <a:avLst/>
-          </a:prstGeom>
-          <a:noFill/>
-        </p:spPr>
-        <p:txBody>
-          <a:bodyPr wrap="square">
-            <a:spAutoFit/>
-          </a:bodyPr>
-          <a:lstStyle/>
-          <a:p>
-            <a:pPr algn="l"/>
-            <a:r>
-              <a:rPr sz="1350" b="1" i="0">
-                <a:solidFill>
-                  <a:srgbClr val="4EA8DA"/>
-                </a:solidFill>
-              </a:rPr>
-              <a:t>3. Stopwords Filter</a:t>
-            </a:r>
-          </a:p>
-        </p:txBody>
-      </p:sp>
-      <p:sp>
-        <p:nvSpPr>
-          <p:cNvPr id="20" name="TextBox 19"/>
-          <p:cNvSpPr txBox="1"/>
-          <p:nvPr/>
-        </p:nvSpPr>
-        <p:spPr>
-          <a:xfrm>
-            <a:off x="512064" y="5888736"/>
-            <a:ext cx="5303520" cy="347472"/>
-          </a:xfrm>
-          <a:prstGeom prst="rect">
-            <a:avLst/>
-          </a:prstGeom>
-          <a:noFill/>
-        </p:spPr>
-        <p:txBody>
-          <a:bodyPr wrap="square">
-            <a:spAutoFit/>
-          </a:bodyPr>
-          <a:lstStyle/>
-          <a:p>
-            <a:pPr algn="l"/>
-            <a:r>
-              <a:rPr sz="1200" b="0" i="0">
-                <a:solidFill>
-                  <a:srgbClr val="CCCCCC"/>
-                </a:solidFill>
-              </a:rPr>
-              <a:t>Drops common words ('the', 'is', 'on', 'with') that carry no unique semantic meaning.</a:t>
-            </a:r>
-          </a:p>
-        </p:txBody>
-      </p:sp>
-      <p:sp>
-        <p:nvSpPr>
-          <p:cNvPr id="21" name="Rectangle 20"/>
-          <p:cNvSpPr/>
-          <p:nvPr/>
-        </p:nvSpPr>
-        <p:spPr>
-          <a:xfrm>
-            <a:off x="6245352" y="3383280"/>
-            <a:ext cx="5623560" cy="868680"/>
-          </a:xfrm>
-          <a:prstGeom prst="rect">
-            <a:avLst/>
-          </a:prstGeom>
-          <a:solidFill>
-            <a:srgbClr val="1A1A2E"/>
-          </a:solidFill>
-          <a:ln w="8890">
-            <a:solidFill>
-              <a:srgbClr val="FFC00B"/>
-            </a:solidFill>
-          </a:ln>
-        </p:spPr>
-        <p:style>
-          <a:lnRef idx="1">
-            <a:schemeClr val="accent1"/>
-          </a:lnRef>
-          <a:fillRef idx="3">
-            <a:schemeClr val="accent1"/>
-          </a:fillRef>
-          <a:effectRef idx="2">
-            <a:schemeClr val="accent1"/>
-          </a:effectRef>
-          <a:fontRef idx="minor">
-            <a:schemeClr val="lt1"/>
-          </a:fontRef>
-        </p:style>
-        <p:txBody>
-          <a:bodyPr rtlCol="0" anchor="ctr"/>
-          <a:lstStyle/>
-          <a:p>
-            <a:pPr algn="ctr"/>
-          </a:p>
-        </p:txBody>
-      </p:sp>
-      <p:sp>
-        <p:nvSpPr>
-          <p:cNvPr id="22" name="TextBox 21"/>
-          <p:cNvSpPr txBox="1"/>
-          <p:nvPr/>
-        </p:nvSpPr>
-        <p:spPr>
-          <a:xfrm>
-            <a:off x="6409944" y="3447288"/>
-            <a:ext cx="5303520" cy="347472"/>
-          </a:xfrm>
-          <a:prstGeom prst="rect">
-            <a:avLst/>
-          </a:prstGeom>
-          <a:noFill/>
-        </p:spPr>
-        <p:txBody>
-          <a:bodyPr wrap="square">
-            <a:spAutoFit/>
-          </a:bodyPr>
-          <a:lstStyle/>
-          <a:p>
-            <a:pPr algn="l"/>
-            <a:r>
-              <a:rPr sz="1350" b="1" i="0">
-                <a:solidFill>
-                  <a:srgbClr val="FFC00B"/>
-                </a:solidFill>
-              </a:rPr>
-              <a:t>4. NLTK Stemming</a:t>
-            </a:r>
-          </a:p>
-        </p:txBody>
-      </p:sp>
-      <p:sp>
-        <p:nvSpPr>
-          <p:cNvPr id="23" name="TextBox 22"/>
-          <p:cNvSpPr txBox="1"/>
-          <p:nvPr/>
-        </p:nvSpPr>
-        <p:spPr>
-          <a:xfrm>
-            <a:off x="6409944" y="3840480"/>
-            <a:ext cx="5303520" cy="347472"/>
-          </a:xfrm>
-          <a:prstGeom prst="rect">
-            <a:avLst/>
-          </a:prstGeom>
-          <a:noFill/>
-        </p:spPr>
-        <p:txBody>
-          <a:bodyPr wrap="square">
-            <a:spAutoFit/>
-          </a:bodyPr>
-          <a:lstStyle/>
-          <a:p>
-            <a:pPr algn="l"/>
-            <a:r>
-              <a:rPr sz="1200" b="0" i="0">
-                <a:solidFill>
-                  <a:srgbClr val="CCCCCC"/>
-                </a:solidFill>
-              </a:rPr>
-              <a:t>Porter stemmer chops suffixes logically (e.g. 'degraded' → 'degrad').</a:t>
-            </a:r>
-          </a:p>
-        </p:txBody>
-      </p:sp>
-      <p:sp>
-        <p:nvSpPr>
-          <p:cNvPr id="24" name="Rectangle 23"/>
-          <p:cNvSpPr/>
-          <p:nvPr/>
-        </p:nvSpPr>
-        <p:spPr>
-          <a:xfrm>
-            <a:off x="6245352" y="4407408"/>
-            <a:ext cx="5623560" cy="868680"/>
-          </a:xfrm>
-          <a:prstGeom prst="rect">
-            <a:avLst/>
-          </a:prstGeom>
-          <a:solidFill>
-            <a:srgbClr val="1A1A2E"/>
-          </a:solidFill>
-          <a:ln w="8890">
-            <a:solidFill>
-              <a:srgbClr val="FFC00B"/>
-            </a:solidFill>
-          </a:ln>
-        </p:spPr>
-        <p:style>
-          <a:lnRef idx="1">
-            <a:schemeClr val="accent1"/>
-          </a:lnRef>
-          <a:fillRef idx="3">
-            <a:schemeClr val="accent1"/>
-          </a:fillRef>
-          <a:effectRef idx="2">
-            <a:schemeClr val="accent1"/>
-          </a:effectRef>
-          <a:fontRef idx="minor">
-            <a:schemeClr val="lt1"/>
-          </a:fontRef>
-        </p:style>
-        <p:txBody>
-          <a:bodyPr rtlCol="0" anchor="ctr"/>
-          <a:lstStyle/>
-          <a:p>
-            <a:pPr algn="ctr"/>
-          </a:p>
-        </p:txBody>
-      </p:sp>
-      <p:sp>
-        <p:nvSpPr>
-          <p:cNvPr id="25" name="TextBox 24"/>
-          <p:cNvSpPr txBox="1"/>
-          <p:nvPr/>
-        </p:nvSpPr>
-        <p:spPr>
-          <a:xfrm>
-            <a:off x="6409944" y="4471416"/>
-            <a:ext cx="5303520" cy="347472"/>
-          </a:xfrm>
-          <a:prstGeom prst="rect">
-            <a:avLst/>
-          </a:prstGeom>
-          <a:noFill/>
-        </p:spPr>
-        <p:txBody>
-          <a:bodyPr wrap="square">
-            <a:spAutoFit/>
-          </a:bodyPr>
-          <a:lstStyle/>
-          <a:p>
-            <a:pPr algn="l"/>
-            <a:r>
-              <a:rPr sz="1350" b="1" i="0">
-                <a:solidFill>
-                  <a:srgbClr val="FFC00B"/>
-                </a:solidFill>
-              </a:rPr>
-              <a:t>5. spaCy Lemmatization</a:t>
-            </a:r>
-          </a:p>
-        </p:txBody>
-      </p:sp>
-      <p:sp>
-        <p:nvSpPr>
-          <p:cNvPr id="26" name="TextBox 25"/>
-          <p:cNvSpPr txBox="1"/>
-          <p:nvPr/>
-        </p:nvSpPr>
-        <p:spPr>
-          <a:xfrm>
-            <a:off x="6409944" y="4864608"/>
-            <a:ext cx="5303520" cy="347472"/>
-          </a:xfrm>
-          <a:prstGeom prst="rect">
-            <a:avLst/>
-          </a:prstGeom>
-          <a:noFill/>
-        </p:spPr>
-        <p:txBody>
-          <a:bodyPr wrap="square">
-            <a:spAutoFit/>
-          </a:bodyPr>
-          <a:lstStyle/>
-          <a:p>
-            <a:pPr algn="l"/>
-            <a:r>
-              <a:rPr sz="1200" b="0" i="0">
-                <a:solidFill>
-                  <a:srgbClr val="CCCCCC"/>
-                </a:solidFill>
-              </a:rPr>
-              <a:t>Uses morphological lookup to find the true dictionary base (e.g. 'won' → 'win').</a:t>
-            </a:r>
-          </a:p>
-        </p:txBody>
-      </p:sp>
-      <p:sp>
-        <p:nvSpPr>
-          <p:cNvPr id="27" name="Rectangle 26"/>
-          <p:cNvSpPr/>
-          <p:nvPr/>
-        </p:nvSpPr>
-        <p:spPr>
-          <a:xfrm>
-            <a:off x="6245352" y="5431536"/>
-            <a:ext cx="5623560" cy="868680"/>
-          </a:xfrm>
-          <a:prstGeom prst="rect">
-            <a:avLst/>
-          </a:prstGeom>
-          <a:solidFill>
-            <a:srgbClr val="1A1A2E"/>
-          </a:solidFill>
-          <a:ln w="8890">
-            <a:solidFill>
-              <a:srgbClr val="FFC00B"/>
-            </a:solidFill>
-          </a:ln>
-        </p:spPr>
-        <p:style>
-          <a:lnRef idx="1">
-            <a:schemeClr val="accent1"/>
-          </a:lnRef>
-          <a:fillRef idx="3">
-            <a:schemeClr val="accent1"/>
-          </a:fillRef>
-          <a:effectRef idx="2">
-            <a:schemeClr val="accent1"/>
-          </a:effectRef>
-          <a:fontRef idx="minor">
-            <a:schemeClr val="lt1"/>
-          </a:fontRef>
-        </p:style>
-        <p:txBody>
-          <a:bodyPr rtlCol="0" anchor="ctr"/>
-          <a:lstStyle/>
-          <a:p>
-            <a:pPr algn="ctr"/>
-          </a:p>
-        </p:txBody>
-      </p:sp>
-      <p:sp>
-        <p:nvSpPr>
-          <p:cNvPr id="28" name="TextBox 27"/>
-          <p:cNvSpPr txBox="1"/>
-          <p:nvPr/>
-        </p:nvSpPr>
-        <p:spPr>
-          <a:xfrm>
-            <a:off x="6409944" y="5495544"/>
-            <a:ext cx="5303520" cy="347472"/>
-          </a:xfrm>
-          <a:prstGeom prst="rect">
-            <a:avLst/>
-          </a:prstGeom>
-          <a:noFill/>
-        </p:spPr>
-        <p:txBody>
-          <a:bodyPr wrap="square">
-            <a:spAutoFit/>
-          </a:bodyPr>
-          <a:lstStyle/>
-          <a:p>
-            <a:pPr algn="l"/>
-            <a:r>
-              <a:rPr sz="1350" b="1" i="0">
-                <a:solidFill>
-                  <a:srgbClr val="FFC00B"/>
-                </a:solidFill>
-              </a:rPr>
-              <a:t>6. Corpus Storage</a:t>
-            </a:r>
-          </a:p>
-        </p:txBody>
-      </p:sp>
-      <p:sp>
-        <p:nvSpPr>
-          <p:cNvPr id="29" name="TextBox 28"/>
-          <p:cNvSpPr txBox="1"/>
-          <p:nvPr/>
-        </p:nvSpPr>
-        <p:spPr>
-          <a:xfrm>
-            <a:off x="6409944" y="5888736"/>
-            <a:ext cx="5303520" cy="347472"/>
-          </a:xfrm>
-          <a:prstGeom prst="rect">
-            <a:avLst/>
-          </a:prstGeom>
-          <a:noFill/>
-        </p:spPr>
-        <p:txBody>
-          <a:bodyPr wrap="square">
-            <a:spAutoFit/>
-          </a:bodyPr>
-          <a:lstStyle/>
-          <a:p>
-            <a:pPr algn="l"/>
-            <a:r>
-              <a:rPr sz="1200" b="0" i="0">
-                <a:solidFill>
-                  <a:srgbClr val="CCCCCC"/>
-                </a:solidFill>
-              </a:rPr>
-              <a:t>Clean words saved to clean_message column for model features.</a:t>
+            <a:pPr>
+              <a:spcBef>
+                <a:spcPts val="0"/>
+              </a:spcBef>
+              <a:spcAft>
+                <a:spcPts val="0"/>
+              </a:spcAft>
+            </a:pPr>
+            <a:r>
+              <a:rPr sz="1200">
+                <a:solidFill>
+                  <a:srgbClr val="FFD866"/>
+                </a:solidFill>
+                <a:latin typeface="Courier New"/>
+              </a:rPr>
+              <a:t>import spacy</a:t>
+            </a:r>
+          </a:p>
+          <a:p>
+            <a:pPr>
+              <a:spcBef>
+                <a:spcPts val="0"/>
+              </a:spcBef>
+              <a:spcAft>
+                <a:spcPts val="0"/>
+              </a:spcAft>
+            </a:pPr>
+            <a:r>
+              <a:rPr sz="1200">
+                <a:solidFill>
+                  <a:srgbClr val="50FA7B"/>
+                </a:solidFill>
+                <a:latin typeface="Courier New"/>
+              </a:rPr>
+              <a:t>nlp = spacy.load('en_core_web_sm')</a:t>
+            </a:r>
+          </a:p>
+          <a:p>
+            <a:pPr>
+              <a:spcBef>
+                <a:spcPts val="0"/>
+              </a:spcBef>
+              <a:spcAft>
+                <a:spcPts val="0"/>
+              </a:spcAft>
+            </a:pPr>
+            <a:r>
+              <a:rPr sz="1200">
+                <a:solidFill>
+                  <a:srgbClr val="50FA7B"/>
+                </a:solidFill>
+                <a:latin typeface="Courier New"/>
+              </a:rPr>
+              <a:t/>
+            </a:r>
+          </a:p>
+          <a:p>
+            <a:pPr>
+              <a:spcBef>
+                <a:spcPts val="0"/>
+              </a:spcBef>
+              <a:spcAft>
+                <a:spcPts val="0"/>
+              </a:spcAft>
+            </a:pPr>
+            <a:r>
+              <a:rPr sz="1200">
+                <a:solidFill>
+                  <a:srgbClr val="FFD866"/>
+                </a:solidFill>
+                <a:latin typeface="Courier New"/>
+              </a:rPr>
+              <a:t>def preprocess(text):</a:t>
+            </a:r>
+          </a:p>
+          <a:p>
+            <a:pPr>
+              <a:spcBef>
+                <a:spcPts val="0"/>
+              </a:spcBef>
+              <a:spcAft>
+                <a:spcPts val="0"/>
+              </a:spcAft>
+            </a:pPr>
+            <a:r>
+              <a:rPr sz="1200">
+                <a:solidFill>
+                  <a:srgbClr val="50FA7B"/>
+                </a:solidFill>
+                <a:latin typeface="Courier New"/>
+              </a:rPr>
+              <a:t>    doc = nlp(str(text).lower())</a:t>
+            </a:r>
+          </a:p>
+          <a:p>
+            <a:pPr>
+              <a:spcBef>
+                <a:spcPts val="0"/>
+              </a:spcBef>
+              <a:spcAft>
+                <a:spcPts val="0"/>
+              </a:spcAft>
+            </a:pPr>
+            <a:r>
+              <a:rPr sz="1200">
+                <a:solidFill>
+                  <a:srgbClr val="50FA7B"/>
+                </a:solidFill>
+                <a:latin typeface="Courier New"/>
+              </a:rPr>
+              <a:t>    tokens = [</a:t>
+            </a:r>
+          </a:p>
+          <a:p>
+            <a:pPr>
+              <a:spcBef>
+                <a:spcPts val="0"/>
+              </a:spcBef>
+              <a:spcAft>
+                <a:spcPts val="0"/>
+              </a:spcAft>
+            </a:pPr>
+            <a:r>
+              <a:rPr sz="1200">
+                <a:solidFill>
+                  <a:srgbClr val="50FA7B"/>
+                </a:solidFill>
+                <a:latin typeface="Courier New"/>
+              </a:rPr>
+              <a:t>        token.lemma_            # lemmatize</a:t>
+            </a:r>
+          </a:p>
+          <a:p>
+            <a:pPr>
+              <a:spcBef>
+                <a:spcPts val="0"/>
+              </a:spcBef>
+              <a:spcAft>
+                <a:spcPts val="0"/>
+              </a:spcAft>
+            </a:pPr>
+            <a:r>
+              <a:rPr sz="1200">
+                <a:solidFill>
+                  <a:srgbClr val="FFD866"/>
+                </a:solidFill>
+                <a:latin typeface="Courier New"/>
+              </a:rPr>
+              <a:t>        for token in doc</a:t>
+            </a:r>
+          </a:p>
+          <a:p>
+            <a:pPr>
+              <a:spcBef>
+                <a:spcPts val="0"/>
+              </a:spcBef>
+              <a:spcAft>
+                <a:spcPts val="0"/>
+              </a:spcAft>
+            </a:pPr>
+            <a:r>
+              <a:rPr sz="1200">
+                <a:solidFill>
+                  <a:srgbClr val="FFD866"/>
+                </a:solidFill>
+                <a:latin typeface="Courier New"/>
+              </a:rPr>
+              <a:t>        if not token.is_stop    # stopword filter</a:t>
+            </a:r>
+          </a:p>
+          <a:p>
+            <a:pPr>
+              <a:spcBef>
+                <a:spcPts val="0"/>
+              </a:spcBef>
+              <a:spcAft>
+                <a:spcPts val="0"/>
+              </a:spcAft>
+            </a:pPr>
+            <a:r>
+              <a:rPr sz="1200">
+                <a:solidFill>
+                  <a:srgbClr val="50FA7B"/>
+                </a:solidFill>
+                <a:latin typeface="Courier New"/>
+              </a:rPr>
+              <a:t>        and not token.is_punct  # remove punct</a:t>
+            </a:r>
+          </a:p>
+          <a:p>
+            <a:pPr>
+              <a:spcBef>
+                <a:spcPts val="0"/>
+              </a:spcBef>
+              <a:spcAft>
+                <a:spcPts val="0"/>
+              </a:spcAft>
+            </a:pPr>
+            <a:r>
+              <a:rPr sz="1200">
+                <a:solidFill>
+                  <a:srgbClr val="50FA7B"/>
+                </a:solidFill>
+                <a:latin typeface="Courier New"/>
+              </a:rPr>
+              <a:t>    ]</a:t>
+            </a:r>
+          </a:p>
+          <a:p>
+            <a:pPr>
+              <a:spcBef>
+                <a:spcPts val="0"/>
+              </a:spcBef>
+              <a:spcAft>
+                <a:spcPts val="0"/>
+              </a:spcAft>
+            </a:pPr>
+            <a:r>
+              <a:rPr sz="1200">
+                <a:solidFill>
+                  <a:srgbClr val="FFD866"/>
+                </a:solidFill>
+                <a:latin typeface="Courier New"/>
+              </a:rPr>
+              <a:t>    return ' '.join(tokens)</a:t>
             </a:r>
           </a:p>
         </p:txBody>
@@ -13942,7 +11765,7 @@
         <p:spPr>
           <a:xfrm>
             <a:off x="347472" y="1371600"/>
-            <a:ext cx="5623560" cy="3291840"/>
+            <a:ext cx="5303520" cy="4572000"/>
           </a:xfrm>
           <a:prstGeom prst="rect">
             <a:avLst/>
@@ -13987,7 +11810,7 @@
         <p:spPr>
           <a:xfrm>
             <a:off x="530352" y="1481328"/>
-            <a:ext cx="5349240" cy="384048"/>
+            <a:ext cx="5029200" cy="384048"/>
           </a:xfrm>
           <a:prstGeom prst="rect">
             <a:avLst/>
@@ -14004,10 +11827,10 @@
             <a:r>
               <a:rPr sz="1500" b="1" i="0">
                 <a:solidFill>
-                  <a:srgbClr val="E51B23"/>
-                </a:solidFill>
-              </a:rPr>
-              <a:t>Zipf's Law</a:t>
+                  <a:srgbClr val="4EA8DA"/>
+                </a:solidFill>
+              </a:rPr>
+              <a:t>Distribution &amp; Search from Scratch</a:t>
             </a:r>
           </a:p>
         </p:txBody>
@@ -14021,7 +11844,7 @@
         <p:spPr>
           <a:xfrm>
             <a:off x="530352" y="1901952"/>
-            <a:ext cx="5349240" cy="2670048"/>
+            <a:ext cx="5029200" cy="3950208"/>
           </a:xfrm>
           <a:prstGeom prst="rect">
             <a:avLst/>
@@ -14040,12 +11863,12 @@
               </a:spcBef>
             </a:pPr>
             <a:r>
-              <a:rPr sz="1350">
+              <a:rPr sz="1300">
                 <a:solidFill>
                   <a:srgbClr val="CCCCCC"/>
                 </a:solidFill>
               </a:rPr>
-              <a:t>◆  Word frequency is inversely proportional to its rank.</a:t>
+              <a:t>✦  Zipf's Law: Word frequency is inversely proportional to its rank. Plotted log-log scale matches negative linear line.</a:t>
             </a:r>
           </a:p>
           <a:p>
@@ -14055,12 +11878,12 @@
               </a:spcBef>
             </a:pPr>
             <a:r>
-              <a:rPr sz="1350">
+              <a:rPr sz="1300">
                 <a:solidFill>
                   <a:srgbClr val="CCCCCC"/>
                 </a:solidFill>
               </a:rPr>
-              <a:t>◆  Formula: Frequency × Rank ≈ Constant.</a:t>
+              <a:t>✦  TF-IDF scratch engine: Built manual retrieval query math.</a:t>
             </a:r>
           </a:p>
           <a:p>
@@ -14070,12 +11893,12 @@
               </a:spcBef>
             </a:pPr>
             <a:r>
-              <a:rPr sz="1350">
+              <a:rPr sz="1300">
                 <a:solidFill>
                   <a:srgbClr val="CCCCCC"/>
                 </a:solidFill>
               </a:rPr>
-              <a:t>◆  We plotted frequency vs rank on a log-log scale.</a:t>
+              <a:t>✦  Term Frequency (TF): Term occurrences relative to doc length.</a:t>
             </a:r>
           </a:p>
           <a:p>
@@ -14085,12 +11908,27 @@
               </a:spcBef>
             </a:pPr>
             <a:r>
-              <a:rPr sz="1350">
+              <a:rPr sz="1300">
                 <a:solidFill>
                   <a:srgbClr val="CCCCCC"/>
                 </a:solidFill>
               </a:rPr>
-              <a:t>◆  Result matches a straight negative slope, verifying that Zipf's law holds perfectly on F1 radio corpus.</a:t>
+              <a:t>✦  Inverse Document Frequency (IDF): Log of total documents divided by documents containing target term.</a:t>
+            </a:r>
+          </a:p>
+          <a:p>
+            <a:pPr>
+              <a:spcBef>
+                <a:spcPts val="400"/>
+              </a:spcBef>
+            </a:pPr>
+            <a:r>
+              <a:rPr sz="1300">
+                <a:solidFill>
+                  <a:srgbClr val="CCCCCC"/>
+                </a:solidFill>
+              </a:rPr>
+              <a:t>✦  Cosine Similarity: Measures angle between query and document vectors to find top matches.</a:t>
             </a:r>
           </a:p>
         </p:txBody>
@@ -14103,18 +11941,18 @@
         </p:nvSpPr>
         <p:spPr>
           <a:xfrm>
-            <a:off x="6245352" y="1371600"/>
-            <a:ext cx="5623560" cy="3291840"/>
+            <a:off x="5943600" y="1371600"/>
+            <a:ext cx="5897880" cy="4572000"/>
           </a:xfrm>
           <a:prstGeom prst="rect">
             <a:avLst/>
           </a:prstGeom>
           <a:solidFill>
-            <a:srgbClr val="1A1A2E"/>
+            <a:srgbClr val="121222"/>
           </a:solidFill>
-          <a:ln w="10160">
+          <a:ln w="12700">
             <a:solidFill>
-              <a:srgbClr val="303055"/>
+              <a:srgbClr val="404060"/>
             </a:solidFill>
           </a:ln>
         </p:spPr>
@@ -14148,8 +11986,8 @@
         </p:nvSpPr>
         <p:spPr>
           <a:xfrm>
-            <a:off x="6428232" y="1481328"/>
-            <a:ext cx="5349240" cy="384048"/>
+            <a:off x="6080760" y="1463040"/>
+            <a:ext cx="5623560" cy="4389120"/>
           </a:xfrm>
           <a:prstGeom prst="rect">
             <a:avLst/>
@@ -14157,215 +11995,217 @@
           <a:noFill/>
         </p:spPr>
         <p:txBody>
-          <a:bodyPr wrap="square">
+          <a:bodyPr wrap="none">
             <a:spAutoFit/>
           </a:bodyPr>
           <a:lstStyle/>
           <a:p>
-            <a:pPr algn="l"/>
-            <a:r>
-              <a:rPr sz="1500" b="1" i="0">
-                <a:solidFill>
-                  <a:srgbClr val="4EA8DA"/>
-                </a:solidFill>
-              </a:rPr>
-              <a:t>TF-IDF Search Engine from Scratch</a:t>
-            </a:r>
-          </a:p>
-        </p:txBody>
-      </p:sp>
-      <p:sp>
-        <p:nvSpPr>
-          <p:cNvPr id="12" name="TextBox 11"/>
-          <p:cNvSpPr txBox="1"/>
-          <p:nvPr/>
-        </p:nvSpPr>
-        <p:spPr>
-          <a:xfrm>
-            <a:off x="6428232" y="1901952"/>
-            <a:ext cx="5349240" cy="2670048"/>
-          </a:xfrm>
-          <a:prstGeom prst="rect">
-            <a:avLst/>
-          </a:prstGeom>
-          <a:noFill/>
-        </p:spPr>
-        <p:txBody>
-          <a:bodyPr wrap="square">
-            <a:spAutoFit/>
-          </a:bodyPr>
-          <a:lstStyle/>
-          <a:p>
-            <a:pPr>
-              <a:spcBef>
-                <a:spcPts val="400"/>
-              </a:spcBef>
-            </a:pPr>
-            <a:r>
-              <a:rPr sz="1350">
-                <a:solidFill>
-                  <a:srgbClr val="CCCCCC"/>
-                </a:solidFill>
-              </a:rPr>
-              <a:t>◆  We built a baseline F1 search engine manually using TF and IDF.</a:t>
-            </a:r>
-          </a:p>
-          <a:p>
-            <a:pPr>
-              <a:spcBef>
-                <a:spcPts val="400"/>
-              </a:spcBef>
-            </a:pPr>
-            <a:r>
-              <a:rPr sz="1350">
-                <a:solidFill>
-                  <a:srgbClr val="CCCCCC"/>
-                </a:solidFill>
-              </a:rPr>
-              <a:t>◆  Term Frequency (TF): Word occurrences relative to document length.</a:t>
-            </a:r>
-          </a:p>
-          <a:p>
-            <a:pPr>
-              <a:spcBef>
-                <a:spcPts val="400"/>
-              </a:spcBef>
-            </a:pPr>
-            <a:r>
-              <a:rPr sz="1350">
-                <a:solidFill>
-                  <a:srgbClr val="CCCCCC"/>
-                </a:solidFill>
-              </a:rPr>
-              <a:t>◆  Inverse Document Frequency (IDF): Log of total documents divided by documents containing the term.</a:t>
-            </a:r>
-          </a:p>
-          <a:p>
-            <a:pPr>
-              <a:spcBef>
-                <a:spcPts val="400"/>
-              </a:spcBef>
-            </a:pPr>
-            <a:r>
-              <a:rPr sz="1350">
-                <a:solidFill>
-                  <a:srgbClr val="CCCCCC"/>
-                </a:solidFill>
-              </a:rPr>
-              <a:t>◆  Cosine Similarity: Measures angle between query vector and document vector to find top matches.</a:t>
-            </a:r>
-          </a:p>
-        </p:txBody>
-      </p:sp>
-      <p:sp>
-        <p:nvSpPr>
-          <p:cNvPr id="13" name="Rectangle 12"/>
-          <p:cNvSpPr/>
-          <p:nvPr/>
-        </p:nvSpPr>
-        <p:spPr>
-          <a:xfrm>
-            <a:off x="347472" y="4892040"/>
-            <a:ext cx="11494008" cy="1463040"/>
-          </a:xfrm>
-          <a:prstGeom prst="rect">
-            <a:avLst/>
-          </a:prstGeom>
-          <a:solidFill>
-            <a:srgbClr val="1A1A2E"/>
-          </a:solidFill>
-          <a:ln w="15240">
-            <a:solidFill>
-              <a:srgbClr val="50FA7B"/>
-            </a:solidFill>
-          </a:ln>
-        </p:spPr>
-        <p:style>
-          <a:lnRef idx="1">
-            <a:schemeClr val="accent1"/>
-          </a:lnRef>
-          <a:fillRef idx="3">
-            <a:schemeClr val="accent1"/>
-          </a:fillRef>
-          <a:effectRef idx="2">
-            <a:schemeClr val="accent1"/>
-          </a:effectRef>
-          <a:fontRef idx="minor">
-            <a:schemeClr val="lt1"/>
-          </a:fontRef>
-        </p:style>
-        <p:txBody>
-          <a:bodyPr rtlCol="0" anchor="ctr"/>
-          <a:lstStyle/>
-          <a:p>
-            <a:pPr algn="ctr"/>
-          </a:p>
-        </p:txBody>
-      </p:sp>
-      <p:sp>
-        <p:nvSpPr>
-          <p:cNvPr id="14" name="TextBox 13"/>
-          <p:cNvSpPr txBox="1"/>
-          <p:nvPr/>
-        </p:nvSpPr>
-        <p:spPr>
-          <a:xfrm>
-            <a:off x="530352" y="5010912"/>
-            <a:ext cx="10972800" cy="320040"/>
-          </a:xfrm>
-          <a:prstGeom prst="rect">
-            <a:avLst/>
-          </a:prstGeom>
-          <a:noFill/>
-        </p:spPr>
-        <p:txBody>
-          <a:bodyPr wrap="square">
-            <a:spAutoFit/>
-          </a:bodyPr>
-          <a:lstStyle/>
-          <a:p>
-            <a:pPr algn="l"/>
-            <a:r>
-              <a:rPr sz="1500" b="1" i="0">
+            <a:pPr>
+              <a:spcBef>
+                <a:spcPts val="0"/>
+              </a:spcBef>
+              <a:spcAft>
+                <a:spcPts val="0"/>
+              </a:spcAft>
+            </a:pPr>
+            <a:r>
+              <a:rPr sz="1200">
+                <a:solidFill>
+                  <a:srgbClr val="FFD866"/>
+                </a:solidFill>
+                <a:latin typeface="Courier New"/>
+              </a:rPr>
+              <a:t>from collections import Counter</a:t>
+            </a:r>
+          </a:p>
+          <a:p>
+            <a:pPr>
+              <a:spcBef>
+                <a:spcPts val="0"/>
+              </a:spcBef>
+              <a:spcAft>
+                <a:spcPts val="0"/>
+              </a:spcAft>
+            </a:pPr>
+            <a:r>
+              <a:rPr sz="1200">
+                <a:solidFill>
+                  <a:srgbClr val="FFD866"/>
+                </a:solidFill>
+                <a:latin typeface="Courier New"/>
+              </a:rPr>
+              <a:t>import math</a:t>
+            </a:r>
+          </a:p>
+          <a:p>
+            <a:pPr>
+              <a:spcBef>
+                <a:spcPts val="0"/>
+              </a:spcBef>
+              <a:spcAft>
+                <a:spcPts val="0"/>
+              </a:spcAft>
+            </a:pPr>
+            <a:r>
+              <a:rPr sz="1200">
                 <a:solidFill>
                   <a:srgbClr val="50FA7B"/>
                 </a:solidFill>
-              </a:rPr>
-              <a:t>💡  Why this analysis matters</a:t>
-            </a:r>
-          </a:p>
-        </p:txBody>
-      </p:sp>
-      <p:sp>
-        <p:nvSpPr>
-          <p:cNvPr id="15" name="TextBox 14"/>
-          <p:cNvSpPr txBox="1"/>
-          <p:nvPr/>
-        </p:nvSpPr>
-        <p:spPr>
-          <a:xfrm>
-            <a:off x="530352" y="5440680"/>
-            <a:ext cx="11064240" cy="822960"/>
-          </a:xfrm>
-          <a:prstGeom prst="rect">
-            <a:avLst/>
-          </a:prstGeom>
-          <a:noFill/>
-        </p:spPr>
-        <p:txBody>
-          <a:bodyPr wrap="square">
-            <a:spAutoFit/>
-          </a:bodyPr>
-          <a:lstStyle/>
-          <a:p>
-            <a:pPr algn="l"/>
-            <a:r>
-              <a:rPr sz="1350" b="0" i="0">
-                <a:solidFill>
-                  <a:srgbClr val="CCCCCC"/>
-                </a:solidFill>
-              </a:rPr>
-              <a:t>Zipf's law shows that a tiny fraction of words ('box', 'gap', 'lap', 'tyre') represent the vast majority of F1 communication. TF-IDF acts as a filter: it automatically down-weights ultra-frequent F1 filler terms and increases the value of rare, context-specific words during information searches.</a:t>
+                <a:latin typeface="Courier New"/>
+              </a:rPr>
+              <a:t/>
+            </a:r>
+          </a:p>
+          <a:p>
+            <a:pPr>
+              <a:spcBef>
+                <a:spcPts val="0"/>
+              </a:spcBef>
+              <a:spcAft>
+                <a:spcPts val="0"/>
+              </a:spcAft>
+            </a:pPr>
+            <a:r>
+              <a:rPr sz="1200">
+                <a:solidFill>
+                  <a:srgbClr val="8888AA"/>
+                </a:solidFill>
+                <a:latin typeface="Courier New"/>
+              </a:rPr>
+              <a:t># TF formula (Normalised)</a:t>
+            </a:r>
+          </a:p>
+          <a:p>
+            <a:pPr>
+              <a:spcBef>
+                <a:spcPts val="0"/>
+              </a:spcBef>
+              <a:spcAft>
+                <a:spcPts val="0"/>
+              </a:spcAft>
+            </a:pPr>
+            <a:r>
+              <a:rPr sz="1200">
+                <a:solidFill>
+                  <a:srgbClr val="50FA7B"/>
+                </a:solidFill>
+                <a:latin typeface="Courier New"/>
+              </a:rPr>
+              <a:t>tf = word_count / total_doc_words</a:t>
+            </a:r>
+          </a:p>
+          <a:p>
+            <a:pPr>
+              <a:spcBef>
+                <a:spcPts val="0"/>
+              </a:spcBef>
+              <a:spcAft>
+                <a:spcPts val="0"/>
+              </a:spcAft>
+            </a:pPr>
+            <a:r>
+              <a:rPr sz="1200">
+                <a:solidFill>
+                  <a:srgbClr val="50FA7B"/>
+                </a:solidFill>
+                <a:latin typeface="Courier New"/>
+              </a:rPr>
+              <a:t/>
+            </a:r>
+          </a:p>
+          <a:p>
+            <a:pPr>
+              <a:spcBef>
+                <a:spcPts val="0"/>
+              </a:spcBef>
+              <a:spcAft>
+                <a:spcPts val="0"/>
+              </a:spcAft>
+            </a:pPr>
+            <a:r>
+              <a:rPr sz="1200">
+                <a:solidFill>
+                  <a:srgbClr val="8888AA"/>
+                </a:solidFill>
+                <a:latin typeface="Courier New"/>
+              </a:rPr>
+              <a:t># IDF formula</a:t>
+            </a:r>
+          </a:p>
+          <a:p>
+            <a:pPr>
+              <a:spcBef>
+                <a:spcPts val="0"/>
+              </a:spcBef>
+              <a:spcAft>
+                <a:spcPts val="0"/>
+              </a:spcAft>
+            </a:pPr>
+            <a:r>
+              <a:rPr sz="1200">
+                <a:solidFill>
+                  <a:srgbClr val="50FA7B"/>
+                </a:solidFill>
+                <a:latin typeface="Courier New"/>
+              </a:rPr>
+              <a:t>idf = math.log(total_docs / (1 + docs_with_word))</a:t>
+            </a:r>
+          </a:p>
+          <a:p>
+            <a:pPr>
+              <a:spcBef>
+                <a:spcPts val="0"/>
+              </a:spcBef>
+              <a:spcAft>
+                <a:spcPts val="0"/>
+              </a:spcAft>
+            </a:pPr>
+            <a:r>
+              <a:rPr sz="1200">
+                <a:solidFill>
+                  <a:srgbClr val="50FA7B"/>
+                </a:solidFill>
+                <a:latin typeface="Courier New"/>
+              </a:rPr>
+              <a:t/>
+            </a:r>
+          </a:p>
+          <a:p>
+            <a:pPr>
+              <a:spcBef>
+                <a:spcPts val="0"/>
+              </a:spcBef>
+              <a:spcAft>
+                <a:spcPts val="0"/>
+              </a:spcAft>
+            </a:pPr>
+            <a:r>
+              <a:rPr sz="1200">
+                <a:solidFill>
+                  <a:srgbClr val="8888AA"/>
+                </a:solidFill>
+                <a:latin typeface="Courier New"/>
+              </a:rPr>
+              <a:t># TF-IDF score from scratch</a:t>
+            </a:r>
+          </a:p>
+          <a:p>
+            <a:pPr>
+              <a:spcBef>
+                <a:spcPts val="0"/>
+              </a:spcBef>
+              <a:spcAft>
+                <a:spcPts val="0"/>
+              </a:spcAft>
+            </a:pPr>
+            <a:r>
+              <a:rPr sz="1200">
+                <a:solidFill>
+                  <a:srgbClr val="50FA7B"/>
+                </a:solidFill>
+                <a:latin typeface="Courier New"/>
+              </a:rPr>
+              <a:t>tfidf = tf * idf</a:t>
             </a:r>
           </a:p>
         </p:txBody>
@@ -14593,7 +12433,7 @@
         <p:spPr>
           <a:xfrm>
             <a:off x="347472" y="1371600"/>
-            <a:ext cx="3749039" cy="3977639"/>
+            <a:ext cx="5303520" cy="4572000"/>
           </a:xfrm>
           <a:prstGeom prst="rect">
             <a:avLst/>
@@ -14638,7 +12478,7 @@
         <p:spPr>
           <a:xfrm>
             <a:off x="530352" y="1481328"/>
-            <a:ext cx="3474719" cy="384048"/>
+            <a:ext cx="5029200" cy="384048"/>
           </a:xfrm>
           <a:prstGeom prst="rect">
             <a:avLst/>
@@ -14658,7 +12498,7 @@
                   <a:srgbClr val="4EA8DA"/>
                 </a:solidFill>
               </a:rPr>
-              <a:t>One-Hot Encoding</a:t>
+              <a:t>Vector Models</a:t>
             </a:r>
           </a:p>
         </p:txBody>
@@ -14672,7 +12512,7 @@
         <p:spPr>
           <a:xfrm>
             <a:off x="530352" y="1901952"/>
-            <a:ext cx="3474719" cy="3355847"/>
+            <a:ext cx="5029200" cy="3950208"/>
           </a:xfrm>
           <a:prstGeom prst="rect">
             <a:avLst/>
@@ -14691,12 +12531,12 @@
               </a:spcBef>
             </a:pPr>
             <a:r>
-              <a:rPr sz="1350">
+              <a:rPr sz="1300">
                 <a:solidFill>
                   <a:srgbClr val="CCCCCC"/>
                 </a:solidFill>
               </a:rPr>
-              <a:t>◆  Standard representation for categorical attributes.</a:t>
+              <a:t>✦  One-Hot Encoding: Flat binary arrays representing driver name categorical tags (1 if driver spoke, 0 otherwise).</a:t>
             </a:r>
           </a:p>
           <a:p>
@@ -14706,12 +12546,12 @@
               </a:spcBef>
             </a:pPr>
             <a:r>
-              <a:rPr sz="1350">
+              <a:rPr sz="1300">
                 <a:solidFill>
                   <a:srgbClr val="CCCCCC"/>
                 </a:solidFill>
               </a:rPr>
-              <a:t>◆  Used to convert driver names into flat binary arrays.</a:t>
+              <a:t>✦  Bag of Words (BoW): Maps count occurrence vectors per text document using CountVectorizer.</a:t>
             </a:r>
           </a:p>
           <a:p>
@@ -14721,12 +12561,27 @@
               </a:spcBef>
             </a:pPr>
             <a:r>
-              <a:rPr sz="1350">
+              <a:rPr sz="1300">
                 <a:solidFill>
                   <a:srgbClr val="CCCCCC"/>
                 </a:solidFill>
               </a:rPr>
-              <a:t>◆  Vector size equals number of drivers; value is 1 if driver is speaking, 0 otherwise.</a:t>
+              <a:t>✦  TF-IDF Vectorization: Term Frequency weighted by Doc Frequency. Penalizes common words, increases rare domain words.</a:t>
+            </a:r>
+          </a:p>
+          <a:p>
+            <a:pPr>
+              <a:spcBef>
+                <a:spcPts val="400"/>
+              </a:spcBef>
+            </a:pPr>
+            <a:r>
+              <a:rPr sz="1300">
+                <a:solidFill>
+                  <a:srgbClr val="CCCCCC"/>
+                </a:solidFill>
+              </a:rPr>
+              <a:t>✦  Our configuration: TfidfVectorizer is capped at 2,500 maximum features as input for text classification models.</a:t>
             </a:r>
           </a:p>
         </p:txBody>
@@ -14739,18 +12594,18 @@
         </p:nvSpPr>
         <p:spPr>
           <a:xfrm>
-            <a:off x="347472" y="5440680"/>
-            <a:ext cx="3749039" cy="777240"/>
+            <a:off x="5943600" y="1371600"/>
+            <a:ext cx="5897880" cy="4572000"/>
           </a:xfrm>
           <a:prstGeom prst="rect">
             <a:avLst/>
           </a:prstGeom>
           <a:solidFill>
-            <a:srgbClr val="121228"/>
+            <a:srgbClr val="121222"/>
           </a:solidFill>
-          <a:ln w="15240">
+          <a:ln w="12700">
             <a:solidFill>
-              <a:srgbClr val="4EA8DA"/>
+              <a:srgbClr val="404060"/>
             </a:solidFill>
           </a:ln>
         </p:spPr>
@@ -14784,8 +12639,8 @@
         </p:nvSpPr>
         <p:spPr>
           <a:xfrm>
-            <a:off x="484632" y="5513832"/>
-            <a:ext cx="3520440" cy="594360"/>
+            <a:off x="6080760" y="1463040"/>
+            <a:ext cx="5623560" cy="4389120"/>
           </a:xfrm>
           <a:prstGeom prst="rect">
             <a:avLst/>
@@ -14793,471 +12648,198 @@
           <a:noFill/>
         </p:spPr>
         <p:txBody>
-          <a:bodyPr wrap="square">
+          <a:bodyPr wrap="none">
             <a:spAutoFit/>
           </a:bodyPr>
           <a:lstStyle/>
           <a:p>
-            <a:pPr algn="ctr"/>
-            <a:r>
-              <a:rPr sz="1250" b="1" i="0">
-                <a:solidFill>
-                  <a:srgbClr val="4EA8DA"/>
-                </a:solidFill>
-              </a:rPr>
-              <a:t>Used for non-text categories</a:t>
-            </a:r>
-          </a:p>
-        </p:txBody>
-      </p:sp>
-      <p:sp>
-        <p:nvSpPr>
-          <p:cNvPr id="12" name="Rectangle 11"/>
-          <p:cNvSpPr/>
-          <p:nvPr/>
-        </p:nvSpPr>
-        <p:spPr>
-          <a:xfrm>
-            <a:off x="4297680" y="1371600"/>
-            <a:ext cx="3749039" cy="3977639"/>
-          </a:xfrm>
-          <a:prstGeom prst="rect">
-            <a:avLst/>
-          </a:prstGeom>
-          <a:solidFill>
-            <a:srgbClr val="1A1A2E"/>
-          </a:solidFill>
-          <a:ln w="10160">
-            <a:solidFill>
-              <a:srgbClr val="303055"/>
-            </a:solidFill>
-          </a:ln>
-        </p:spPr>
-        <p:style>
-          <a:lnRef idx="1">
-            <a:schemeClr val="accent1"/>
-          </a:lnRef>
-          <a:fillRef idx="3">
-            <a:schemeClr val="accent1"/>
-          </a:fillRef>
-          <a:effectRef idx="2">
-            <a:schemeClr val="accent1"/>
-          </a:effectRef>
-          <a:fontRef idx="minor">
-            <a:schemeClr val="lt1"/>
-          </a:fontRef>
-        </p:style>
-        <p:txBody>
-          <a:bodyPr rtlCol="0" anchor="ctr"/>
-          <a:lstStyle/>
-          <a:p>
-            <a:pPr algn="ctr"/>
-          </a:p>
-        </p:txBody>
-      </p:sp>
-      <p:sp>
-        <p:nvSpPr>
-          <p:cNvPr id="13" name="TextBox 12"/>
-          <p:cNvSpPr txBox="1"/>
-          <p:nvPr/>
-        </p:nvSpPr>
-        <p:spPr>
-          <a:xfrm>
-            <a:off x="4480560" y="1481328"/>
-            <a:ext cx="3474719" cy="384048"/>
-          </a:xfrm>
-          <a:prstGeom prst="rect">
-            <a:avLst/>
-          </a:prstGeom>
-          <a:noFill/>
-        </p:spPr>
-        <p:txBody>
-          <a:bodyPr wrap="square">
-            <a:spAutoFit/>
-          </a:bodyPr>
-          <a:lstStyle/>
-          <a:p>
-            <a:pPr algn="l"/>
-            <a:r>
-              <a:rPr sz="1500" b="1" i="0">
-                <a:solidFill>
-                  <a:srgbClr val="FFC00B"/>
-                </a:solidFill>
-              </a:rPr>
-              <a:t>Bag of Words (BoW)</a:t>
-            </a:r>
-          </a:p>
-        </p:txBody>
-      </p:sp>
-      <p:sp>
-        <p:nvSpPr>
-          <p:cNvPr id="14" name="TextBox 13"/>
-          <p:cNvSpPr txBox="1"/>
-          <p:nvPr/>
-        </p:nvSpPr>
-        <p:spPr>
-          <a:xfrm>
-            <a:off x="4480560" y="1901952"/>
-            <a:ext cx="3474719" cy="3355847"/>
-          </a:xfrm>
-          <a:prstGeom prst="rect">
-            <a:avLst/>
-          </a:prstGeom>
-          <a:noFill/>
-        </p:spPr>
-        <p:txBody>
-          <a:bodyPr wrap="square">
-            <a:spAutoFit/>
-          </a:bodyPr>
-          <a:lstStyle/>
-          <a:p>
-            <a:pPr>
-              <a:spcBef>
-                <a:spcPts val="400"/>
-              </a:spcBef>
-            </a:pPr>
-            <a:r>
-              <a:rPr sz="1350">
-                <a:solidFill>
-                  <a:srgbClr val="CCCCCC"/>
-                </a:solidFill>
-              </a:rPr>
-              <a:t>◆  Represents text as a vector of word counts.</a:t>
-            </a:r>
-          </a:p>
-          <a:p>
-            <a:pPr>
-              <a:spcBef>
-                <a:spcPts val="400"/>
-              </a:spcBef>
-            </a:pPr>
-            <a:r>
-              <a:rPr sz="1350">
-                <a:solidFill>
-                  <a:srgbClr val="CCCCCC"/>
-                </a:solidFill>
-              </a:rPr>
-              <a:t>◆  Uses CountVectorizer to map the corpus to a frequency matrix.</a:t>
-            </a:r>
-          </a:p>
-          <a:p>
-            <a:pPr>
-              <a:spcBef>
-                <a:spcPts val="400"/>
-              </a:spcBef>
-            </a:pPr>
-            <a:r>
-              <a:rPr sz="1350">
-                <a:solidFill>
-                  <a:srgbClr val="CCCCCC"/>
-                </a:solidFill>
-              </a:rPr>
-              <a:t>◆  Simple and intuitive, but ignores relative word importance and document length.</a:t>
-            </a:r>
-          </a:p>
-        </p:txBody>
-      </p:sp>
-      <p:sp>
-        <p:nvSpPr>
-          <p:cNvPr id="15" name="Rectangle 14"/>
-          <p:cNvSpPr/>
-          <p:nvPr/>
-        </p:nvSpPr>
-        <p:spPr>
-          <a:xfrm>
-            <a:off x="4297680" y="5440680"/>
-            <a:ext cx="3749039" cy="777240"/>
-          </a:xfrm>
-          <a:prstGeom prst="rect">
-            <a:avLst/>
-          </a:prstGeom>
-          <a:solidFill>
-            <a:srgbClr val="121228"/>
-          </a:solidFill>
-          <a:ln w="15240">
-            <a:solidFill>
-              <a:srgbClr val="FFC00B"/>
-            </a:solidFill>
-          </a:ln>
-        </p:spPr>
-        <p:style>
-          <a:lnRef idx="1">
-            <a:schemeClr val="accent1"/>
-          </a:lnRef>
-          <a:fillRef idx="3">
-            <a:schemeClr val="accent1"/>
-          </a:fillRef>
-          <a:effectRef idx="2">
-            <a:schemeClr val="accent1"/>
-          </a:effectRef>
-          <a:fontRef idx="minor">
-            <a:schemeClr val="lt1"/>
-          </a:fontRef>
-        </p:style>
-        <p:txBody>
-          <a:bodyPr rtlCol="0" anchor="ctr"/>
-          <a:lstStyle/>
-          <a:p>
-            <a:pPr algn="ctr"/>
-          </a:p>
-        </p:txBody>
-      </p:sp>
-      <p:sp>
-        <p:nvSpPr>
-          <p:cNvPr id="16" name="TextBox 15"/>
-          <p:cNvSpPr txBox="1"/>
-          <p:nvPr/>
-        </p:nvSpPr>
-        <p:spPr>
-          <a:xfrm>
-            <a:off x="4434840" y="5513832"/>
-            <a:ext cx="3520440" cy="594360"/>
-          </a:xfrm>
-          <a:prstGeom prst="rect">
-            <a:avLst/>
-          </a:prstGeom>
-          <a:noFill/>
-        </p:spPr>
-        <p:txBody>
-          <a:bodyPr wrap="square">
-            <a:spAutoFit/>
-          </a:bodyPr>
-          <a:lstStyle/>
-          <a:p>
-            <a:pPr algn="ctr"/>
-            <a:r>
-              <a:rPr sz="1250" b="1" i="0">
-                <a:solidFill>
-                  <a:srgbClr val="FFC00B"/>
-                </a:solidFill>
-              </a:rPr>
-              <a:t>Simple frequency matrix</a:t>
-            </a:r>
-          </a:p>
-        </p:txBody>
-      </p:sp>
-      <p:sp>
-        <p:nvSpPr>
-          <p:cNvPr id="17" name="Rectangle 16"/>
-          <p:cNvSpPr/>
-          <p:nvPr/>
-        </p:nvSpPr>
-        <p:spPr>
-          <a:xfrm>
-            <a:off x="8247888" y="1371600"/>
-            <a:ext cx="3749039" cy="3977639"/>
-          </a:xfrm>
-          <a:prstGeom prst="rect">
-            <a:avLst/>
-          </a:prstGeom>
-          <a:solidFill>
-            <a:srgbClr val="1A1A2E"/>
-          </a:solidFill>
-          <a:ln w="10160">
-            <a:solidFill>
-              <a:srgbClr val="303055"/>
-            </a:solidFill>
-          </a:ln>
-        </p:spPr>
-        <p:style>
-          <a:lnRef idx="1">
-            <a:schemeClr val="accent1"/>
-          </a:lnRef>
-          <a:fillRef idx="3">
-            <a:schemeClr val="accent1"/>
-          </a:fillRef>
-          <a:effectRef idx="2">
-            <a:schemeClr val="accent1"/>
-          </a:effectRef>
-          <a:fontRef idx="minor">
-            <a:schemeClr val="lt1"/>
-          </a:fontRef>
-        </p:style>
-        <p:txBody>
-          <a:bodyPr rtlCol="0" anchor="ctr"/>
-          <a:lstStyle/>
-          <a:p>
-            <a:pPr algn="ctr"/>
-          </a:p>
-        </p:txBody>
-      </p:sp>
-      <p:sp>
-        <p:nvSpPr>
-          <p:cNvPr id="18" name="TextBox 17"/>
-          <p:cNvSpPr txBox="1"/>
-          <p:nvPr/>
-        </p:nvSpPr>
-        <p:spPr>
-          <a:xfrm>
-            <a:off x="8430768" y="1481328"/>
-            <a:ext cx="3474719" cy="384048"/>
-          </a:xfrm>
-          <a:prstGeom prst="rect">
-            <a:avLst/>
-          </a:prstGeom>
-          <a:noFill/>
-        </p:spPr>
-        <p:txBody>
-          <a:bodyPr wrap="square">
-            <a:spAutoFit/>
-          </a:bodyPr>
-          <a:lstStyle/>
-          <a:p>
-            <a:pPr algn="l"/>
-            <a:r>
-              <a:rPr sz="1500" b="1" i="0">
+            <a:pPr>
+              <a:spcBef>
+                <a:spcPts val="0"/>
+              </a:spcBef>
+              <a:spcAft>
+                <a:spcPts val="0"/>
+              </a:spcAft>
+            </a:pPr>
+            <a:r>
+              <a:rPr sz="1200">
+                <a:solidFill>
+                  <a:srgbClr val="FFD866"/>
+                </a:solidFill>
+                <a:latin typeface="Courier New"/>
+              </a:rPr>
+              <a:t>from sklearn.feature_extraction.text import \</a:t>
+            </a:r>
+          </a:p>
+          <a:p>
+            <a:pPr>
+              <a:spcBef>
+                <a:spcPts val="0"/>
+              </a:spcBef>
+              <a:spcAft>
+                <a:spcPts val="0"/>
+              </a:spcAft>
+            </a:pPr>
+            <a:r>
+              <a:rPr sz="1200">
                 <a:solidFill>
                   <a:srgbClr val="50FA7B"/>
                 </a:solidFill>
-              </a:rPr>
-              <a:t>TF-IDF Vectorization</a:t>
-            </a:r>
-          </a:p>
-        </p:txBody>
-      </p:sp>
-      <p:sp>
-        <p:nvSpPr>
-          <p:cNvPr id="19" name="TextBox 18"/>
-          <p:cNvSpPr txBox="1"/>
-          <p:nvPr/>
-        </p:nvSpPr>
-        <p:spPr>
-          <a:xfrm>
-            <a:off x="8430768" y="1901952"/>
-            <a:ext cx="3474719" cy="3355847"/>
-          </a:xfrm>
-          <a:prstGeom prst="rect">
-            <a:avLst/>
-          </a:prstGeom>
-          <a:noFill/>
-        </p:spPr>
-        <p:txBody>
-          <a:bodyPr wrap="square">
-            <a:spAutoFit/>
-          </a:bodyPr>
-          <a:lstStyle/>
-          <a:p>
-            <a:pPr>
-              <a:spcBef>
-                <a:spcPts val="400"/>
-              </a:spcBef>
-            </a:pPr>
-            <a:r>
-              <a:rPr sz="1350">
-                <a:solidFill>
-                  <a:srgbClr val="CCCCCC"/>
-                </a:solidFill>
-              </a:rPr>
-              <a:t>◆  Term Frequency (TF) times Inverse Document Frequency (IDF).</a:t>
-            </a:r>
-          </a:p>
-          <a:p>
-            <a:pPr>
-              <a:spcBef>
-                <a:spcPts val="400"/>
-              </a:spcBef>
-            </a:pPr>
-            <a:r>
-              <a:rPr sz="1350">
-                <a:solidFill>
-                  <a:srgbClr val="CCCCCC"/>
-                </a:solidFill>
-              </a:rPr>
-              <a:t>◆  Calculates vocabulary importance dynamically.</a:t>
-            </a:r>
-          </a:p>
-          <a:p>
-            <a:pPr>
-              <a:spcBef>
-                <a:spcPts val="400"/>
-              </a:spcBef>
-            </a:pPr>
-            <a:r>
-              <a:rPr sz="1350">
-                <a:solidFill>
-                  <a:srgbClr val="CCCCCC"/>
-                </a:solidFill>
-              </a:rPr>
-              <a:t>◆  Our final configuration uses TfidfVectorizer with a limit of 2,500 maximum features.</a:t>
-            </a:r>
-          </a:p>
-        </p:txBody>
-      </p:sp>
-      <p:sp>
-        <p:nvSpPr>
-          <p:cNvPr id="20" name="Rectangle 19"/>
-          <p:cNvSpPr/>
-          <p:nvPr/>
-        </p:nvSpPr>
-        <p:spPr>
-          <a:xfrm>
-            <a:off x="8247888" y="5440680"/>
-            <a:ext cx="3749039" cy="777240"/>
-          </a:xfrm>
-          <a:prstGeom prst="rect">
-            <a:avLst/>
-          </a:prstGeom>
-          <a:solidFill>
-            <a:srgbClr val="121228"/>
-          </a:solidFill>
-          <a:ln w="15240">
-            <a:solidFill>
-              <a:srgbClr val="50FA7B"/>
-            </a:solidFill>
-          </a:ln>
-        </p:spPr>
-        <p:style>
-          <a:lnRef idx="1">
-            <a:schemeClr val="accent1"/>
-          </a:lnRef>
-          <a:fillRef idx="3">
-            <a:schemeClr val="accent1"/>
-          </a:fillRef>
-          <a:effectRef idx="2">
-            <a:schemeClr val="accent1"/>
-          </a:effectRef>
-          <a:fontRef idx="minor">
-            <a:schemeClr val="lt1"/>
-          </a:fontRef>
-        </p:style>
-        <p:txBody>
-          <a:bodyPr rtlCol="0" anchor="ctr"/>
-          <a:lstStyle/>
-          <a:p>
-            <a:pPr algn="ctr"/>
-          </a:p>
-        </p:txBody>
-      </p:sp>
-      <p:sp>
-        <p:nvSpPr>
-          <p:cNvPr id="21" name="TextBox 20"/>
-          <p:cNvSpPr txBox="1"/>
-          <p:nvPr/>
-        </p:nvSpPr>
-        <p:spPr>
-          <a:xfrm>
-            <a:off x="8385048" y="5513832"/>
-            <a:ext cx="3520440" cy="594360"/>
-          </a:xfrm>
-          <a:prstGeom prst="rect">
-            <a:avLst/>
-          </a:prstGeom>
-          <a:noFill/>
-        </p:spPr>
-        <p:txBody>
-          <a:bodyPr wrap="square">
-            <a:spAutoFit/>
-          </a:bodyPr>
-          <a:lstStyle/>
-          <a:p>
-            <a:pPr algn="ctr"/>
-            <a:r>
-              <a:rPr sz="1250" b="1" i="0">
+                <a:latin typeface="Courier New"/>
+              </a:rPr>
+              <a:t>    CountVectorizer, TfidfVectorizer</a:t>
+            </a:r>
+          </a:p>
+          <a:p>
+            <a:pPr>
+              <a:spcBef>
+                <a:spcPts val="0"/>
+              </a:spcBef>
+              <a:spcAft>
+                <a:spcPts val="0"/>
+              </a:spcAft>
+            </a:pPr>
+            <a:r>
+              <a:rPr sz="1200">
                 <a:solidFill>
                   <a:srgbClr val="50FA7B"/>
                 </a:solidFill>
-              </a:rPr>
-              <a:t>Optimal text model features</a:t>
+                <a:latin typeface="Courier New"/>
+              </a:rPr>
+              <a:t/>
+            </a:r>
+          </a:p>
+          <a:p>
+            <a:pPr>
+              <a:spcBef>
+                <a:spcPts val="0"/>
+              </a:spcBef>
+              <a:spcAft>
+                <a:spcPts val="0"/>
+              </a:spcAft>
+            </a:pPr>
+            <a:r>
+              <a:rPr sz="1200">
+                <a:solidFill>
+                  <a:srgbClr val="8888AA"/>
+                </a:solidFill>
+                <a:latin typeface="Courier New"/>
+              </a:rPr>
+              <a:t># Bag of Words representation</a:t>
+            </a:r>
+          </a:p>
+          <a:p>
+            <a:pPr>
+              <a:spcBef>
+                <a:spcPts val="0"/>
+              </a:spcBef>
+              <a:spcAft>
+                <a:spcPts val="0"/>
+              </a:spcAft>
+            </a:pPr>
+            <a:r>
+              <a:rPr sz="1200">
+                <a:solidFill>
+                  <a:srgbClr val="50FA7B"/>
+                </a:solidFill>
+                <a:latin typeface="Courier New"/>
+              </a:rPr>
+              <a:t>count_vec = CountVectorizer(max_features=1000)</a:t>
+            </a:r>
+          </a:p>
+          <a:p>
+            <a:pPr>
+              <a:spcBef>
+                <a:spcPts val="0"/>
+              </a:spcBef>
+              <a:spcAft>
+                <a:spcPts val="0"/>
+              </a:spcAft>
+            </a:pPr>
+            <a:r>
+              <a:rPr sz="1200">
+                <a:solidFill>
+                  <a:srgbClr val="50FA7B"/>
+                </a:solidFill>
+                <a:latin typeface="Courier New"/>
+              </a:rPr>
+              <a:t>bow_mat = count_vec.fit_transform(clean_corpus)</a:t>
+            </a:r>
+          </a:p>
+          <a:p>
+            <a:pPr>
+              <a:spcBef>
+                <a:spcPts val="0"/>
+              </a:spcBef>
+              <a:spcAft>
+                <a:spcPts val="0"/>
+              </a:spcAft>
+            </a:pPr>
+            <a:r>
+              <a:rPr sz="1200">
+                <a:solidFill>
+                  <a:srgbClr val="50FA7B"/>
+                </a:solidFill>
+                <a:latin typeface="Courier New"/>
+              </a:rPr>
+              <a:t/>
+            </a:r>
+          </a:p>
+          <a:p>
+            <a:pPr>
+              <a:spcBef>
+                <a:spcPts val="0"/>
+              </a:spcBef>
+              <a:spcAft>
+                <a:spcPts val="0"/>
+              </a:spcAft>
+            </a:pPr>
+            <a:r>
+              <a:rPr sz="1200">
+                <a:solidFill>
+                  <a:srgbClr val="8888AA"/>
+                </a:solidFill>
+                <a:latin typeface="Courier New"/>
+              </a:rPr>
+              <a:t># TF-IDF Vectorizer (Primary ML inputs)</a:t>
+            </a:r>
+          </a:p>
+          <a:p>
+            <a:pPr>
+              <a:spcBef>
+                <a:spcPts val="0"/>
+              </a:spcBef>
+              <a:spcAft>
+                <a:spcPts val="0"/>
+              </a:spcAft>
+            </a:pPr>
+            <a:r>
+              <a:rPr sz="1200">
+                <a:solidFill>
+                  <a:srgbClr val="50FA7B"/>
+                </a:solidFill>
+                <a:latin typeface="Courier New"/>
+              </a:rPr>
+              <a:t>tfidf_vec = TfidfVectorizer(max_features=2500)</a:t>
+            </a:r>
+          </a:p>
+          <a:p>
+            <a:pPr>
+              <a:spcBef>
+                <a:spcPts val="0"/>
+              </a:spcBef>
+              <a:spcAft>
+                <a:spcPts val="0"/>
+              </a:spcAft>
+            </a:pPr>
+            <a:r>
+              <a:rPr sz="1200">
+                <a:solidFill>
+                  <a:srgbClr val="50FA7B"/>
+                </a:solidFill>
+                <a:latin typeface="Courier New"/>
+              </a:rPr>
+              <a:t>tfidf_mat = tfidf_vec.fit_transform(clean_corpus)</a:t>
             </a:r>
           </a:p>
         </p:txBody>
@@ -15485,7 +13067,7 @@
         <p:spPr>
           <a:xfrm>
             <a:off x="347472" y="1371600"/>
-            <a:ext cx="5577840" cy="2011680"/>
+            <a:ext cx="5303520" cy="4572000"/>
           </a:xfrm>
           <a:prstGeom prst="rect">
             <a:avLst/>
@@ -15530,7 +13112,7 @@
         <p:spPr>
           <a:xfrm>
             <a:off x="530352" y="1481328"/>
-            <a:ext cx="5303520" cy="384048"/>
+            <a:ext cx="5029200" cy="384048"/>
           </a:xfrm>
           <a:prstGeom prst="rect">
             <a:avLst/>
@@ -15547,10 +13129,10 @@
             <a:r>
               <a:rPr sz="1500" b="1" i="0">
                 <a:solidFill>
-                  <a:srgbClr val="E51B23"/>
-                </a:solidFill>
-              </a:rPr>
-              <a:t>Limitations of Standard Lexicons</a:t>
+                  <a:srgbClr val="4EA8DA"/>
+                </a:solidFill>
+              </a:rPr>
+              <a:t>Domain Specific Lexicon</a:t>
             </a:r>
           </a:p>
         </p:txBody>
@@ -15564,7 +13146,7 @@
         <p:spPr>
           <a:xfrm>
             <a:off x="530352" y="1901952"/>
-            <a:ext cx="5303520" cy="1389888"/>
+            <a:ext cx="5029200" cy="3950208"/>
           </a:xfrm>
           <a:prstGeom prst="rect">
             <a:avLst/>
@@ -15583,12 +13165,12 @@
               </a:spcBef>
             </a:pPr>
             <a:r>
-              <a:rPr sz="1350">
+              <a:rPr sz="1300">
                 <a:solidFill>
                   <a:srgbClr val="CCCCCC"/>
                 </a:solidFill>
               </a:rPr>
-              <a:t>▸  General tools (VADER, TextBlob) score F1 jargon as neutral.</a:t>
+              <a:t>✦  VADER scores F1 jargon as neutral ('box box' is neutral).</a:t>
             </a:r>
           </a:p>
           <a:p>
@@ -15598,12 +13180,12 @@
               </a:spcBef>
             </a:pPr>
             <a:r>
-              <a:rPr sz="1350">
+              <a:rPr sz="1300">
                 <a:solidFill>
                   <a:srgbClr val="CCCCCC"/>
                 </a:solidFill>
               </a:rPr>
-              <a:t>▸  "box box" (urgent pit command) is scored as completely neutral.</a:t>
+              <a:t>✦  F1 radio has unique domain-specific emotional cues.</a:t>
             </a:r>
           </a:p>
           <a:p>
@@ -15613,12 +13195,12 @@
               </a:spcBef>
             </a:pPr>
             <a:r>
-              <a:rPr sz="1350">
+              <a:rPr sz="1300">
                 <a:solidFill>
                   <a:srgbClr val="CCCCCC"/>
                 </a:solidFill>
               </a:rPr>
-              <a:t>▸  "p1" (achieving first place) or "gap" are misread or ignored.</a:t>
+              <a:t>✦  We hand-crafted a F1 dictionary mapping keywords to positive/negative values.</a:t>
             </a:r>
           </a:p>
           <a:p>
@@ -15628,12 +13210,42 @@
               </a:spcBef>
             </a:pPr>
             <a:r>
-              <a:rPr sz="1350">
+              <a:rPr sz="1300">
                 <a:solidFill>
                   <a:srgbClr val="CCCCCC"/>
                 </a:solidFill>
               </a:rPr>
-              <a:t>▸  A custom domain-specific lexicon is required for F1 radio.</a:t>
+              <a:t>✦  Message polarity equals total summation of lexicon weights.</a:t>
+            </a:r>
+          </a:p>
+          <a:p>
+            <a:pPr>
+              <a:spcBef>
+                <a:spcPts val="400"/>
+              </a:spcBef>
+            </a:pPr>
+            <a:r>
+              <a:rPr sz="1300">
+                <a:solidFill>
+                  <a:srgbClr val="CCCCCC"/>
+                </a:solidFill>
+              </a:rPr>
+              <a:t>✦  Positive: p1 (+2.0), won (+2.0), great (+1.5), push (+0.5).</a:t>
+            </a:r>
+          </a:p>
+          <a:p>
+            <a:pPr>
+              <a:spcBef>
+                <a:spcPts val="400"/>
+              </a:spcBef>
+            </a:pPr>
+            <a:r>
+              <a:rPr sz="1300">
+                <a:solidFill>
+                  <a:srgbClr val="CCCCCC"/>
+                </a:solidFill>
+              </a:rPr>
+              <a:t>✦  Negative: wtf (-2.0), problem (-1.0), slow (-0.8).</a:t>
             </a:r>
           </a:p>
         </p:txBody>
@@ -15646,18 +13258,18 @@
         </p:nvSpPr>
         <p:spPr>
           <a:xfrm>
-            <a:off x="6126480" y="1371600"/>
-            <a:ext cx="5715000" cy="2011680"/>
+            <a:off x="5943600" y="1371600"/>
+            <a:ext cx="5897880" cy="4572000"/>
           </a:xfrm>
           <a:prstGeom prst="rect">
             <a:avLst/>
           </a:prstGeom>
           <a:solidFill>
-            <a:srgbClr val="1A1A2E"/>
+            <a:srgbClr val="121222"/>
           </a:solidFill>
-          <a:ln w="10160">
+          <a:ln w="12700">
             <a:solidFill>
-              <a:srgbClr val="303055"/>
+              <a:srgbClr val="404060"/>
             </a:solidFill>
           </a:ln>
         </p:spPr>
@@ -15691,8 +13303,8 @@
         </p:nvSpPr>
         <p:spPr>
           <a:xfrm>
-            <a:off x="6309360" y="1481328"/>
-            <a:ext cx="5440680" cy="384048"/>
+            <a:off x="6080760" y="1463040"/>
+            <a:ext cx="5623560" cy="4389120"/>
           </a:xfrm>
           <a:prstGeom prst="rect">
             <a:avLst/>
@@ -15700,744 +13312,236 @@
           <a:noFill/>
         </p:spPr>
         <p:txBody>
-          <a:bodyPr wrap="square">
+          <a:bodyPr wrap="none">
             <a:spAutoFit/>
           </a:bodyPr>
           <a:lstStyle/>
           <a:p>
-            <a:pPr algn="l"/>
-            <a:r>
-              <a:rPr sz="1500" b="1" i="0">
-                <a:solidFill>
-                  <a:srgbClr val="FFC00B"/>
-                </a:solidFill>
-              </a:rPr>
-              <a:t>Custom Sentiment Lexicon</a:t>
-            </a:r>
-          </a:p>
-        </p:txBody>
-      </p:sp>
-      <p:sp>
-        <p:nvSpPr>
-          <p:cNvPr id="12" name="TextBox 11"/>
-          <p:cNvSpPr txBox="1"/>
-          <p:nvPr/>
-        </p:nvSpPr>
-        <p:spPr>
-          <a:xfrm>
-            <a:off x="6309360" y="1901952"/>
-            <a:ext cx="5440680" cy="1389888"/>
-          </a:xfrm>
-          <a:prstGeom prst="rect">
-            <a:avLst/>
-          </a:prstGeom>
-          <a:noFill/>
-        </p:spPr>
-        <p:txBody>
-          <a:bodyPr wrap="square">
-            <a:spAutoFit/>
-          </a:bodyPr>
-          <a:lstStyle/>
-          <a:p>
-            <a:pPr>
-              <a:spcBef>
-                <a:spcPts val="400"/>
-              </a:spcBef>
-            </a:pPr>
-            <a:r>
-              <a:rPr sz="1350">
-                <a:solidFill>
-                  <a:srgbClr val="CCCCCC"/>
-                </a:solidFill>
-              </a:rPr>
-              <a:t>▸  We mapped specific F1 keywords to positive/negative values.</a:t>
-            </a:r>
-          </a:p>
-          <a:p>
-            <a:pPr>
-              <a:spcBef>
-                <a:spcPts val="400"/>
-              </a:spcBef>
-            </a:pPr>
-            <a:r>
-              <a:rPr sz="1350">
-                <a:solidFill>
-                  <a:srgbClr val="CCCCCC"/>
-                </a:solidFill>
-              </a:rPr>
-              <a:t>▸  Message polarity is the summation of weights present in text.</a:t>
-            </a:r>
-          </a:p>
-          <a:p>
-            <a:pPr>
-              <a:spcBef>
-                <a:spcPts val="400"/>
-              </a:spcBef>
-            </a:pPr>
-            <a:r>
-              <a:rPr sz="1350">
-                <a:solidFill>
-                  <a:srgbClr val="CCCCCC"/>
-                </a:solidFill>
-              </a:rPr>
-              <a:t>▸  Positive weights: p1 (+2.0), won (+2.0), great (+1.5), push (+0.5).</a:t>
-            </a:r>
-          </a:p>
-          <a:p>
-            <a:pPr>
-              <a:spcBef>
-                <a:spcPts val="400"/>
-              </a:spcBef>
-            </a:pPr>
-            <a:r>
-              <a:rPr sz="1350">
-                <a:solidFill>
-                  <a:srgbClr val="CCCCCC"/>
-                </a:solidFill>
-              </a:rPr>
-              <a:t>▸  Negative weights: wtf (-2.0), problem (-1.0), slow (-0.8).</a:t>
-            </a:r>
-          </a:p>
-        </p:txBody>
-      </p:sp>
-      <p:sp>
-        <p:nvSpPr>
-          <p:cNvPr id="13" name="Rectangle 12"/>
-          <p:cNvSpPr/>
-          <p:nvPr/>
-        </p:nvSpPr>
-        <p:spPr>
-          <a:xfrm>
-            <a:off x="347472" y="3566160"/>
-            <a:ext cx="11494008" cy="384048"/>
-          </a:xfrm>
-          <a:prstGeom prst="rect">
-            <a:avLst/>
-          </a:prstGeom>
-          <a:solidFill>
-            <a:srgbClr val="1A1A30"/>
-          </a:solidFill>
-          <a:ln>
-            <a:noFill/>
-          </a:ln>
-        </p:spPr>
-        <p:style>
-          <a:lnRef idx="1">
-            <a:schemeClr val="accent1"/>
-          </a:lnRef>
-          <a:fillRef idx="3">
-            <a:schemeClr val="accent1"/>
-          </a:fillRef>
-          <a:effectRef idx="2">
-            <a:schemeClr val="accent1"/>
-          </a:effectRef>
-          <a:fontRef idx="minor">
-            <a:schemeClr val="lt1"/>
-          </a:fontRef>
-        </p:style>
-        <p:txBody>
-          <a:bodyPr rtlCol="0" anchor="ctr"/>
-          <a:lstStyle/>
-          <a:p>
-            <a:pPr algn="ctr"/>
-          </a:p>
-        </p:txBody>
-      </p:sp>
-      <p:sp>
-        <p:nvSpPr>
-          <p:cNvPr id="14" name="TextBox 13"/>
-          <p:cNvSpPr txBox="1"/>
-          <p:nvPr/>
-        </p:nvSpPr>
-        <p:spPr>
-          <a:xfrm>
-            <a:off x="502920" y="3611880"/>
-            <a:ext cx="10972800" cy="292608"/>
-          </a:xfrm>
-          <a:prstGeom prst="rect">
-            <a:avLst/>
-          </a:prstGeom>
-          <a:noFill/>
-        </p:spPr>
-        <p:txBody>
-          <a:bodyPr wrap="square">
-            <a:spAutoFit/>
-          </a:bodyPr>
-          <a:lstStyle/>
-          <a:p>
-            <a:pPr algn="l"/>
-            <a:r>
-              <a:rPr sz="1300" b="1" i="0">
-                <a:solidFill>
-                  <a:srgbClr val="FFC00B"/>
-                </a:solidFill>
-              </a:rPr>
-              <a:t>  Sentiment Score Output Examples:</a:t>
-            </a:r>
-          </a:p>
-        </p:txBody>
-      </p:sp>
-      <p:sp>
-        <p:nvSpPr>
-          <p:cNvPr id="15" name="Rectangle 14"/>
-          <p:cNvSpPr/>
-          <p:nvPr/>
-        </p:nvSpPr>
-        <p:spPr>
-          <a:xfrm>
-            <a:off x="347472" y="4023360"/>
-            <a:ext cx="1051560" cy="457200"/>
-          </a:xfrm>
-          <a:prstGeom prst="rect">
-            <a:avLst/>
-          </a:prstGeom>
-          <a:solidFill>
-            <a:srgbClr val="121225"/>
-          </a:solidFill>
-          <a:ln w="15240">
-            <a:solidFill>
-              <a:srgbClr val="50FA7B"/>
-            </a:solidFill>
-          </a:ln>
-        </p:spPr>
-        <p:style>
-          <a:lnRef idx="1">
-            <a:schemeClr val="accent1"/>
-          </a:lnRef>
-          <a:fillRef idx="3">
-            <a:schemeClr val="accent1"/>
-          </a:fillRef>
-          <a:effectRef idx="2">
-            <a:schemeClr val="accent1"/>
-          </a:effectRef>
-          <a:fontRef idx="minor">
-            <a:schemeClr val="lt1"/>
-          </a:fontRef>
-        </p:style>
-        <p:txBody>
-          <a:bodyPr rtlCol="0" anchor="ctr"/>
-          <a:lstStyle/>
-          <a:p>
-            <a:pPr algn="ctr"/>
-          </a:p>
-        </p:txBody>
-      </p:sp>
-      <p:sp>
-        <p:nvSpPr>
-          <p:cNvPr id="16" name="TextBox 15"/>
-          <p:cNvSpPr txBox="1"/>
-          <p:nvPr/>
-        </p:nvSpPr>
-        <p:spPr>
-          <a:xfrm>
-            <a:off x="347472" y="4069080"/>
-            <a:ext cx="1051560" cy="365760"/>
-          </a:xfrm>
-          <a:prstGeom prst="rect">
-            <a:avLst/>
-          </a:prstGeom>
-          <a:noFill/>
-        </p:spPr>
-        <p:txBody>
-          <a:bodyPr wrap="square">
-            <a:spAutoFit/>
-          </a:bodyPr>
-          <a:lstStyle/>
-          <a:p>
-            <a:pPr algn="ctr"/>
-            <a:r>
-              <a:rPr sz="1600" b="1" i="0">
+            <a:pPr>
+              <a:spcBef>
+                <a:spcPts val="0"/>
+              </a:spcBef>
+              <a:spcAft>
+                <a:spcPts val="0"/>
+              </a:spcAft>
+            </a:pPr>
+            <a:r>
+              <a:rPr sz="1200">
+                <a:solidFill>
+                  <a:srgbClr val="8888AA"/>
+                </a:solidFill>
+                <a:latin typeface="Courier New"/>
+              </a:rPr>
+              <a:t># Custom weights dictionary</a:t>
+            </a:r>
+          </a:p>
+          <a:p>
+            <a:pPr>
+              <a:spcBef>
+                <a:spcPts val="0"/>
+              </a:spcBef>
+              <a:spcAft>
+                <a:spcPts val="0"/>
+              </a:spcAft>
+            </a:pPr>
+            <a:r>
+              <a:rPr sz="1200">
                 <a:solidFill>
                   <a:srgbClr val="50FA7B"/>
                 </a:solidFill>
-              </a:rPr>
-              <a:t>+2.0</a:t>
-            </a:r>
-          </a:p>
-        </p:txBody>
-      </p:sp>
-      <p:sp>
-        <p:nvSpPr>
-          <p:cNvPr id="17" name="TextBox 16"/>
-          <p:cNvSpPr txBox="1"/>
-          <p:nvPr/>
-        </p:nvSpPr>
-        <p:spPr>
-          <a:xfrm>
-            <a:off x="1481328" y="4096512"/>
-            <a:ext cx="10058400" cy="347472"/>
-          </a:xfrm>
-          <a:prstGeom prst="rect">
-            <a:avLst/>
-          </a:prstGeom>
-          <a:noFill/>
-        </p:spPr>
-        <p:txBody>
-          <a:bodyPr wrap="square">
-            <a:spAutoFit/>
-          </a:bodyPr>
-          <a:lstStyle/>
-          <a:p>
-            <a:pPr algn="l"/>
-            <a:r>
-              <a:rPr sz="1400" b="0" i="0">
-                <a:solidFill>
-                  <a:srgbClr val="CCCCCC"/>
-                </a:solidFill>
-              </a:rPr>
-              <a:t>"P1 guys! Unbelievable, we won!"</a:t>
-            </a:r>
-          </a:p>
-        </p:txBody>
-      </p:sp>
-      <p:sp>
-        <p:nvSpPr>
-          <p:cNvPr id="18" name="Rectangle 17"/>
-          <p:cNvSpPr/>
-          <p:nvPr/>
-        </p:nvSpPr>
-        <p:spPr>
-          <a:xfrm>
-            <a:off x="347472" y="4553712"/>
-            <a:ext cx="1051560" cy="457200"/>
-          </a:xfrm>
-          <a:prstGeom prst="rect">
-            <a:avLst/>
-          </a:prstGeom>
-          <a:solidFill>
-            <a:srgbClr val="121225"/>
-          </a:solidFill>
-          <a:ln w="15240">
-            <a:solidFill>
-              <a:srgbClr val="A0F0A0"/>
-            </a:solidFill>
-          </a:ln>
-        </p:spPr>
-        <p:style>
-          <a:lnRef idx="1">
-            <a:schemeClr val="accent1"/>
-          </a:lnRef>
-          <a:fillRef idx="3">
-            <a:schemeClr val="accent1"/>
-          </a:fillRef>
-          <a:effectRef idx="2">
-            <a:schemeClr val="accent1"/>
-          </a:effectRef>
-          <a:fontRef idx="minor">
-            <a:schemeClr val="lt1"/>
-          </a:fontRef>
-        </p:style>
-        <p:txBody>
-          <a:bodyPr rtlCol="0" anchor="ctr"/>
-          <a:lstStyle/>
-          <a:p>
-            <a:pPr algn="ctr"/>
-          </a:p>
-        </p:txBody>
-      </p:sp>
-      <p:sp>
-        <p:nvSpPr>
-          <p:cNvPr id="19" name="TextBox 18"/>
-          <p:cNvSpPr txBox="1"/>
-          <p:nvPr/>
-        </p:nvSpPr>
-        <p:spPr>
-          <a:xfrm>
-            <a:off x="347472" y="4599432"/>
-            <a:ext cx="1051560" cy="365760"/>
-          </a:xfrm>
-          <a:prstGeom prst="rect">
-            <a:avLst/>
-          </a:prstGeom>
-          <a:noFill/>
-        </p:spPr>
-        <p:txBody>
-          <a:bodyPr wrap="square">
-            <a:spAutoFit/>
-          </a:bodyPr>
-          <a:lstStyle/>
-          <a:p>
-            <a:pPr algn="ctr"/>
-            <a:r>
-              <a:rPr sz="1600" b="1" i="0">
-                <a:solidFill>
-                  <a:srgbClr val="A0F0A0"/>
-                </a:solidFill>
-              </a:rPr>
-              <a:t>+1.5</a:t>
-            </a:r>
-          </a:p>
-        </p:txBody>
-      </p:sp>
-      <p:sp>
-        <p:nvSpPr>
-          <p:cNvPr id="20" name="TextBox 19"/>
-          <p:cNvSpPr txBox="1"/>
-          <p:nvPr/>
-        </p:nvSpPr>
-        <p:spPr>
-          <a:xfrm>
-            <a:off x="1481328" y="4626864"/>
-            <a:ext cx="10058400" cy="347472"/>
-          </a:xfrm>
-          <a:prstGeom prst="rect">
-            <a:avLst/>
-          </a:prstGeom>
-          <a:noFill/>
-        </p:spPr>
-        <p:txBody>
-          <a:bodyPr wrap="square">
-            <a:spAutoFit/>
-          </a:bodyPr>
-          <a:lstStyle/>
-          <a:p>
-            <a:pPr algn="l"/>
-            <a:r>
-              <a:rPr sz="1400" b="0" i="0">
-                <a:solidFill>
-                  <a:srgbClr val="CCCCCC"/>
-                </a:solidFill>
-              </a:rPr>
-              <a:t>"Great drive, push to the end."</a:t>
-            </a:r>
-          </a:p>
-        </p:txBody>
-      </p:sp>
-      <p:sp>
-        <p:nvSpPr>
-          <p:cNvPr id="21" name="Rectangle 20"/>
-          <p:cNvSpPr/>
-          <p:nvPr/>
-        </p:nvSpPr>
-        <p:spPr>
-          <a:xfrm>
-            <a:off x="347472" y="5084064"/>
-            <a:ext cx="1051560" cy="457200"/>
-          </a:xfrm>
-          <a:prstGeom prst="rect">
-            <a:avLst/>
-          </a:prstGeom>
-          <a:solidFill>
-            <a:srgbClr val="121225"/>
-          </a:solidFill>
-          <a:ln w="15240">
-            <a:solidFill>
-              <a:srgbClr val="CCCCCC"/>
-            </a:solidFill>
-          </a:ln>
-        </p:spPr>
-        <p:style>
-          <a:lnRef idx="1">
-            <a:schemeClr val="accent1"/>
-          </a:lnRef>
-          <a:fillRef idx="3">
-            <a:schemeClr val="accent1"/>
-          </a:fillRef>
-          <a:effectRef idx="2">
-            <a:schemeClr val="accent1"/>
-          </a:effectRef>
-          <a:fontRef idx="minor">
-            <a:schemeClr val="lt1"/>
-          </a:fontRef>
-        </p:style>
-        <p:txBody>
-          <a:bodyPr rtlCol="0" anchor="ctr"/>
-          <a:lstStyle/>
-          <a:p>
-            <a:pPr algn="ctr"/>
-          </a:p>
-        </p:txBody>
-      </p:sp>
-      <p:sp>
-        <p:nvSpPr>
-          <p:cNvPr id="22" name="TextBox 21"/>
-          <p:cNvSpPr txBox="1"/>
-          <p:nvPr/>
-        </p:nvSpPr>
-        <p:spPr>
-          <a:xfrm>
-            <a:off x="347472" y="5129784"/>
-            <a:ext cx="1051560" cy="365760"/>
-          </a:xfrm>
-          <a:prstGeom prst="rect">
-            <a:avLst/>
-          </a:prstGeom>
-          <a:noFill/>
-        </p:spPr>
-        <p:txBody>
-          <a:bodyPr wrap="square">
-            <a:spAutoFit/>
-          </a:bodyPr>
-          <a:lstStyle/>
-          <a:p>
-            <a:pPr algn="ctr"/>
-            <a:r>
-              <a:rPr sz="1600" b="1" i="0">
-                <a:solidFill>
-                  <a:srgbClr val="CCCCCC"/>
-                </a:solidFill>
-              </a:rPr>
-              <a:t> 0.0</a:t>
-            </a:r>
-          </a:p>
-        </p:txBody>
-      </p:sp>
-      <p:sp>
-        <p:nvSpPr>
-          <p:cNvPr id="23" name="TextBox 22"/>
-          <p:cNvSpPr txBox="1"/>
-          <p:nvPr/>
-        </p:nvSpPr>
-        <p:spPr>
-          <a:xfrm>
-            <a:off x="1481328" y="5157216"/>
-            <a:ext cx="10058400" cy="347472"/>
-          </a:xfrm>
-          <a:prstGeom prst="rect">
-            <a:avLst/>
-          </a:prstGeom>
-          <a:noFill/>
-        </p:spPr>
-        <p:txBody>
-          <a:bodyPr wrap="square">
-            <a:spAutoFit/>
-          </a:bodyPr>
-          <a:lstStyle/>
-          <a:p>
-            <a:pPr algn="l"/>
-            <a:r>
-              <a:rPr sz="1400" b="0" i="0">
-                <a:solidFill>
-                  <a:srgbClr val="CCCCCC"/>
-                </a:solidFill>
-              </a:rPr>
-              <a:t>"Box this lap, copy that."</a:t>
-            </a:r>
-          </a:p>
-        </p:txBody>
-      </p:sp>
-      <p:sp>
-        <p:nvSpPr>
-          <p:cNvPr id="24" name="Rectangle 23"/>
-          <p:cNvSpPr/>
-          <p:nvPr/>
-        </p:nvSpPr>
-        <p:spPr>
-          <a:xfrm>
-            <a:off x="347472" y="5614416"/>
-            <a:ext cx="1051560" cy="457200"/>
-          </a:xfrm>
-          <a:prstGeom prst="rect">
-            <a:avLst/>
-          </a:prstGeom>
-          <a:solidFill>
-            <a:srgbClr val="121225"/>
-          </a:solidFill>
-          <a:ln w="15240">
-            <a:solidFill>
-              <a:srgbClr val="FFA060"/>
-            </a:solidFill>
-          </a:ln>
-        </p:spPr>
-        <p:style>
-          <a:lnRef idx="1">
-            <a:schemeClr val="accent1"/>
-          </a:lnRef>
-          <a:fillRef idx="3">
-            <a:schemeClr val="accent1"/>
-          </a:fillRef>
-          <a:effectRef idx="2">
-            <a:schemeClr val="accent1"/>
-          </a:effectRef>
-          <a:fontRef idx="minor">
-            <a:schemeClr val="lt1"/>
-          </a:fontRef>
-        </p:style>
-        <p:txBody>
-          <a:bodyPr rtlCol="0" anchor="ctr"/>
-          <a:lstStyle/>
-          <a:p>
-            <a:pPr algn="ctr"/>
-          </a:p>
-        </p:txBody>
-      </p:sp>
-      <p:sp>
-        <p:nvSpPr>
-          <p:cNvPr id="25" name="TextBox 24"/>
-          <p:cNvSpPr txBox="1"/>
-          <p:nvPr/>
-        </p:nvSpPr>
-        <p:spPr>
-          <a:xfrm>
-            <a:off x="347472" y="5660136"/>
-            <a:ext cx="1051560" cy="365760"/>
-          </a:xfrm>
-          <a:prstGeom prst="rect">
-            <a:avLst/>
-          </a:prstGeom>
-          <a:noFill/>
-        </p:spPr>
-        <p:txBody>
-          <a:bodyPr wrap="square">
-            <a:spAutoFit/>
-          </a:bodyPr>
-          <a:lstStyle/>
-          <a:p>
-            <a:pPr algn="ctr"/>
-            <a:r>
-              <a:rPr sz="1600" b="1" i="0">
-                <a:solidFill>
-                  <a:srgbClr val="FFA060"/>
-                </a:solidFill>
-              </a:rPr>
-              <a:t>-1.0</a:t>
-            </a:r>
-          </a:p>
-        </p:txBody>
-      </p:sp>
-      <p:sp>
-        <p:nvSpPr>
-          <p:cNvPr id="26" name="TextBox 25"/>
-          <p:cNvSpPr txBox="1"/>
-          <p:nvPr/>
-        </p:nvSpPr>
-        <p:spPr>
-          <a:xfrm>
-            <a:off x="1481328" y="5687568"/>
-            <a:ext cx="10058400" cy="347472"/>
-          </a:xfrm>
-          <a:prstGeom prst="rect">
-            <a:avLst/>
-          </a:prstGeom>
-          <a:noFill/>
-        </p:spPr>
-        <p:txBody>
-          <a:bodyPr wrap="square">
-            <a:spAutoFit/>
-          </a:bodyPr>
-          <a:lstStyle/>
-          <a:p>
-            <a:pPr algn="l"/>
-            <a:r>
-              <a:rPr sz="1400" b="0" i="0">
-                <a:solidFill>
-                  <a:srgbClr val="CCCCCC"/>
-                </a:solidFill>
-              </a:rPr>
-              <a:t>"Problem with the rear wing, slow."</a:t>
-            </a:r>
-          </a:p>
-        </p:txBody>
-      </p:sp>
-      <p:sp>
-        <p:nvSpPr>
-          <p:cNvPr id="27" name="Rectangle 26"/>
-          <p:cNvSpPr/>
-          <p:nvPr/>
-        </p:nvSpPr>
-        <p:spPr>
-          <a:xfrm>
-            <a:off x="347472" y="6144768"/>
-            <a:ext cx="1051560" cy="457200"/>
-          </a:xfrm>
-          <a:prstGeom prst="rect">
-            <a:avLst/>
-          </a:prstGeom>
-          <a:solidFill>
-            <a:srgbClr val="121225"/>
-          </a:solidFill>
-          <a:ln w="15240">
-            <a:solidFill>
-              <a:srgbClr val="E51B23"/>
-            </a:solidFill>
-          </a:ln>
-        </p:spPr>
-        <p:style>
-          <a:lnRef idx="1">
-            <a:schemeClr val="accent1"/>
-          </a:lnRef>
-          <a:fillRef idx="3">
-            <a:schemeClr val="accent1"/>
-          </a:fillRef>
-          <a:effectRef idx="2">
-            <a:schemeClr val="accent1"/>
-          </a:effectRef>
-          <a:fontRef idx="minor">
-            <a:schemeClr val="lt1"/>
-          </a:fontRef>
-        </p:style>
-        <p:txBody>
-          <a:bodyPr rtlCol="0" anchor="ctr"/>
-          <a:lstStyle/>
-          <a:p>
-            <a:pPr algn="ctr"/>
-          </a:p>
-        </p:txBody>
-      </p:sp>
-      <p:sp>
-        <p:nvSpPr>
-          <p:cNvPr id="28" name="TextBox 27"/>
-          <p:cNvSpPr txBox="1"/>
-          <p:nvPr/>
-        </p:nvSpPr>
-        <p:spPr>
-          <a:xfrm>
-            <a:off x="347472" y="6190488"/>
-            <a:ext cx="1051560" cy="365760"/>
-          </a:xfrm>
-          <a:prstGeom prst="rect">
-            <a:avLst/>
-          </a:prstGeom>
-          <a:noFill/>
-        </p:spPr>
-        <p:txBody>
-          <a:bodyPr wrap="square">
-            <a:spAutoFit/>
-          </a:bodyPr>
-          <a:lstStyle/>
-          <a:p>
-            <a:pPr algn="ctr"/>
-            <a:r>
-              <a:rPr sz="1600" b="1" i="0">
-                <a:solidFill>
-                  <a:srgbClr val="E51B23"/>
-                </a:solidFill>
-              </a:rPr>
-              <a:t>-2.0</a:t>
-            </a:r>
-          </a:p>
-        </p:txBody>
-      </p:sp>
-      <p:sp>
-        <p:nvSpPr>
-          <p:cNvPr id="29" name="TextBox 28"/>
-          <p:cNvSpPr txBox="1"/>
-          <p:nvPr/>
-        </p:nvSpPr>
-        <p:spPr>
-          <a:xfrm>
-            <a:off x="1481328" y="6217920"/>
-            <a:ext cx="10058400" cy="347472"/>
-          </a:xfrm>
-          <a:prstGeom prst="rect">
-            <a:avLst/>
-          </a:prstGeom>
-          <a:noFill/>
-        </p:spPr>
-        <p:txBody>
-          <a:bodyPr wrap="square">
-            <a:spAutoFit/>
-          </a:bodyPr>
-          <a:lstStyle/>
-          <a:p>
-            <a:pPr algn="l"/>
-            <a:r>
-              <a:rPr sz="1400" b="0" i="0">
-                <a:solidFill>
-                  <a:srgbClr val="CCCCCC"/>
-                </a:solidFill>
-              </a:rPr>
-              <a:t>"WTF, the engine is dying, impossible!"</a:t>
+                <a:latin typeface="Courier New"/>
+              </a:rPr>
+              <a:t>sentiment_lexicon = {</a:t>
+            </a:r>
+          </a:p>
+          <a:p>
+            <a:pPr>
+              <a:spcBef>
+                <a:spcPts val="0"/>
+              </a:spcBef>
+              <a:spcAft>
+                <a:spcPts val="0"/>
+              </a:spcAft>
+            </a:pPr>
+            <a:r>
+              <a:rPr sz="1200">
+                <a:solidFill>
+                  <a:srgbClr val="50FA7B"/>
+                </a:solidFill>
+                <a:latin typeface="Courier New"/>
+              </a:rPr>
+              <a:t>    'p1': 2.0, 'won': 2.0, 'great': 1.5,</a:t>
+            </a:r>
+          </a:p>
+          <a:p>
+            <a:pPr>
+              <a:spcBef>
+                <a:spcPts val="0"/>
+              </a:spcBef>
+              <a:spcAft>
+                <a:spcPts val="0"/>
+              </a:spcAft>
+            </a:pPr>
+            <a:r>
+              <a:rPr sz="1200">
+                <a:solidFill>
+                  <a:srgbClr val="50FA7B"/>
+                </a:solidFill>
+                <a:latin typeface="Courier New"/>
+              </a:rPr>
+              <a:t>    'wtf': -2.0, 'problem': -1.0, 'slow': -0.8</a:t>
+            </a:r>
+          </a:p>
+          <a:p>
+            <a:pPr>
+              <a:spcBef>
+                <a:spcPts val="0"/>
+              </a:spcBef>
+              <a:spcAft>
+                <a:spcPts val="0"/>
+              </a:spcAft>
+            </a:pPr>
+            <a:r>
+              <a:rPr sz="1200">
+                <a:solidFill>
+                  <a:srgbClr val="50FA7B"/>
+                </a:solidFill>
+                <a:latin typeface="Courier New"/>
+              </a:rPr>
+              <a:t>}</a:t>
+            </a:r>
+          </a:p>
+          <a:p>
+            <a:pPr>
+              <a:spcBef>
+                <a:spcPts val="0"/>
+              </a:spcBef>
+              <a:spcAft>
+                <a:spcPts val="0"/>
+              </a:spcAft>
+            </a:pPr>
+            <a:r>
+              <a:rPr sz="1200">
+                <a:solidFill>
+                  <a:srgbClr val="50FA7B"/>
+                </a:solidFill>
+                <a:latin typeface="Courier New"/>
+              </a:rPr>
+              <a:t/>
+            </a:r>
+          </a:p>
+          <a:p>
+            <a:pPr>
+              <a:spcBef>
+                <a:spcPts val="0"/>
+              </a:spcBef>
+              <a:spcAft>
+                <a:spcPts val="0"/>
+              </a:spcAft>
+            </a:pPr>
+            <a:r>
+              <a:rPr sz="1200">
+                <a:solidFill>
+                  <a:srgbClr val="FFD866"/>
+                </a:solidFill>
+                <a:latin typeface="Courier New"/>
+              </a:rPr>
+              <a:t>def analyze_sentiment(text):</a:t>
+            </a:r>
+          </a:p>
+          <a:p>
+            <a:pPr>
+              <a:spcBef>
+                <a:spcPts val="0"/>
+              </a:spcBef>
+              <a:spcAft>
+                <a:spcPts val="0"/>
+              </a:spcAft>
+            </a:pPr>
+            <a:r>
+              <a:rPr sz="1200">
+                <a:solidFill>
+                  <a:srgbClr val="50FA7B"/>
+                </a:solidFill>
+                <a:latin typeface="Courier New"/>
+              </a:rPr>
+              <a:t>    words = str(text).lower().split()</a:t>
+            </a:r>
+          </a:p>
+          <a:p>
+            <a:pPr>
+              <a:spcBef>
+                <a:spcPts val="0"/>
+              </a:spcBef>
+              <a:spcAft>
+                <a:spcPts val="0"/>
+              </a:spcAft>
+            </a:pPr>
+            <a:r>
+              <a:rPr sz="1200">
+                <a:solidFill>
+                  <a:srgbClr val="8888AA"/>
+                </a:solidFill>
+                <a:latin typeface="Courier New"/>
+              </a:rPr>
+              <a:t>    # sum weights matching F1 dictionary</a:t>
+            </a:r>
+          </a:p>
+          <a:p>
+            <a:pPr>
+              <a:spcBef>
+                <a:spcPts val="0"/>
+              </a:spcBef>
+              <a:spcAft>
+                <a:spcPts val="0"/>
+              </a:spcAft>
+            </a:pPr>
+            <a:r>
+              <a:rPr sz="1200">
+                <a:solidFill>
+                  <a:srgbClr val="50FA7B"/>
+                </a:solidFill>
+                <a:latin typeface="Courier New"/>
+              </a:rPr>
+              <a:t>    score = sum(sentiment_lexicon.get(w, 0.0) \</a:t>
+            </a:r>
+          </a:p>
+          <a:p>
+            <a:pPr>
+              <a:spcBef>
+                <a:spcPts val="0"/>
+              </a:spcBef>
+              <a:spcAft>
+                <a:spcPts val="0"/>
+              </a:spcAft>
+            </a:pPr>
+            <a:r>
+              <a:rPr sz="1200">
+                <a:solidFill>
+                  <a:srgbClr val="FFD866"/>
+                </a:solidFill>
+                <a:latin typeface="Courier New"/>
+              </a:rPr>
+              <a:t>                for w in words)</a:t>
+            </a:r>
+          </a:p>
+          <a:p>
+            <a:pPr>
+              <a:spcBef>
+                <a:spcPts val="0"/>
+              </a:spcBef>
+              <a:spcAft>
+                <a:spcPts val="0"/>
+              </a:spcAft>
+            </a:pPr>
+            <a:r>
+              <a:rPr sz="1200">
+                <a:solidFill>
+                  <a:srgbClr val="FFD866"/>
+                </a:solidFill>
+                <a:latin typeface="Courier New"/>
+              </a:rPr>
+              <a:t>    return score</a:t>
             </a:r>
           </a:p>
         </p:txBody>
@@ -16665,7 +13769,7 @@
         <p:spPr>
           <a:xfrm>
             <a:off x="347472" y="1371600"/>
-            <a:ext cx="5577840" cy="2011680"/>
+            <a:ext cx="5303520" cy="4572000"/>
           </a:xfrm>
           <a:prstGeom prst="rect">
             <a:avLst/>
@@ -16710,7 +13814,7 @@
         <p:spPr>
           <a:xfrm>
             <a:off x="530352" y="1481328"/>
-            <a:ext cx="5303520" cy="384048"/>
+            <a:ext cx="5029200" cy="384048"/>
           </a:xfrm>
           <a:prstGeom prst="rect">
             <a:avLst/>
@@ -16730,7 +13834,7 @@
                   <a:srgbClr val="4EA8DA"/>
                 </a:solidFill>
               </a:rPr>
-              <a:t>Data Classification Targets</a:t>
+              <a:t>Supervised Classifiers</a:t>
             </a:r>
           </a:p>
         </p:txBody>
@@ -16744,7 +13848,7 @@
         <p:spPr>
           <a:xfrm>
             <a:off x="530352" y="1901952"/>
-            <a:ext cx="5303520" cy="1389888"/>
+            <a:ext cx="5029200" cy="3950208"/>
           </a:xfrm>
           <a:prstGeom prst="rect">
             <a:avLst/>
@@ -16763,12 +13867,12 @@
               </a:spcBef>
             </a:pPr>
             <a:r>
-              <a:rPr sz="1350">
+              <a:rPr sz="1300">
                 <a:solidFill>
                   <a:srgbClr val="CCCCCC"/>
                 </a:solidFill>
               </a:rPr>
-              <a:t>  We auto-label messages into 4 categories using keyword heuristics:</a:t>
+              <a:t>✦  Dataset auto-labeled into 4 categories: Strategy, Position_Gap, Emotional, Technical.</a:t>
             </a:r>
           </a:p>
           <a:p>
@@ -16778,12 +13882,12 @@
               </a:spcBef>
             </a:pPr>
             <a:r>
-              <a:rPr sz="1350">
+              <a:rPr sz="1300">
                 <a:solidFill>
                   <a:srgbClr val="CCCCCC"/>
                 </a:solidFill>
               </a:rPr>
-              <a:t>    ✦  Strategy: box, pit, tire, soft, mediums, strat</a:t>
+              <a:t>✦  80% train / 20% test stratified split (14,859 train, 3,715 test records).</a:t>
             </a:r>
           </a:p>
           <a:p>
@@ -16793,12 +13897,12 @@
               </a:spcBef>
             </a:pPr>
             <a:r>
-              <a:rPr sz="1350">
+              <a:rPr sz="1300">
                 <a:solidFill>
                   <a:srgbClr val="CCCCCC"/>
                 </a:solidFill>
               </a:rPr>
-              <a:t>    ✦  Position_Gap: gap, ahead, behind, seconds, P1</a:t>
+              <a:t>✦  Naive Bayes baseline: 79.94% accuracy score.</a:t>
             </a:r>
           </a:p>
           <a:p>
@@ -16808,12 +13912,12 @@
               </a:spcBef>
             </a:pPr>
             <a:r>
-              <a:rPr sz="1350">
+              <a:rPr sz="1300">
                 <a:solidFill>
                   <a:srgbClr val="CCCCCC"/>
                 </a:solidFill>
               </a:rPr>
-              <a:t>    ✦  Emotional: wtf, angry, impossible, no</a:t>
+              <a:t>✦  Logistic Regression: 92.21% accuracy score.</a:t>
             </a:r>
           </a:p>
           <a:p>
@@ -16823,12 +13927,12 @@
               </a:spcBef>
             </a:pPr>
             <a:r>
-              <a:rPr sz="1350">
+              <a:rPr sz="1300">
                 <a:solidFill>
                   <a:srgbClr val="CCCCCC"/>
                 </a:solidFill>
               </a:rPr>
-              <a:t>    ✦  Technical: default/technical messages</a:t>
+              <a:t>✦  Linear SVM: 93.81% accuracy score (Optimal separating hyperplane on sparse matrices).</a:t>
             </a:r>
           </a:p>
         </p:txBody>
@@ -16841,18 +13945,18 @@
         </p:nvSpPr>
         <p:spPr>
           <a:xfrm>
-            <a:off x="6126480" y="1371600"/>
-            <a:ext cx="5715000" cy="2011680"/>
+            <a:off x="5943600" y="1371600"/>
+            <a:ext cx="5897880" cy="4572000"/>
           </a:xfrm>
           <a:prstGeom prst="rect">
             <a:avLst/>
           </a:prstGeom>
           <a:solidFill>
-            <a:srgbClr val="1A1A2E"/>
+            <a:srgbClr val="121222"/>
           </a:solidFill>
-          <a:ln w="10160">
+          <a:ln w="12700">
             <a:solidFill>
-              <a:srgbClr val="303055"/>
+              <a:srgbClr val="404060"/>
             </a:solidFill>
           </a:ln>
         </p:spPr>
@@ -16886,8 +13990,8 @@
         </p:nvSpPr>
         <p:spPr>
           <a:xfrm>
-            <a:off x="6309360" y="1481328"/>
-            <a:ext cx="5440680" cy="384048"/>
+            <a:off x="6080760" y="1463040"/>
+            <a:ext cx="5623560" cy="4389120"/>
           </a:xfrm>
           <a:prstGeom prst="rect">
             <a:avLst/>
@@ -16895,780 +13999,255 @@
           <a:noFill/>
         </p:spPr>
         <p:txBody>
-          <a:bodyPr wrap="square">
+          <a:bodyPr wrap="none">
             <a:spAutoFit/>
           </a:bodyPr>
           <a:lstStyle/>
           <a:p>
-            <a:pPr algn="l"/>
-            <a:r>
-              <a:rPr sz="1500" b="1" i="0">
-                <a:solidFill>
-                  <a:srgbClr val="FFC00B"/>
-                </a:solidFill>
-              </a:rPr>
-              <a:t>Evaluation Protocol</a:t>
-            </a:r>
-          </a:p>
-        </p:txBody>
-      </p:sp>
-      <p:sp>
-        <p:nvSpPr>
-          <p:cNvPr id="12" name="TextBox 11"/>
-          <p:cNvSpPr txBox="1"/>
-          <p:nvPr/>
-        </p:nvSpPr>
-        <p:spPr>
-          <a:xfrm>
-            <a:off x="6309360" y="1901952"/>
-            <a:ext cx="5440680" cy="1389888"/>
-          </a:xfrm>
-          <a:prstGeom prst="rect">
-            <a:avLst/>
-          </a:prstGeom>
-          <a:noFill/>
-        </p:spPr>
-        <p:txBody>
-          <a:bodyPr wrap="square">
-            <a:spAutoFit/>
-          </a:bodyPr>
-          <a:lstStyle/>
-          <a:p>
-            <a:pPr>
-              <a:spcBef>
-                <a:spcPts val="400"/>
-              </a:spcBef>
-            </a:pPr>
-            <a:r>
-              <a:rPr sz="1350">
-                <a:solidFill>
-                  <a:srgbClr val="CCCCCC"/>
-                </a:solidFill>
-              </a:rPr>
-              <a:t>▸  80% of data (14,859 messages) used to fit classifier parameters.</a:t>
-            </a:r>
-          </a:p>
-          <a:p>
-            <a:pPr>
-              <a:spcBef>
-                <a:spcPts val="400"/>
-              </a:spcBef>
-            </a:pPr>
-            <a:r>
-              <a:rPr sz="1350">
-                <a:solidFill>
-                  <a:srgbClr val="CCCCCC"/>
-                </a:solidFill>
-              </a:rPr>
-              <a:t>▸  20% of data (3,715 messages) held back to test generalizability.</a:t>
-            </a:r>
-          </a:p>
-          <a:p>
-            <a:pPr>
-              <a:spcBef>
-                <a:spcPts val="400"/>
-              </a:spcBef>
-            </a:pPr>
-            <a:r>
-              <a:rPr sz="1350">
-                <a:solidFill>
-                  <a:srgbClr val="CCCCCC"/>
-                </a:solidFill>
-              </a:rPr>
-              <a:t>▸  Stratification guarantees identical category ratios in train/test.</a:t>
-            </a:r>
-          </a:p>
-          <a:p>
-            <a:pPr>
-              <a:spcBef>
-                <a:spcPts val="400"/>
-              </a:spcBef>
-            </a:pPr>
-            <a:r>
-              <a:rPr sz="1350">
-                <a:solidFill>
-                  <a:srgbClr val="CCCCCC"/>
-                </a:solidFill>
-              </a:rPr>
-              <a:t>▸  Performance assessed via Accuracy and Confusion Matrices.</a:t>
-            </a:r>
-          </a:p>
-        </p:txBody>
-      </p:sp>
-      <p:sp>
-        <p:nvSpPr>
-          <p:cNvPr id="13" name="Rectangle 12"/>
-          <p:cNvSpPr/>
-          <p:nvPr/>
-        </p:nvSpPr>
-        <p:spPr>
-          <a:xfrm>
-            <a:off x="347472" y="3520440"/>
-            <a:ext cx="3749039" cy="2240280"/>
-          </a:xfrm>
-          <a:prstGeom prst="rect">
-            <a:avLst/>
-          </a:prstGeom>
-          <a:solidFill>
-            <a:srgbClr val="1A1A2E"/>
-          </a:solidFill>
-          <a:ln w="10160">
-            <a:solidFill>
-              <a:srgbClr val="303055"/>
-            </a:solidFill>
-          </a:ln>
-        </p:spPr>
-        <p:style>
-          <a:lnRef idx="1">
-            <a:schemeClr val="accent1"/>
-          </a:lnRef>
-          <a:fillRef idx="3">
-            <a:schemeClr val="accent1"/>
-          </a:fillRef>
-          <a:effectRef idx="2">
-            <a:schemeClr val="accent1"/>
-          </a:effectRef>
-          <a:fontRef idx="minor">
-            <a:schemeClr val="lt1"/>
-          </a:fontRef>
-        </p:style>
-        <p:txBody>
-          <a:bodyPr rtlCol="0" anchor="ctr"/>
-          <a:lstStyle/>
-          <a:p>
-            <a:pPr algn="ctr"/>
-          </a:p>
-        </p:txBody>
-      </p:sp>
-      <p:sp>
-        <p:nvSpPr>
-          <p:cNvPr id="14" name="TextBox 13"/>
-          <p:cNvSpPr txBox="1"/>
-          <p:nvPr/>
-        </p:nvSpPr>
-        <p:spPr>
-          <a:xfrm>
-            <a:off x="530352" y="3630168"/>
-            <a:ext cx="3474719" cy="384048"/>
-          </a:xfrm>
-          <a:prstGeom prst="rect">
-            <a:avLst/>
-          </a:prstGeom>
-          <a:noFill/>
-        </p:spPr>
-        <p:txBody>
-          <a:bodyPr wrap="square">
-            <a:spAutoFit/>
-          </a:bodyPr>
-          <a:lstStyle/>
-          <a:p>
-            <a:pPr algn="l"/>
-            <a:r>
-              <a:rPr sz="1500" b="1" i="0">
-                <a:solidFill>
-                  <a:srgbClr val="CCCCCC"/>
-                </a:solidFill>
-              </a:rPr>
-              <a:t>Naive Bayes</a:t>
-            </a:r>
-          </a:p>
-        </p:txBody>
-      </p:sp>
-      <p:sp>
-        <p:nvSpPr>
-          <p:cNvPr id="15" name="TextBox 14"/>
-          <p:cNvSpPr txBox="1"/>
-          <p:nvPr/>
-        </p:nvSpPr>
-        <p:spPr>
-          <a:xfrm>
-            <a:off x="530352" y="4050792"/>
-            <a:ext cx="3474719" cy="1618488"/>
-          </a:xfrm>
-          <a:prstGeom prst="rect">
-            <a:avLst/>
-          </a:prstGeom>
-          <a:noFill/>
-        </p:spPr>
-        <p:txBody>
-          <a:bodyPr wrap="square">
-            <a:spAutoFit/>
-          </a:bodyPr>
-          <a:lstStyle/>
-          <a:p>
-            <a:pPr>
-              <a:spcBef>
-                <a:spcPts val="400"/>
-              </a:spcBef>
-            </a:pPr>
-            <a:r>
-              <a:rPr sz="1350">
-                <a:solidFill>
-                  <a:srgbClr val="CCCCCC"/>
-                </a:solidFill>
-              </a:rPr>
-              <a:t>◆  Simple probabilistic baseline classifier.</a:t>
-            </a:r>
-          </a:p>
-          <a:p>
-            <a:pPr>
-              <a:spcBef>
-                <a:spcPts val="400"/>
-              </a:spcBef>
-            </a:pPr>
-            <a:r>
-              <a:rPr sz="1350">
-                <a:solidFill>
-                  <a:srgbClr val="CCCCCC"/>
-                </a:solidFill>
-              </a:rPr>
-              <a:t>◆  Assumes word independence.</a:t>
-            </a:r>
-          </a:p>
-          <a:p>
-            <a:pPr>
-              <a:spcBef>
-                <a:spcPts val="400"/>
-              </a:spcBef>
-            </a:pPr>
-            <a:r>
-              <a:rPr sz="1350">
-                <a:solidFill>
-                  <a:srgbClr val="CCCCCC"/>
-                </a:solidFill>
-              </a:rPr>
-              <a:t>◆  Fast training, lower accuracy but good benchmark.</a:t>
-            </a:r>
-          </a:p>
-        </p:txBody>
-      </p:sp>
-      <p:sp>
-        <p:nvSpPr>
-          <p:cNvPr id="16" name="Rectangle 15"/>
-          <p:cNvSpPr/>
-          <p:nvPr/>
-        </p:nvSpPr>
-        <p:spPr>
-          <a:xfrm>
-            <a:off x="347472" y="5852160"/>
-            <a:ext cx="3749039" cy="804672"/>
-          </a:xfrm>
-          <a:prstGeom prst="rect">
-            <a:avLst/>
-          </a:prstGeom>
-          <a:solidFill>
-            <a:srgbClr val="1A1A30"/>
-          </a:solidFill>
-          <a:ln w="19050">
-            <a:solidFill>
-              <a:srgbClr val="CCCCCC"/>
-            </a:solidFill>
-          </a:ln>
-        </p:spPr>
-        <p:style>
-          <a:lnRef idx="1">
-            <a:schemeClr val="accent1"/>
-          </a:lnRef>
-          <a:fillRef idx="3">
-            <a:schemeClr val="accent1"/>
-          </a:fillRef>
-          <a:effectRef idx="2">
-            <a:schemeClr val="accent1"/>
-          </a:effectRef>
-          <a:fontRef idx="minor">
-            <a:schemeClr val="lt1"/>
-          </a:fontRef>
-        </p:style>
-        <p:txBody>
-          <a:bodyPr rtlCol="0" anchor="ctr"/>
-          <a:lstStyle/>
-          <a:p>
-            <a:pPr algn="ctr"/>
-          </a:p>
-        </p:txBody>
-      </p:sp>
-      <p:sp>
-        <p:nvSpPr>
-          <p:cNvPr id="17" name="TextBox 16"/>
-          <p:cNvSpPr txBox="1"/>
-          <p:nvPr/>
-        </p:nvSpPr>
-        <p:spPr>
-          <a:xfrm>
-            <a:off x="347472" y="5943600"/>
-            <a:ext cx="3749039" cy="594360"/>
-          </a:xfrm>
-          <a:prstGeom prst="rect">
-            <a:avLst/>
-          </a:prstGeom>
-          <a:noFill/>
-        </p:spPr>
-        <p:txBody>
-          <a:bodyPr wrap="square">
-            <a:spAutoFit/>
-          </a:bodyPr>
-          <a:lstStyle/>
-          <a:p>
-            <a:pPr algn="ctr"/>
-            <a:r>
-              <a:rPr sz="2000" b="1" i="0">
-                <a:solidFill>
-                  <a:srgbClr val="CCCCCC"/>
-                </a:solidFill>
-              </a:rPr>
-              <a:t>Accuracy:  79.94%</a:t>
-            </a:r>
-          </a:p>
-        </p:txBody>
-      </p:sp>
-      <p:sp>
-        <p:nvSpPr>
-          <p:cNvPr id="18" name="Rectangle 17"/>
-          <p:cNvSpPr/>
-          <p:nvPr/>
-        </p:nvSpPr>
-        <p:spPr>
-          <a:xfrm>
-            <a:off x="4297680" y="3520440"/>
-            <a:ext cx="3749039" cy="2240280"/>
-          </a:xfrm>
-          <a:prstGeom prst="rect">
-            <a:avLst/>
-          </a:prstGeom>
-          <a:solidFill>
-            <a:srgbClr val="1A1A2E"/>
-          </a:solidFill>
-          <a:ln w="10160">
-            <a:solidFill>
-              <a:srgbClr val="303055"/>
-            </a:solidFill>
-          </a:ln>
-        </p:spPr>
-        <p:style>
-          <a:lnRef idx="1">
-            <a:schemeClr val="accent1"/>
-          </a:lnRef>
-          <a:fillRef idx="3">
-            <a:schemeClr val="accent1"/>
-          </a:fillRef>
-          <a:effectRef idx="2">
-            <a:schemeClr val="accent1"/>
-          </a:effectRef>
-          <a:fontRef idx="minor">
-            <a:schemeClr val="lt1"/>
-          </a:fontRef>
-        </p:style>
-        <p:txBody>
-          <a:bodyPr rtlCol="0" anchor="ctr"/>
-          <a:lstStyle/>
-          <a:p>
-            <a:pPr algn="ctr"/>
-          </a:p>
-        </p:txBody>
-      </p:sp>
-      <p:sp>
-        <p:nvSpPr>
-          <p:cNvPr id="19" name="TextBox 18"/>
-          <p:cNvSpPr txBox="1"/>
-          <p:nvPr/>
-        </p:nvSpPr>
-        <p:spPr>
-          <a:xfrm>
-            <a:off x="4480560" y="3630168"/>
-            <a:ext cx="3474719" cy="384048"/>
-          </a:xfrm>
-          <a:prstGeom prst="rect">
-            <a:avLst/>
-          </a:prstGeom>
-          <a:noFill/>
-        </p:spPr>
-        <p:txBody>
-          <a:bodyPr wrap="square">
-            <a:spAutoFit/>
-          </a:bodyPr>
-          <a:lstStyle/>
-          <a:p>
-            <a:pPr algn="l"/>
-            <a:r>
-              <a:rPr sz="1500" b="1" i="0">
-                <a:solidFill>
-                  <a:srgbClr val="4EA8DA"/>
-                </a:solidFill>
-              </a:rPr>
-              <a:t>Logistic Regression</a:t>
-            </a:r>
-          </a:p>
-        </p:txBody>
-      </p:sp>
-      <p:sp>
-        <p:nvSpPr>
-          <p:cNvPr id="20" name="TextBox 19"/>
-          <p:cNvSpPr txBox="1"/>
-          <p:nvPr/>
-        </p:nvSpPr>
-        <p:spPr>
-          <a:xfrm>
-            <a:off x="4480560" y="4050792"/>
-            <a:ext cx="3474719" cy="1618488"/>
-          </a:xfrm>
-          <a:prstGeom prst="rect">
-            <a:avLst/>
-          </a:prstGeom>
-          <a:noFill/>
-        </p:spPr>
-        <p:txBody>
-          <a:bodyPr wrap="square">
-            <a:spAutoFit/>
-          </a:bodyPr>
-          <a:lstStyle/>
-          <a:p>
-            <a:pPr>
-              <a:spcBef>
-                <a:spcPts val="400"/>
-              </a:spcBef>
-            </a:pPr>
-            <a:r>
-              <a:rPr sz="1350">
-                <a:solidFill>
-                  <a:srgbClr val="CCCCCC"/>
-                </a:solidFill>
-              </a:rPr>
-              <a:t>◆  Linear probability model.</a:t>
-            </a:r>
-          </a:p>
-          <a:p>
-            <a:pPr>
-              <a:spcBef>
-                <a:spcPts val="400"/>
-              </a:spcBef>
-            </a:pPr>
-            <a:r>
-              <a:rPr sz="1350">
-                <a:solidFill>
-                  <a:srgbClr val="CCCCCC"/>
-                </a:solidFill>
-              </a:rPr>
-              <a:t>◆  Performs strongly on sparse high-dimensional matrices.</a:t>
-            </a:r>
-          </a:p>
-          <a:p>
-            <a:pPr>
-              <a:spcBef>
-                <a:spcPts val="400"/>
-              </a:spcBef>
-            </a:pPr>
-            <a:r>
-              <a:rPr sz="1350">
-                <a:solidFill>
-                  <a:srgbClr val="CCCCCC"/>
-                </a:solidFill>
-              </a:rPr>
-              <a:t>◆  Highly interpretable coefficients.</a:t>
-            </a:r>
-          </a:p>
-        </p:txBody>
-      </p:sp>
-      <p:sp>
-        <p:nvSpPr>
-          <p:cNvPr id="21" name="Rectangle 20"/>
-          <p:cNvSpPr/>
-          <p:nvPr/>
-        </p:nvSpPr>
-        <p:spPr>
-          <a:xfrm>
-            <a:off x="4297680" y="5852160"/>
-            <a:ext cx="3749039" cy="804672"/>
-          </a:xfrm>
-          <a:prstGeom prst="rect">
-            <a:avLst/>
-          </a:prstGeom>
-          <a:solidFill>
-            <a:srgbClr val="1A1A30"/>
-          </a:solidFill>
-          <a:ln w="19050">
-            <a:solidFill>
-              <a:srgbClr val="4EA8DA"/>
-            </a:solidFill>
-          </a:ln>
-        </p:spPr>
-        <p:style>
-          <a:lnRef idx="1">
-            <a:schemeClr val="accent1"/>
-          </a:lnRef>
-          <a:fillRef idx="3">
-            <a:schemeClr val="accent1"/>
-          </a:fillRef>
-          <a:effectRef idx="2">
-            <a:schemeClr val="accent1"/>
-          </a:effectRef>
-          <a:fontRef idx="minor">
-            <a:schemeClr val="lt1"/>
-          </a:fontRef>
-        </p:style>
-        <p:txBody>
-          <a:bodyPr rtlCol="0" anchor="ctr"/>
-          <a:lstStyle/>
-          <a:p>
-            <a:pPr algn="ctr"/>
-          </a:p>
-        </p:txBody>
-      </p:sp>
-      <p:sp>
-        <p:nvSpPr>
-          <p:cNvPr id="22" name="TextBox 21"/>
-          <p:cNvSpPr txBox="1"/>
-          <p:nvPr/>
-        </p:nvSpPr>
-        <p:spPr>
-          <a:xfrm>
-            <a:off x="4297680" y="5943600"/>
-            <a:ext cx="3749039" cy="594360"/>
-          </a:xfrm>
-          <a:prstGeom prst="rect">
-            <a:avLst/>
-          </a:prstGeom>
-          <a:noFill/>
-        </p:spPr>
-        <p:txBody>
-          <a:bodyPr wrap="square">
-            <a:spAutoFit/>
-          </a:bodyPr>
-          <a:lstStyle/>
-          <a:p>
-            <a:pPr algn="ctr"/>
-            <a:r>
-              <a:rPr sz="2000" b="1" i="0">
-                <a:solidFill>
-                  <a:srgbClr val="4EA8DA"/>
-                </a:solidFill>
-              </a:rPr>
-              <a:t>Accuracy:  92.21%</a:t>
-            </a:r>
-          </a:p>
-        </p:txBody>
-      </p:sp>
-      <p:sp>
-        <p:nvSpPr>
-          <p:cNvPr id="23" name="Rectangle 22"/>
-          <p:cNvSpPr/>
-          <p:nvPr/>
-        </p:nvSpPr>
-        <p:spPr>
-          <a:xfrm>
-            <a:off x="8247888" y="3520440"/>
-            <a:ext cx="3749039" cy="2240280"/>
-          </a:xfrm>
-          <a:prstGeom prst="rect">
-            <a:avLst/>
-          </a:prstGeom>
-          <a:solidFill>
-            <a:srgbClr val="1A1A2E"/>
-          </a:solidFill>
-          <a:ln w="10160">
-            <a:solidFill>
-              <a:srgbClr val="303055"/>
-            </a:solidFill>
-          </a:ln>
-        </p:spPr>
-        <p:style>
-          <a:lnRef idx="1">
-            <a:schemeClr val="accent1"/>
-          </a:lnRef>
-          <a:fillRef idx="3">
-            <a:schemeClr val="accent1"/>
-          </a:fillRef>
-          <a:effectRef idx="2">
-            <a:schemeClr val="accent1"/>
-          </a:effectRef>
-          <a:fontRef idx="minor">
-            <a:schemeClr val="lt1"/>
-          </a:fontRef>
-        </p:style>
-        <p:txBody>
-          <a:bodyPr rtlCol="0" anchor="ctr"/>
-          <a:lstStyle/>
-          <a:p>
-            <a:pPr algn="ctr"/>
-          </a:p>
-        </p:txBody>
-      </p:sp>
-      <p:sp>
-        <p:nvSpPr>
-          <p:cNvPr id="24" name="TextBox 23"/>
-          <p:cNvSpPr txBox="1"/>
-          <p:nvPr/>
-        </p:nvSpPr>
-        <p:spPr>
-          <a:xfrm>
-            <a:off x="8430768" y="3630168"/>
-            <a:ext cx="3474719" cy="384048"/>
-          </a:xfrm>
-          <a:prstGeom prst="rect">
-            <a:avLst/>
-          </a:prstGeom>
-          <a:noFill/>
-        </p:spPr>
-        <p:txBody>
-          <a:bodyPr wrap="square">
-            <a:spAutoFit/>
-          </a:bodyPr>
-          <a:lstStyle/>
-          <a:p>
-            <a:pPr algn="l"/>
-            <a:r>
-              <a:rPr sz="1500" b="1" i="0">
-                <a:solidFill>
-                  <a:srgbClr val="E51B23"/>
-                </a:solidFill>
-              </a:rPr>
-              <a:t>Linear SVM (Best Model)</a:t>
-            </a:r>
-          </a:p>
-        </p:txBody>
-      </p:sp>
-      <p:sp>
-        <p:nvSpPr>
-          <p:cNvPr id="25" name="TextBox 24"/>
-          <p:cNvSpPr txBox="1"/>
-          <p:nvPr/>
-        </p:nvSpPr>
-        <p:spPr>
-          <a:xfrm>
-            <a:off x="8430768" y="4050792"/>
-            <a:ext cx="3474719" cy="1618488"/>
-          </a:xfrm>
-          <a:prstGeom prst="rect">
-            <a:avLst/>
-          </a:prstGeom>
-          <a:noFill/>
-        </p:spPr>
-        <p:txBody>
-          <a:bodyPr wrap="square">
-            <a:spAutoFit/>
-          </a:bodyPr>
-          <a:lstStyle/>
-          <a:p>
-            <a:pPr>
-              <a:spcBef>
-                <a:spcPts val="400"/>
-              </a:spcBef>
-            </a:pPr>
-            <a:r>
-              <a:rPr sz="1350">
-                <a:solidFill>
-                  <a:srgbClr val="CCCCCC"/>
-                </a:solidFill>
-              </a:rPr>
-              <a:t>◆  Support Vector Machine with linear kernel.</a:t>
-            </a:r>
-          </a:p>
-          <a:p>
-            <a:pPr>
-              <a:spcBef>
-                <a:spcPts val="400"/>
-              </a:spcBef>
-            </a:pPr>
-            <a:r>
-              <a:rPr sz="1350">
-                <a:solidFill>
-                  <a:srgbClr val="CCCCCC"/>
-                </a:solidFill>
-              </a:rPr>
-              <a:t>◆  Identifies the optimal hyper-plane to separate classes.</a:t>
-            </a:r>
-          </a:p>
-          <a:p>
-            <a:pPr>
-              <a:spcBef>
-                <a:spcPts val="400"/>
-              </a:spcBef>
-            </a:pPr>
-            <a:r>
-              <a:rPr sz="1350">
-                <a:solidFill>
-                  <a:srgbClr val="CCCCCC"/>
-                </a:solidFill>
-              </a:rPr>
-              <a:t>◆  Highest performance score.</a:t>
-            </a:r>
-          </a:p>
-        </p:txBody>
-      </p:sp>
-      <p:sp>
-        <p:nvSpPr>
-          <p:cNvPr id="26" name="Rectangle 25"/>
-          <p:cNvSpPr/>
-          <p:nvPr/>
-        </p:nvSpPr>
-        <p:spPr>
-          <a:xfrm>
-            <a:off x="8247888" y="5852160"/>
-            <a:ext cx="3749039" cy="804672"/>
-          </a:xfrm>
-          <a:prstGeom prst="rect">
-            <a:avLst/>
-          </a:prstGeom>
-          <a:solidFill>
-            <a:srgbClr val="1A1A30"/>
-          </a:solidFill>
-          <a:ln w="19050">
-            <a:solidFill>
-              <a:srgbClr val="E51B23"/>
-            </a:solidFill>
-          </a:ln>
-        </p:spPr>
-        <p:style>
-          <a:lnRef idx="1">
-            <a:schemeClr val="accent1"/>
-          </a:lnRef>
-          <a:fillRef idx="3">
-            <a:schemeClr val="accent1"/>
-          </a:fillRef>
-          <a:effectRef idx="2">
-            <a:schemeClr val="accent1"/>
-          </a:effectRef>
-          <a:fontRef idx="minor">
-            <a:schemeClr val="lt1"/>
-          </a:fontRef>
-        </p:style>
-        <p:txBody>
-          <a:bodyPr rtlCol="0" anchor="ctr"/>
-          <a:lstStyle/>
-          <a:p>
-            <a:pPr algn="ctr"/>
-          </a:p>
-        </p:txBody>
-      </p:sp>
-      <p:sp>
-        <p:nvSpPr>
-          <p:cNvPr id="27" name="TextBox 26"/>
-          <p:cNvSpPr txBox="1"/>
-          <p:nvPr/>
-        </p:nvSpPr>
-        <p:spPr>
-          <a:xfrm>
-            <a:off x="8247888" y="5943600"/>
-            <a:ext cx="3749039" cy="594360"/>
-          </a:xfrm>
-          <a:prstGeom prst="rect">
-            <a:avLst/>
-          </a:prstGeom>
-          <a:noFill/>
-        </p:spPr>
-        <p:txBody>
-          <a:bodyPr wrap="square">
-            <a:spAutoFit/>
-          </a:bodyPr>
-          <a:lstStyle/>
-          <a:p>
-            <a:pPr algn="ctr"/>
-            <a:r>
-              <a:rPr sz="2000" b="1" i="0">
-                <a:solidFill>
-                  <a:srgbClr val="E51B23"/>
-                </a:solidFill>
-              </a:rPr>
-              <a:t>Accuracy:  93.81%</a:t>
+            <a:pPr>
+              <a:spcBef>
+                <a:spcPts val="0"/>
+              </a:spcBef>
+              <a:spcAft>
+                <a:spcPts val="0"/>
+              </a:spcAft>
+            </a:pPr>
+            <a:r>
+              <a:rPr sz="1200">
+                <a:solidFill>
+                  <a:srgbClr val="FFD866"/>
+                </a:solidFill>
+                <a:latin typeface="Courier New"/>
+              </a:rPr>
+              <a:t>from sklearn.model_selection import train_test_split</a:t>
+            </a:r>
+          </a:p>
+          <a:p>
+            <a:pPr>
+              <a:spcBef>
+                <a:spcPts val="0"/>
+              </a:spcBef>
+              <a:spcAft>
+                <a:spcPts val="0"/>
+              </a:spcAft>
+            </a:pPr>
+            <a:r>
+              <a:rPr sz="1200">
+                <a:solidFill>
+                  <a:srgbClr val="FFD866"/>
+                </a:solidFill>
+                <a:latin typeface="Courier New"/>
+              </a:rPr>
+              <a:t>from sklearn.naive_bayes import MultinomialNB</a:t>
+            </a:r>
+          </a:p>
+          <a:p>
+            <a:pPr>
+              <a:spcBef>
+                <a:spcPts val="0"/>
+              </a:spcBef>
+              <a:spcAft>
+                <a:spcPts val="0"/>
+              </a:spcAft>
+            </a:pPr>
+            <a:r>
+              <a:rPr sz="1200">
+                <a:solidFill>
+                  <a:srgbClr val="FFD866"/>
+                </a:solidFill>
+                <a:latin typeface="Courier New"/>
+              </a:rPr>
+              <a:t>from sklearn.linear_model import LogisticRegression</a:t>
+            </a:r>
+          </a:p>
+          <a:p>
+            <a:pPr>
+              <a:spcBef>
+                <a:spcPts val="0"/>
+              </a:spcBef>
+              <a:spcAft>
+                <a:spcPts val="0"/>
+              </a:spcAft>
+            </a:pPr>
+            <a:r>
+              <a:rPr sz="1200">
+                <a:solidFill>
+                  <a:srgbClr val="FFD866"/>
+                </a:solidFill>
+                <a:latin typeface="Courier New"/>
+              </a:rPr>
+              <a:t>from sklearn.svm import SVC</a:t>
+            </a:r>
+          </a:p>
+          <a:p>
+            <a:pPr>
+              <a:spcBef>
+                <a:spcPts val="0"/>
+              </a:spcBef>
+              <a:spcAft>
+                <a:spcPts val="0"/>
+              </a:spcAft>
+            </a:pPr>
+            <a:r>
+              <a:rPr sz="1200">
+                <a:solidFill>
+                  <a:srgbClr val="50FA7B"/>
+                </a:solidFill>
+                <a:latin typeface="Courier New"/>
+              </a:rPr>
+              <a:t/>
+            </a:r>
+          </a:p>
+          <a:p>
+            <a:pPr>
+              <a:spcBef>
+                <a:spcPts val="0"/>
+              </a:spcBef>
+              <a:spcAft>
+                <a:spcPts val="0"/>
+              </a:spcAft>
+            </a:pPr>
+            <a:r>
+              <a:rPr sz="1200">
+                <a:solidFill>
+                  <a:srgbClr val="50FA7B"/>
+                </a:solidFill>
+                <a:latin typeface="Courier New"/>
+              </a:rPr>
+              <a:t>X_train, X_test, y_train, y_test = train_test_split(</a:t>
+            </a:r>
+          </a:p>
+          <a:p>
+            <a:pPr>
+              <a:spcBef>
+                <a:spcPts val="0"/>
+              </a:spcBef>
+              <a:spcAft>
+                <a:spcPts val="0"/>
+              </a:spcAft>
+            </a:pPr>
+            <a:r>
+              <a:rPr sz="1200">
+                <a:solidFill>
+                  <a:srgbClr val="50FA7B"/>
+                </a:solidFill>
+                <a:latin typeface="Courier New"/>
+              </a:rPr>
+              <a:t>    X, y, test_size=0.2, stratify=y</a:t>
+            </a:r>
+          </a:p>
+          <a:p>
+            <a:pPr>
+              <a:spcBef>
+                <a:spcPts val="0"/>
+              </a:spcBef>
+              <a:spcAft>
+                <a:spcPts val="0"/>
+              </a:spcAft>
+            </a:pPr>
+            <a:r>
+              <a:rPr sz="1200">
+                <a:solidFill>
+                  <a:srgbClr val="50FA7B"/>
+                </a:solidFill>
+                <a:latin typeface="Courier New"/>
+              </a:rPr>
+              <a:t>)</a:t>
+            </a:r>
+          </a:p>
+          <a:p>
+            <a:pPr>
+              <a:spcBef>
+                <a:spcPts val="0"/>
+              </a:spcBef>
+              <a:spcAft>
+                <a:spcPts val="0"/>
+              </a:spcAft>
+            </a:pPr>
+            <a:r>
+              <a:rPr sz="1200">
+                <a:solidFill>
+                  <a:srgbClr val="50FA7B"/>
+                </a:solidFill>
+                <a:latin typeface="Courier New"/>
+              </a:rPr>
+              <a:t/>
+            </a:r>
+          </a:p>
+          <a:p>
+            <a:pPr>
+              <a:spcBef>
+                <a:spcPts val="0"/>
+              </a:spcBef>
+              <a:spcAft>
+                <a:spcPts val="0"/>
+              </a:spcAft>
+            </a:pPr>
+            <a:r>
+              <a:rPr sz="1200">
+                <a:solidFill>
+                  <a:srgbClr val="8888AA"/>
+                </a:solidFill>
+                <a:latin typeface="Courier New"/>
+              </a:rPr>
+              <a:t># Train classifiers</a:t>
+            </a:r>
+          </a:p>
+          <a:p>
+            <a:pPr>
+              <a:spcBef>
+                <a:spcPts val="0"/>
+              </a:spcBef>
+              <a:spcAft>
+                <a:spcPts val="0"/>
+              </a:spcAft>
+            </a:pPr>
+            <a:r>
+              <a:rPr sz="1200">
+                <a:solidFill>
+                  <a:srgbClr val="50FA7B"/>
+                </a:solidFill>
+                <a:latin typeface="Courier New"/>
+              </a:rPr>
+              <a:t>nb = MultinomialNB().fit(X_tr, y_train)</a:t>
+            </a:r>
+          </a:p>
+          <a:p>
+            <a:pPr>
+              <a:spcBef>
+                <a:spcPts val="0"/>
+              </a:spcBef>
+              <a:spcAft>
+                <a:spcPts val="0"/>
+              </a:spcAft>
+            </a:pPr>
+            <a:r>
+              <a:rPr sz="1200">
+                <a:solidFill>
+                  <a:srgbClr val="50FA7B"/>
+                </a:solidFill>
+                <a:latin typeface="Courier New"/>
+              </a:rPr>
+              <a:t>lr = LogisticRegression().fit(X_tr, y_train)</a:t>
+            </a:r>
+          </a:p>
+          <a:p>
+            <a:pPr>
+              <a:spcBef>
+                <a:spcPts val="0"/>
+              </a:spcBef>
+              <a:spcAft>
+                <a:spcPts val="0"/>
+              </a:spcAft>
+            </a:pPr>
+            <a:r>
+              <a:rPr sz="1200">
+                <a:solidFill>
+                  <a:srgbClr val="50FA7B"/>
+                </a:solidFill>
+                <a:latin typeface="Courier New"/>
+              </a:rPr>
+              <a:t>svm = SVC(kernel='linear').fit(X_tr, y_train)  # 93.81%</a:t>
             </a:r>
           </a:p>
         </p:txBody>
